--- a/results/deck/LOEO_발표자료.pptx
+++ b/results/deck/LOEO_발표자료.pptx
@@ -8254,19 +8254,19 @@
         </p:nvGraphicFramePr>
         <p:xfrm>
           <a:off x="640080" y="2615184"/>
-          <a:ext cx="7132320" cy="914400"/>
+          <a:ext cx="7315200" cy="914400"/>
         </p:xfrm>
         <a:graphic>
           <a:graphicData uri="http://schemas.openxmlformats.org/drawingml/2006/table">
             <a:tbl>
               <a:tblPr/>
               <a:tblGrid>
-                <a:gridCol w="2103120"/>
-                <a:gridCol w="1828800"/>
-                <a:gridCol w="2103120"/>
-                <a:gridCol w="1097280"/>
+                <a:gridCol w="1965960"/>
+                <a:gridCol w="1783080"/>
+                <a:gridCol w="2057400"/>
+                <a:gridCol w="1508760"/>
               </a:tblGrid>
-              <a:tr h="342900">
+              <a:tr h="324612">
                 <a:tc>
                   <a:txBody>
                     <a:bodyPr/>
@@ -8540,7 +8540,269 @@
                   </a:tcPr>
                 </a:tc>
               </a:tr>
-              <a:tr h="342900">
+              <a:tr h="324612">
+                <a:tc>
+                  <a:txBody>
+                    <a:bodyPr/>
+                    <a:lstStyle/>
+                    <a:p>
+                      <a:pPr algn="ctr" indent="0" marL="0">
+                        <a:buNone/>
+                      </a:pPr>
+                      <a:r>
+                        <a:rPr lang="en-US" sz="1050" dirty="0">
+                          <a:solidFill>
+                            <a:srgbClr val="2E2422"/>
+                          </a:solidFill>
+                          <a:latin typeface="Calibri" pitchFamily="34" charset="0"/>
+                          <a:ea typeface="Calibri" pitchFamily="34" charset="-122"/>
+                          <a:cs typeface="Calibri" pitchFamily="34" charset="-120"/>
+                        </a:rPr>
+                        <a:t>LQ 사전 가중 AUC</a:t>
+                      </a:r>
+                      <a:endParaRPr lang="en-US" sz="1050" dirty="0">
+                        <a:latin typeface="Calibri" charset="0"/>
+                        <a:ea typeface="Calibri" charset="0"/>
+                        <a:cs typeface="Calibri" charset="0"/>
+                      </a:endParaRPr>
+                    </a:p>
+                  </a:txBody>
+                  <a:tcPr marL="91440" marR="91440" marT="45720" marB="45720" anchor="ctr">
+                    <a:lnL w="6350" cap="flat" cmpd="sng" algn="ctr">
+                      <a:solidFill>
+                        <a:srgbClr val="DCD6CC"/>
+                      </a:solidFill>
+                      <a:prstDash val="solid"/>
+                      <a:round/>
+                      <a:headEnd type="none" w="med" len="med"/>
+                      <a:tailEnd type="none" w="med" len="med"/>
+                    </a:lnL>
+                    <a:lnR w="6350" cap="flat" cmpd="sng" algn="ctr">
+                      <a:solidFill>
+                        <a:srgbClr val="DCD6CC"/>
+                      </a:solidFill>
+                      <a:prstDash val="solid"/>
+                      <a:round/>
+                      <a:headEnd type="none" w="med" len="med"/>
+                      <a:tailEnd type="none" w="med" len="med"/>
+                    </a:lnR>
+                    <a:lnT w="6350" cap="flat" cmpd="sng" algn="ctr">
+                      <a:solidFill>
+                        <a:srgbClr val="DCD6CC"/>
+                      </a:solidFill>
+                      <a:prstDash val="solid"/>
+                      <a:round/>
+                      <a:headEnd type="none" w="med" len="med"/>
+                      <a:tailEnd type="none" w="med" len="med"/>
+                    </a:lnT>
+                    <a:lnB w="6350" cap="flat" cmpd="sng" algn="ctr">
+                      <a:solidFill>
+                        <a:srgbClr val="DCD6CC"/>
+                      </a:solidFill>
+                      <a:prstDash val="solid"/>
+                      <a:round/>
+                      <a:headEnd type="none" w="med" len="med"/>
+                      <a:tailEnd type="none" w="med" len="med"/>
+                    </a:lnB>
+                  </a:tcPr>
+                </a:tc>
+                <a:tc>
+                  <a:txBody>
+                    <a:bodyPr/>
+                    <a:lstStyle/>
+                    <a:p>
+                      <a:pPr algn="ctr" indent="0" marL="0">
+                        <a:buNone/>
+                      </a:pPr>
+                      <a:r>
+                        <a:rPr lang="en-US" sz="1050" dirty="0">
+                          <a:solidFill>
+                            <a:srgbClr val="2E2422"/>
+                          </a:solidFill>
+                          <a:latin typeface="Calibri" pitchFamily="34" charset="0"/>
+                          <a:ea typeface="Calibri" pitchFamily="34" charset="-122"/>
+                          <a:cs typeface="Calibri" pitchFamily="34" charset="-120"/>
+                        </a:rPr>
+                        <a:t>0.7698</a:t>
+                      </a:r>
+                      <a:endParaRPr lang="en-US" sz="1050" dirty="0">
+                        <a:latin typeface="Calibri" charset="0"/>
+                        <a:ea typeface="Calibri" charset="0"/>
+                        <a:cs typeface="Calibri" charset="0"/>
+                      </a:endParaRPr>
+                    </a:p>
+                  </a:txBody>
+                  <a:tcPr marL="91440" marR="91440" marT="45720" marB="45720" anchor="ctr">
+                    <a:lnL w="6350" cap="flat" cmpd="sng" algn="ctr">
+                      <a:solidFill>
+                        <a:srgbClr val="DCD6CC"/>
+                      </a:solidFill>
+                      <a:prstDash val="solid"/>
+                      <a:round/>
+                      <a:headEnd type="none" w="med" len="med"/>
+                      <a:tailEnd type="none" w="med" len="med"/>
+                    </a:lnL>
+                    <a:lnR w="6350" cap="flat" cmpd="sng" algn="ctr">
+                      <a:solidFill>
+                        <a:srgbClr val="DCD6CC"/>
+                      </a:solidFill>
+                      <a:prstDash val="solid"/>
+                      <a:round/>
+                      <a:headEnd type="none" w="med" len="med"/>
+                      <a:tailEnd type="none" w="med" len="med"/>
+                    </a:lnR>
+                    <a:lnT w="6350" cap="flat" cmpd="sng" algn="ctr">
+                      <a:solidFill>
+                        <a:srgbClr val="DCD6CC"/>
+                      </a:solidFill>
+                      <a:prstDash val="solid"/>
+                      <a:round/>
+                      <a:headEnd type="none" w="med" len="med"/>
+                      <a:tailEnd type="none" w="med" len="med"/>
+                    </a:lnT>
+                    <a:lnB w="6350" cap="flat" cmpd="sng" algn="ctr">
+                      <a:solidFill>
+                        <a:srgbClr val="DCD6CC"/>
+                      </a:solidFill>
+                      <a:prstDash val="solid"/>
+                      <a:round/>
+                      <a:headEnd type="none" w="med" len="med"/>
+                      <a:tailEnd type="none" w="med" len="med"/>
+                    </a:lnB>
+                  </a:tcPr>
+                </a:tc>
+                <a:tc>
+                  <a:txBody>
+                    <a:bodyPr/>
+                    <a:lstStyle/>
+                    <a:p>
+                      <a:pPr algn="ctr" indent="0" marL="0">
+                        <a:buNone/>
+                      </a:pPr>
+                      <a:r>
+                        <a:rPr lang="en-US" sz="1050" b="1" dirty="0">
+                          <a:solidFill>
+                            <a:srgbClr val="2E2422"/>
+                          </a:solidFill>
+                          <a:latin typeface="Calibri" pitchFamily="34" charset="0"/>
+                          <a:ea typeface="Calibri" pitchFamily="34" charset="-122"/>
+                          <a:cs typeface="Calibri" pitchFamily="34" charset="-120"/>
+                        </a:rPr>
+                        <a:t>0.7698</a:t>
+                      </a:r>
+                      <a:endParaRPr lang="en-US" sz="1050" dirty="0">
+                        <a:latin typeface="Calibri" charset="0"/>
+                        <a:ea typeface="Calibri" charset="0"/>
+                        <a:cs typeface="Calibri" charset="0"/>
+                      </a:endParaRPr>
+                    </a:p>
+                  </a:txBody>
+                  <a:tcPr marL="91440" marR="91440" marT="45720" marB="45720" anchor="ctr">
+                    <a:lnL w="6350" cap="flat" cmpd="sng" algn="ctr">
+                      <a:solidFill>
+                        <a:srgbClr val="DCD6CC"/>
+                      </a:solidFill>
+                      <a:prstDash val="solid"/>
+                      <a:round/>
+                      <a:headEnd type="none" w="med" len="med"/>
+                      <a:tailEnd type="none" w="med" len="med"/>
+                    </a:lnL>
+                    <a:lnR w="6350" cap="flat" cmpd="sng" algn="ctr">
+                      <a:solidFill>
+                        <a:srgbClr val="DCD6CC"/>
+                      </a:solidFill>
+                      <a:prstDash val="solid"/>
+                      <a:round/>
+                      <a:headEnd type="none" w="med" len="med"/>
+                      <a:tailEnd type="none" w="med" len="med"/>
+                    </a:lnR>
+                    <a:lnT w="6350" cap="flat" cmpd="sng" algn="ctr">
+                      <a:solidFill>
+                        <a:srgbClr val="DCD6CC"/>
+                      </a:solidFill>
+                      <a:prstDash val="solid"/>
+                      <a:round/>
+                      <a:headEnd type="none" w="med" len="med"/>
+                      <a:tailEnd type="none" w="med" len="med"/>
+                    </a:lnT>
+                    <a:lnB w="6350" cap="flat" cmpd="sng" algn="ctr">
+                      <a:solidFill>
+                        <a:srgbClr val="DCD6CC"/>
+                      </a:solidFill>
+                      <a:prstDash val="solid"/>
+                      <a:round/>
+                      <a:headEnd type="none" w="med" len="med"/>
+                      <a:tailEnd type="none" w="med" len="med"/>
+                    </a:lnB>
+                  </a:tcPr>
+                </a:tc>
+                <a:tc>
+                  <a:txBody>
+                    <a:bodyPr/>
+                    <a:lstStyle/>
+                    <a:p>
+                      <a:pPr algn="ctr" indent="0" marL="0">
+                        <a:buNone/>
+                      </a:pPr>
+                      <a:r>
+                        <a:rPr lang="en-US" sz="1050" dirty="0">
+                          <a:solidFill>
+                            <a:srgbClr val="7A6A63"/>
+                          </a:solidFill>
+                          <a:latin typeface="Calibri" pitchFamily="34" charset="0"/>
+                          <a:ea typeface="Calibri" pitchFamily="34" charset="-122"/>
+                          <a:cs typeface="Calibri" pitchFamily="34" charset="-120"/>
+                        </a:rPr>
+                        <a:t>변화 없음 (예측대로)</a:t>
+                      </a:r>
+                      <a:endParaRPr lang="en-US" sz="1050" dirty="0">
+                        <a:latin typeface="Calibri" charset="0"/>
+                        <a:ea typeface="Calibri" charset="0"/>
+                        <a:cs typeface="Calibri" charset="0"/>
+                      </a:endParaRPr>
+                    </a:p>
+                  </a:txBody>
+                  <a:tcPr marL="91440" marR="91440" marT="45720" marB="45720" anchor="ctr">
+                    <a:lnL w="6350" cap="flat" cmpd="sng" algn="ctr">
+                      <a:solidFill>
+                        <a:srgbClr val="DCD6CC"/>
+                      </a:solidFill>
+                      <a:prstDash val="solid"/>
+                      <a:round/>
+                      <a:headEnd type="none" w="med" len="med"/>
+                      <a:tailEnd type="none" w="med" len="med"/>
+                    </a:lnL>
+                    <a:lnR w="6350" cap="flat" cmpd="sng" algn="ctr">
+                      <a:solidFill>
+                        <a:srgbClr val="DCD6CC"/>
+                      </a:solidFill>
+                      <a:prstDash val="solid"/>
+                      <a:round/>
+                      <a:headEnd type="none" w="med" len="med"/>
+                      <a:tailEnd type="none" w="med" len="med"/>
+                    </a:lnR>
+                    <a:lnT w="6350" cap="flat" cmpd="sng" algn="ctr">
+                      <a:solidFill>
+                        <a:srgbClr val="DCD6CC"/>
+                      </a:solidFill>
+                      <a:prstDash val="solid"/>
+                      <a:round/>
+                      <a:headEnd type="none" w="med" len="med"/>
+                      <a:tailEnd type="none" w="med" len="med"/>
+                    </a:lnT>
+                    <a:lnB w="6350" cap="flat" cmpd="sng" algn="ctr">
+                      <a:solidFill>
+                        <a:srgbClr val="DCD6CC"/>
+                      </a:solidFill>
+                      <a:prstDash val="solid"/>
+                      <a:round/>
+                      <a:headEnd type="none" w="med" len="med"/>
+                      <a:tailEnd type="none" w="med" len="med"/>
+                    </a:lnB>
+                  </a:tcPr>
+                </a:tc>
+              </a:tr>
+              <a:tr h="324612">
                 <a:tc>
                   <a:txBody>
                     <a:bodyPr/>
@@ -8802,269 +9064,7 @@
                   </a:tcPr>
                 </a:tc>
               </a:tr>
-              <a:tr h="342900">
-                <a:tc>
-                  <a:txBody>
-                    <a:bodyPr/>
-                    <a:lstStyle/>
-                    <a:p>
-                      <a:pPr algn="ctr" indent="0" marL="0">
-                        <a:buNone/>
-                      </a:pPr>
-                      <a:r>
-                        <a:rPr lang="en-US" sz="1050" dirty="0">
-                          <a:solidFill>
-                            <a:srgbClr val="2E2422"/>
-                          </a:solidFill>
-                          <a:latin typeface="Calibri" pitchFamily="34" charset="0"/>
-                          <a:ea typeface="Calibri" pitchFamily="34" charset="-122"/>
-                          <a:cs typeface="Calibri" pitchFamily="34" charset="-120"/>
-                        </a:rPr>
-                        <a:t>LQ prior 가중 AUC</a:t>
-                      </a:r>
-                      <a:endParaRPr lang="en-US" sz="1050" dirty="0">
-                        <a:latin typeface="Calibri" charset="0"/>
-                        <a:ea typeface="Calibri" charset="0"/>
-                        <a:cs typeface="Calibri" charset="0"/>
-                      </a:endParaRPr>
-                    </a:p>
-                  </a:txBody>
-                  <a:tcPr marL="91440" marR="91440" marT="45720" marB="45720" anchor="ctr">
-                    <a:lnL w="6350" cap="flat" cmpd="sng" algn="ctr">
-                      <a:solidFill>
-                        <a:srgbClr val="DCD6CC"/>
-                      </a:solidFill>
-                      <a:prstDash val="solid"/>
-                      <a:round/>
-                      <a:headEnd type="none" w="med" len="med"/>
-                      <a:tailEnd type="none" w="med" len="med"/>
-                    </a:lnL>
-                    <a:lnR w="6350" cap="flat" cmpd="sng" algn="ctr">
-                      <a:solidFill>
-                        <a:srgbClr val="DCD6CC"/>
-                      </a:solidFill>
-                      <a:prstDash val="solid"/>
-                      <a:round/>
-                      <a:headEnd type="none" w="med" len="med"/>
-                      <a:tailEnd type="none" w="med" len="med"/>
-                    </a:lnR>
-                    <a:lnT w="6350" cap="flat" cmpd="sng" algn="ctr">
-                      <a:solidFill>
-                        <a:srgbClr val="DCD6CC"/>
-                      </a:solidFill>
-                      <a:prstDash val="solid"/>
-                      <a:round/>
-                      <a:headEnd type="none" w="med" len="med"/>
-                      <a:tailEnd type="none" w="med" len="med"/>
-                    </a:lnT>
-                    <a:lnB w="6350" cap="flat" cmpd="sng" algn="ctr">
-                      <a:solidFill>
-                        <a:srgbClr val="DCD6CC"/>
-                      </a:solidFill>
-                      <a:prstDash val="solid"/>
-                      <a:round/>
-                      <a:headEnd type="none" w="med" len="med"/>
-                      <a:tailEnd type="none" w="med" len="med"/>
-                    </a:lnB>
-                  </a:tcPr>
-                </a:tc>
-                <a:tc>
-                  <a:txBody>
-                    <a:bodyPr/>
-                    <a:lstStyle/>
-                    <a:p>
-                      <a:pPr algn="ctr" indent="0" marL="0">
-                        <a:buNone/>
-                      </a:pPr>
-                      <a:r>
-                        <a:rPr lang="en-US" sz="1050" dirty="0">
-                          <a:solidFill>
-                            <a:srgbClr val="2E2422"/>
-                          </a:solidFill>
-                          <a:latin typeface="Calibri" pitchFamily="34" charset="0"/>
-                          <a:ea typeface="Calibri" pitchFamily="34" charset="-122"/>
-                          <a:cs typeface="Calibri" pitchFamily="34" charset="-120"/>
-                        </a:rPr>
-                        <a:t>0.7698</a:t>
-                      </a:r>
-                      <a:endParaRPr lang="en-US" sz="1050" dirty="0">
-                        <a:latin typeface="Calibri" charset="0"/>
-                        <a:ea typeface="Calibri" charset="0"/>
-                        <a:cs typeface="Calibri" charset="0"/>
-                      </a:endParaRPr>
-                    </a:p>
-                  </a:txBody>
-                  <a:tcPr marL="91440" marR="91440" marT="45720" marB="45720" anchor="ctr">
-                    <a:lnL w="6350" cap="flat" cmpd="sng" algn="ctr">
-                      <a:solidFill>
-                        <a:srgbClr val="DCD6CC"/>
-                      </a:solidFill>
-                      <a:prstDash val="solid"/>
-                      <a:round/>
-                      <a:headEnd type="none" w="med" len="med"/>
-                      <a:tailEnd type="none" w="med" len="med"/>
-                    </a:lnL>
-                    <a:lnR w="6350" cap="flat" cmpd="sng" algn="ctr">
-                      <a:solidFill>
-                        <a:srgbClr val="DCD6CC"/>
-                      </a:solidFill>
-                      <a:prstDash val="solid"/>
-                      <a:round/>
-                      <a:headEnd type="none" w="med" len="med"/>
-                      <a:tailEnd type="none" w="med" len="med"/>
-                    </a:lnR>
-                    <a:lnT w="6350" cap="flat" cmpd="sng" algn="ctr">
-                      <a:solidFill>
-                        <a:srgbClr val="DCD6CC"/>
-                      </a:solidFill>
-                      <a:prstDash val="solid"/>
-                      <a:round/>
-                      <a:headEnd type="none" w="med" len="med"/>
-                      <a:tailEnd type="none" w="med" len="med"/>
-                    </a:lnT>
-                    <a:lnB w="6350" cap="flat" cmpd="sng" algn="ctr">
-                      <a:solidFill>
-                        <a:srgbClr val="DCD6CC"/>
-                      </a:solidFill>
-                      <a:prstDash val="solid"/>
-                      <a:round/>
-                      <a:headEnd type="none" w="med" len="med"/>
-                      <a:tailEnd type="none" w="med" len="med"/>
-                    </a:lnB>
-                  </a:tcPr>
-                </a:tc>
-                <a:tc>
-                  <a:txBody>
-                    <a:bodyPr/>
-                    <a:lstStyle/>
-                    <a:p>
-                      <a:pPr algn="ctr" indent="0" marL="0">
-                        <a:buNone/>
-                      </a:pPr>
-                      <a:r>
-                        <a:rPr lang="en-US" sz="1050" b="1" dirty="0">
-                          <a:solidFill>
-                            <a:srgbClr val="2E2422"/>
-                          </a:solidFill>
-                          <a:latin typeface="Calibri" pitchFamily="34" charset="0"/>
-                          <a:ea typeface="Calibri" pitchFamily="34" charset="-122"/>
-                          <a:cs typeface="Calibri" pitchFamily="34" charset="-120"/>
-                        </a:rPr>
-                        <a:t>0.7698</a:t>
-                      </a:r>
-                      <a:endParaRPr lang="en-US" sz="1050" dirty="0">
-                        <a:latin typeface="Calibri" charset="0"/>
-                        <a:ea typeface="Calibri" charset="0"/>
-                        <a:cs typeface="Calibri" charset="0"/>
-                      </a:endParaRPr>
-                    </a:p>
-                  </a:txBody>
-                  <a:tcPr marL="91440" marR="91440" marT="45720" marB="45720" anchor="ctr">
-                    <a:lnL w="6350" cap="flat" cmpd="sng" algn="ctr">
-                      <a:solidFill>
-                        <a:srgbClr val="DCD6CC"/>
-                      </a:solidFill>
-                      <a:prstDash val="solid"/>
-                      <a:round/>
-                      <a:headEnd type="none" w="med" len="med"/>
-                      <a:tailEnd type="none" w="med" len="med"/>
-                    </a:lnL>
-                    <a:lnR w="6350" cap="flat" cmpd="sng" algn="ctr">
-                      <a:solidFill>
-                        <a:srgbClr val="DCD6CC"/>
-                      </a:solidFill>
-                      <a:prstDash val="solid"/>
-                      <a:round/>
-                      <a:headEnd type="none" w="med" len="med"/>
-                      <a:tailEnd type="none" w="med" len="med"/>
-                    </a:lnR>
-                    <a:lnT w="6350" cap="flat" cmpd="sng" algn="ctr">
-                      <a:solidFill>
-                        <a:srgbClr val="DCD6CC"/>
-                      </a:solidFill>
-                      <a:prstDash val="solid"/>
-                      <a:round/>
-                      <a:headEnd type="none" w="med" len="med"/>
-                      <a:tailEnd type="none" w="med" len="med"/>
-                    </a:lnT>
-                    <a:lnB w="6350" cap="flat" cmpd="sng" algn="ctr">
-                      <a:solidFill>
-                        <a:srgbClr val="DCD6CC"/>
-                      </a:solidFill>
-                      <a:prstDash val="solid"/>
-                      <a:round/>
-                      <a:headEnd type="none" w="med" len="med"/>
-                      <a:tailEnd type="none" w="med" len="med"/>
-                    </a:lnB>
-                  </a:tcPr>
-                </a:tc>
-                <a:tc>
-                  <a:txBody>
-                    <a:bodyPr/>
-                    <a:lstStyle/>
-                    <a:p>
-                      <a:pPr algn="ctr" indent="0" marL="0">
-                        <a:buNone/>
-                      </a:pPr>
-                      <a:r>
-                        <a:rPr lang="en-US" sz="1050" dirty="0">
-                          <a:solidFill>
-                            <a:srgbClr val="7A6A63"/>
-                          </a:solidFill>
-                          <a:latin typeface="Calibri" pitchFamily="34" charset="0"/>
-                          <a:ea typeface="Calibri" pitchFamily="34" charset="-122"/>
-                          <a:cs typeface="Calibri" pitchFamily="34" charset="-120"/>
-                        </a:rPr>
-                        <a:t>변화 없음 (예측대로)</a:t>
-                      </a:r>
-                      <a:endParaRPr lang="en-US" sz="1050" dirty="0">
-                        <a:latin typeface="Calibri" charset="0"/>
-                        <a:ea typeface="Calibri" charset="0"/>
-                        <a:cs typeface="Calibri" charset="0"/>
-                      </a:endParaRPr>
-                    </a:p>
-                  </a:txBody>
-                  <a:tcPr marL="91440" marR="91440" marT="45720" marB="45720" anchor="ctr">
-                    <a:lnL w="6350" cap="flat" cmpd="sng" algn="ctr">
-                      <a:solidFill>
-                        <a:srgbClr val="DCD6CC"/>
-                      </a:solidFill>
-                      <a:prstDash val="solid"/>
-                      <a:round/>
-                      <a:headEnd type="none" w="med" len="med"/>
-                      <a:tailEnd type="none" w="med" len="med"/>
-                    </a:lnL>
-                    <a:lnR w="6350" cap="flat" cmpd="sng" algn="ctr">
-                      <a:solidFill>
-                        <a:srgbClr val="DCD6CC"/>
-                      </a:solidFill>
-                      <a:prstDash val="solid"/>
-                      <a:round/>
-                      <a:headEnd type="none" w="med" len="med"/>
-                      <a:tailEnd type="none" w="med" len="med"/>
-                    </a:lnR>
-                    <a:lnT w="6350" cap="flat" cmpd="sng" algn="ctr">
-                      <a:solidFill>
-                        <a:srgbClr val="DCD6CC"/>
-                      </a:solidFill>
-                      <a:prstDash val="solid"/>
-                      <a:round/>
-                      <a:headEnd type="none" w="med" len="med"/>
-                      <a:tailEnd type="none" w="med" len="med"/>
-                    </a:lnT>
-                    <a:lnB w="6350" cap="flat" cmpd="sng" algn="ctr">
-                      <a:solidFill>
-                        <a:srgbClr val="DCD6CC"/>
-                      </a:solidFill>
-                      <a:prstDash val="solid"/>
-                      <a:round/>
-                      <a:headEnd type="none" w="med" len="med"/>
-                      <a:tailEnd type="none" w="med" len="med"/>
-                    </a:lnB>
-                  </a:tcPr>
-                </a:tc>
-              </a:tr>
-              <a:tr h="342900">
+              <a:tr h="324612">
                 <a:tc>
                   <a:txBody>
                     <a:bodyPr/>
@@ -9326,7 +9326,7 @@
                   </a:tcPr>
                 </a:tc>
               </a:tr>
-              <a:tr h="342900">
+              <a:tr h="324612">
                 <a:tc>
                   <a:txBody>
                     <a:bodyPr/>
@@ -9344,7 +9344,7 @@
                           <a:ea typeface="Calibri" pitchFamily="34" charset="-122"/>
                           <a:cs typeface="Calibri" pitchFamily="34" charset="-120"/>
                         </a:rPr>
-                        <a:t>LQ BCE (prior)</a:t>
+                        <a:t>LQ BCE (사전)</a:t>
                       </a:r>
                       <a:endParaRPr lang="en-US" sz="1050" dirty="0">
                         <a:latin typeface="Calibri" charset="0"/>
@@ -9588,7 +9588,7 @@
                   </a:tcPr>
                 </a:tc>
               </a:tr>
-              <a:tr h="342900">
+              <a:tr h="324612">
                 <a:tc>
                   <a:txBody>
                     <a:bodyPr/>
@@ -9850,7 +9850,269 @@
                   </a:tcPr>
                 </a:tc>
               </a:tr>
-              <a:tr h="342900">
+              <a:tr h="324612">
+                <a:tc>
+                  <a:txBody>
+                    <a:bodyPr/>
+                    <a:lstStyle/>
+                    <a:p>
+                      <a:pPr algn="ctr" indent="0" marL="0">
+                        <a:buNone/>
+                      </a:pPr>
+                      <a:r>
+                        <a:rPr lang="en-US" sz="1050" dirty="0">
+                          <a:solidFill>
+                            <a:srgbClr val="2E2422"/>
+                          </a:solidFill>
+                          <a:latin typeface="Calibri" pitchFamily="34" charset="0"/>
+                          <a:ea typeface="Calibri" pitchFamily="34" charset="-122"/>
+                          <a:cs typeface="Calibri" pitchFamily="34" charset="-120"/>
+                        </a:rPr>
+                        <a:t>LS 사전 가중 AUC</a:t>
+                      </a:r>
+                      <a:endParaRPr lang="en-US" sz="1050" dirty="0">
+                        <a:latin typeface="Calibri" charset="0"/>
+                        <a:ea typeface="Calibri" charset="0"/>
+                        <a:cs typeface="Calibri" charset="0"/>
+                      </a:endParaRPr>
+                    </a:p>
+                  </a:txBody>
+                  <a:tcPr marL="91440" marR="91440" marT="45720" marB="45720" anchor="ctr">
+                    <a:lnL w="6350" cap="flat" cmpd="sng" algn="ctr">
+                      <a:solidFill>
+                        <a:srgbClr val="DCD6CC"/>
+                      </a:solidFill>
+                      <a:prstDash val="solid"/>
+                      <a:round/>
+                      <a:headEnd type="none" w="med" len="med"/>
+                      <a:tailEnd type="none" w="med" len="med"/>
+                    </a:lnL>
+                    <a:lnR w="6350" cap="flat" cmpd="sng" algn="ctr">
+                      <a:solidFill>
+                        <a:srgbClr val="DCD6CC"/>
+                      </a:solidFill>
+                      <a:prstDash val="solid"/>
+                      <a:round/>
+                      <a:headEnd type="none" w="med" len="med"/>
+                      <a:tailEnd type="none" w="med" len="med"/>
+                    </a:lnR>
+                    <a:lnT w="6350" cap="flat" cmpd="sng" algn="ctr">
+                      <a:solidFill>
+                        <a:srgbClr val="DCD6CC"/>
+                      </a:solidFill>
+                      <a:prstDash val="solid"/>
+                      <a:round/>
+                      <a:headEnd type="none" w="med" len="med"/>
+                      <a:tailEnd type="none" w="med" len="med"/>
+                    </a:lnT>
+                    <a:lnB w="6350" cap="flat" cmpd="sng" algn="ctr">
+                      <a:solidFill>
+                        <a:srgbClr val="DCD6CC"/>
+                      </a:solidFill>
+                      <a:prstDash val="solid"/>
+                      <a:round/>
+                      <a:headEnd type="none" w="med" len="med"/>
+                      <a:tailEnd type="none" w="med" len="med"/>
+                    </a:lnB>
+                  </a:tcPr>
+                </a:tc>
+                <a:tc>
+                  <a:txBody>
+                    <a:bodyPr/>
+                    <a:lstStyle/>
+                    <a:p>
+                      <a:pPr algn="ctr" indent="0" marL="0">
+                        <a:buNone/>
+                      </a:pPr>
+                      <a:r>
+                        <a:rPr lang="en-US" sz="1050" dirty="0">
+                          <a:solidFill>
+                            <a:srgbClr val="2E2422"/>
+                          </a:solidFill>
+                          <a:latin typeface="Calibri" pitchFamily="34" charset="0"/>
+                          <a:ea typeface="Calibri" pitchFamily="34" charset="-122"/>
+                          <a:cs typeface="Calibri" pitchFamily="34" charset="-120"/>
+                        </a:rPr>
+                        <a:t>0.8400</a:t>
+                      </a:r>
+                      <a:endParaRPr lang="en-US" sz="1050" dirty="0">
+                        <a:latin typeface="Calibri" charset="0"/>
+                        <a:ea typeface="Calibri" charset="0"/>
+                        <a:cs typeface="Calibri" charset="0"/>
+                      </a:endParaRPr>
+                    </a:p>
+                  </a:txBody>
+                  <a:tcPr marL="91440" marR="91440" marT="45720" marB="45720" anchor="ctr">
+                    <a:lnL w="6350" cap="flat" cmpd="sng" algn="ctr">
+                      <a:solidFill>
+                        <a:srgbClr val="DCD6CC"/>
+                      </a:solidFill>
+                      <a:prstDash val="solid"/>
+                      <a:round/>
+                      <a:headEnd type="none" w="med" len="med"/>
+                      <a:tailEnd type="none" w="med" len="med"/>
+                    </a:lnL>
+                    <a:lnR w="6350" cap="flat" cmpd="sng" algn="ctr">
+                      <a:solidFill>
+                        <a:srgbClr val="DCD6CC"/>
+                      </a:solidFill>
+                      <a:prstDash val="solid"/>
+                      <a:round/>
+                      <a:headEnd type="none" w="med" len="med"/>
+                      <a:tailEnd type="none" w="med" len="med"/>
+                    </a:lnR>
+                    <a:lnT w="6350" cap="flat" cmpd="sng" algn="ctr">
+                      <a:solidFill>
+                        <a:srgbClr val="DCD6CC"/>
+                      </a:solidFill>
+                      <a:prstDash val="solid"/>
+                      <a:round/>
+                      <a:headEnd type="none" w="med" len="med"/>
+                      <a:tailEnd type="none" w="med" len="med"/>
+                    </a:lnT>
+                    <a:lnB w="6350" cap="flat" cmpd="sng" algn="ctr">
+                      <a:solidFill>
+                        <a:srgbClr val="DCD6CC"/>
+                      </a:solidFill>
+                      <a:prstDash val="solid"/>
+                      <a:round/>
+                      <a:headEnd type="none" w="med" len="med"/>
+                      <a:tailEnd type="none" w="med" len="med"/>
+                    </a:lnB>
+                  </a:tcPr>
+                </a:tc>
+                <a:tc>
+                  <a:txBody>
+                    <a:bodyPr/>
+                    <a:lstStyle/>
+                    <a:p>
+                      <a:pPr algn="ctr" indent="0" marL="0">
+                        <a:buNone/>
+                      </a:pPr>
+                      <a:r>
+                        <a:rPr lang="en-US" sz="1050" b="1" dirty="0">
+                          <a:solidFill>
+                            <a:srgbClr val="2E2422"/>
+                          </a:solidFill>
+                          <a:latin typeface="Calibri" pitchFamily="34" charset="0"/>
+                          <a:ea typeface="Calibri" pitchFamily="34" charset="-122"/>
+                          <a:cs typeface="Calibri" pitchFamily="34" charset="-120"/>
+                        </a:rPr>
+                        <a:t>0.8400</a:t>
+                      </a:r>
+                      <a:endParaRPr lang="en-US" sz="1050" dirty="0">
+                        <a:latin typeface="Calibri" charset="0"/>
+                        <a:ea typeface="Calibri" charset="0"/>
+                        <a:cs typeface="Calibri" charset="0"/>
+                      </a:endParaRPr>
+                    </a:p>
+                  </a:txBody>
+                  <a:tcPr marL="91440" marR="91440" marT="45720" marB="45720" anchor="ctr">
+                    <a:lnL w="6350" cap="flat" cmpd="sng" algn="ctr">
+                      <a:solidFill>
+                        <a:srgbClr val="DCD6CC"/>
+                      </a:solidFill>
+                      <a:prstDash val="solid"/>
+                      <a:round/>
+                      <a:headEnd type="none" w="med" len="med"/>
+                      <a:tailEnd type="none" w="med" len="med"/>
+                    </a:lnL>
+                    <a:lnR w="6350" cap="flat" cmpd="sng" algn="ctr">
+                      <a:solidFill>
+                        <a:srgbClr val="DCD6CC"/>
+                      </a:solidFill>
+                      <a:prstDash val="solid"/>
+                      <a:round/>
+                      <a:headEnd type="none" w="med" len="med"/>
+                      <a:tailEnd type="none" w="med" len="med"/>
+                    </a:lnR>
+                    <a:lnT w="6350" cap="flat" cmpd="sng" algn="ctr">
+                      <a:solidFill>
+                        <a:srgbClr val="DCD6CC"/>
+                      </a:solidFill>
+                      <a:prstDash val="solid"/>
+                      <a:round/>
+                      <a:headEnd type="none" w="med" len="med"/>
+                      <a:tailEnd type="none" w="med" len="med"/>
+                    </a:lnT>
+                    <a:lnB w="6350" cap="flat" cmpd="sng" algn="ctr">
+                      <a:solidFill>
+                        <a:srgbClr val="DCD6CC"/>
+                      </a:solidFill>
+                      <a:prstDash val="solid"/>
+                      <a:round/>
+                      <a:headEnd type="none" w="med" len="med"/>
+                      <a:tailEnd type="none" w="med" len="med"/>
+                    </a:lnB>
+                  </a:tcPr>
+                </a:tc>
+                <a:tc>
+                  <a:txBody>
+                    <a:bodyPr/>
+                    <a:lstStyle/>
+                    <a:p>
+                      <a:pPr algn="ctr" indent="0" marL="0">
+                        <a:buNone/>
+                      </a:pPr>
+                      <a:r>
+                        <a:rPr lang="en-US" sz="1050" dirty="0">
+                          <a:solidFill>
+                            <a:srgbClr val="7A6A63"/>
+                          </a:solidFill>
+                          <a:latin typeface="Calibri" pitchFamily="34" charset="0"/>
+                          <a:ea typeface="Calibri" pitchFamily="34" charset="-122"/>
+                          <a:cs typeface="Calibri" pitchFamily="34" charset="-120"/>
+                        </a:rPr>
+                        <a:t>완전히 동일 (0.00e+00)</a:t>
+                      </a:r>
+                      <a:endParaRPr lang="en-US" sz="1050" dirty="0">
+                        <a:latin typeface="Calibri" charset="0"/>
+                        <a:ea typeface="Calibri" charset="0"/>
+                        <a:cs typeface="Calibri" charset="0"/>
+                      </a:endParaRPr>
+                    </a:p>
+                  </a:txBody>
+                  <a:tcPr marL="91440" marR="91440" marT="45720" marB="45720" anchor="ctr">
+                    <a:lnL w="6350" cap="flat" cmpd="sng" algn="ctr">
+                      <a:solidFill>
+                        <a:srgbClr val="DCD6CC"/>
+                      </a:solidFill>
+                      <a:prstDash val="solid"/>
+                      <a:round/>
+                      <a:headEnd type="none" w="med" len="med"/>
+                      <a:tailEnd type="none" w="med" len="med"/>
+                    </a:lnL>
+                    <a:lnR w="6350" cap="flat" cmpd="sng" algn="ctr">
+                      <a:solidFill>
+                        <a:srgbClr val="DCD6CC"/>
+                      </a:solidFill>
+                      <a:prstDash val="solid"/>
+                      <a:round/>
+                      <a:headEnd type="none" w="med" len="med"/>
+                      <a:tailEnd type="none" w="med" len="med"/>
+                    </a:lnR>
+                    <a:lnT w="6350" cap="flat" cmpd="sng" algn="ctr">
+                      <a:solidFill>
+                        <a:srgbClr val="DCD6CC"/>
+                      </a:solidFill>
+                      <a:prstDash val="solid"/>
+                      <a:round/>
+                      <a:headEnd type="none" w="med" len="med"/>
+                      <a:tailEnd type="none" w="med" len="med"/>
+                    </a:lnT>
+                    <a:lnB w="6350" cap="flat" cmpd="sng" algn="ctr">
+                      <a:solidFill>
+                        <a:srgbClr val="DCD6CC"/>
+                      </a:solidFill>
+                      <a:prstDash val="solid"/>
+                      <a:round/>
+                      <a:headEnd type="none" w="med" len="med"/>
+                      <a:tailEnd type="none" w="med" len="med"/>
+                    </a:lnB>
+                  </a:tcPr>
+                </a:tc>
+              </a:tr>
+              <a:tr h="324612">
                 <a:tc>
                   <a:txBody>
                     <a:bodyPr/>
@@ -10124,12 +10386,12 @@
         </p:nvSpPr>
         <p:spPr>
           <a:xfrm>
-            <a:off x="8046720" y="2615184"/>
-            <a:ext cx="3520440" cy="2743200"/>
+            <a:off x="8183880" y="2615184"/>
+            <a:ext cx="3383280" cy="2606040"/>
           </a:xfrm>
           <a:prstGeom prst="roundRect">
             <a:avLst>
-              <a:gd name="adj" fmla="val 3000"/>
+              <a:gd name="adj" fmla="val 3158"/>
             </a:avLst>
           </a:prstGeom>
           <a:solidFill>
@@ -10151,8 +10413,8 @@
         </p:nvSpPr>
         <p:spPr>
           <a:xfrm>
-            <a:off x="8302752" y="2798064"/>
-            <a:ext cx="3017520" cy="274320"/>
+            <a:off x="8439912" y="2798064"/>
+            <a:ext cx="2880360" cy="274320"/>
           </a:xfrm>
           <a:prstGeom prst="rect">
             <a:avLst/>
@@ -10190,8 +10452,8 @@
         </p:nvSpPr>
         <p:spPr>
           <a:xfrm>
-            <a:off x="8302752" y="3163824"/>
-            <a:ext cx="3017520" cy="2011680"/>
+            <a:off x="8439912" y="3163824"/>
+            <a:ext cx="2880360" cy="1920240"/>
           </a:xfrm>
           <a:prstGeom prst="rect">
             <a:avLst/>
@@ -10261,12 +10523,12 @@
         </p:nvSpPr>
         <p:spPr>
           <a:xfrm>
-            <a:off x="640080" y="5559552"/>
-            <a:ext cx="7132320" cy="777240"/>
+            <a:off x="640080" y="5577840"/>
+            <a:ext cx="7315200" cy="731520"/>
           </a:xfrm>
           <a:prstGeom prst="roundRect">
             <a:avLst>
-              <a:gd name="adj" fmla="val 10588"/>
+              <a:gd name="adj" fmla="val 11250"/>
             </a:avLst>
           </a:prstGeom>
           <a:solidFill>
@@ -10288,8 +10550,8 @@
         </p:nvSpPr>
         <p:spPr>
           <a:xfrm>
-            <a:off x="914400" y="5779008"/>
-            <a:ext cx="6629400" cy="365760"/>
+            <a:off x="914400" y="5760720"/>
+            <a:ext cx="6766560" cy="384048"/>
           </a:xfrm>
           <a:prstGeom prst="rect">
             <a:avLst/>
@@ -10305,7 +10567,7 @@
               <a:buNone/>
             </a:pPr>
             <a:r>
-              <a:rPr lang="en-US" sz="1150" b="1" dirty="0">
+              <a:rPr lang="en-US" sz="1100" b="1" dirty="0">
                 <a:solidFill>
                   <a:srgbClr val="FFFFFF"/>
                 </a:solidFill>
@@ -10315,7 +10577,7 @@
               </a:rPr>
               <a:t>짝지은 부트스트랩 3,000회 — C0 − B0 = +0.0342,  95% 구간 [+0.0009, +0.0698],  P(차이 &gt; 0) = 0.978</a:t>
             </a:r>
-            <a:endParaRPr lang="en-US" sz="1150" dirty="0"/>
+            <a:endParaRPr lang="en-US" sz="1100" dirty="0"/>
           </a:p>
         </p:txBody>
       </p:sp>
@@ -14622,11 +14884,11 @@
         <p:spPr>
           <a:xfrm>
             <a:off x="777240" y="1664208"/>
-            <a:ext cx="5212080" cy="3200400"/>
+            <a:ext cx="5212080" cy="3520440"/>
           </a:xfrm>
           <a:prstGeom prst="roundRect">
             <a:avLst>
-              <a:gd name="adj" fmla="val 2571"/>
+              <a:gd name="adj" fmla="val 2338"/>
             </a:avLst>
           </a:prstGeom>
           <a:solidFill>
@@ -14687,7 +14949,7 @@
         </p:nvSpPr>
         <p:spPr>
           <a:xfrm>
-            <a:off x="1051560" y="2267712"/>
+            <a:off x="1051560" y="2249424"/>
             <a:ext cx="4663440" cy="914400"/>
           </a:xfrm>
           <a:prstGeom prst="rect">
@@ -14702,12 +14964,12 @@
           <a:p>
             <a:pPr indent="0" marL="0">
               <a:lnSpc>
-                <a:spcPts val="1900"/>
+                <a:spcPts val="1800"/>
               </a:lnSpc>
               <a:buNone/>
             </a:pPr>
             <a:r>
-              <a:rPr lang="en-US" sz="1250" dirty="0">
+              <a:rPr lang="en-US" sz="1200" dirty="0">
                 <a:solidFill>
                   <a:srgbClr val="FFFFFF"/>
                 </a:solidFill>
@@ -14717,17 +14979,17 @@
               </a:rPr>
               <a:t>z_LS = log(π̄_LS) + log k_LS</a:t>
             </a:r>
-            <a:endParaRPr lang="en-US" sz="1250" dirty="0"/>
+            <a:endParaRPr lang="en-US" sz="1200" dirty="0"/>
           </a:p>
           <a:p>
             <a:pPr indent="0" marL="0">
               <a:lnSpc>
-                <a:spcPts val="1900"/>
+                <a:spcPts val="1800"/>
               </a:lnSpc>
               <a:buNone/>
             </a:pPr>
             <a:r>
-              <a:rPr lang="en-US" sz="1250" dirty="0">
+              <a:rPr lang="en-US" sz="1200" dirty="0">
                 <a:solidFill>
                   <a:srgbClr val="FFFFFF"/>
                 </a:solidFill>
@@ -14737,17 +14999,17 @@
               </a:rPr>
               <a:t>z_LQ = log(π̄_LQ) + log k_LQ</a:t>
             </a:r>
-            <a:endParaRPr lang="en-US" sz="1250" dirty="0"/>
+            <a:endParaRPr lang="en-US" sz="1200" dirty="0"/>
           </a:p>
           <a:p>
             <a:pPr indent="0" marL="0">
               <a:lnSpc>
-                <a:spcPts val="1900"/>
+                <a:spcPts val="1800"/>
               </a:lnSpc>
               <a:buNone/>
             </a:pPr>
             <a:r>
-              <a:rPr lang="en-US" sz="1250" dirty="0">
+              <a:rPr lang="en-US" sz="1200" dirty="0">
                 <a:solidFill>
                   <a:srgbClr val="FFFFFF"/>
                 </a:solidFill>
@@ -14757,7 +15019,7 @@
               </a:rPr>
               <a:t>κ 없음 · ω = 0 · b 전부 0 고정</a:t>
             </a:r>
-            <a:endParaRPr lang="en-US" sz="1250" dirty="0"/>
+            <a:endParaRPr lang="en-US" sz="1200" dirty="0"/>
           </a:p>
         </p:txBody>
       </p:sp>
@@ -14769,7 +15031,85 @@
         </p:nvSpPr>
         <p:spPr>
           <a:xfrm>
-            <a:off x="1051560" y="3310128"/>
+            <a:off x="1051560" y="3218688"/>
+            <a:ext cx="2651760" cy="274320"/>
+          </a:xfrm>
+          <a:prstGeom prst="rect">
+            <a:avLst/>
+          </a:prstGeom>
+          <a:noFill/>
+          <a:ln/>
+        </p:spPr>
+        <p:txBody>
+          <a:bodyPr wrap="square" lIns="0" tIns="0" rIns="0" bIns="0" rtlCol="0" anchor="ctr"/>
+          <a:lstStyle/>
+          <a:p>
+            <a:pPr indent="0" marL="0">
+              <a:buNone/>
+            </a:pPr>
+            <a:r>
+              <a:rPr lang="en-US" sz="1100" dirty="0">
+                <a:solidFill>
+                  <a:srgbClr val="A99A92"/>
+                </a:solidFill>
+                <a:latin typeface="Calibri" pitchFamily="34" charset="0"/>
+                <a:ea typeface="Calibri" pitchFamily="34" charset="-122"/>
+                <a:cs typeface="Calibri" pitchFamily="34" charset="-120"/>
+              </a:rPr>
+              <a:t>LS 사전 가중</a:t>
+            </a:r>
+            <a:endParaRPr lang="en-US" sz="1100" dirty="0"/>
+          </a:p>
+        </p:txBody>
+      </p:sp>
+      <p:sp>
+        <p:nvSpPr>
+          <p:cNvPr id="8" name="Text 6"/>
+          <p:cNvSpPr txBox="1"/>
+          <p:nvPr/>
+        </p:nvSpPr>
+        <p:spPr>
+          <a:xfrm>
+            <a:off x="3840480" y="3218688"/>
+            <a:ext cx="1920240" cy="274320"/>
+          </a:xfrm>
+          <a:prstGeom prst="rect">
+            <a:avLst/>
+          </a:prstGeom>
+          <a:noFill/>
+          <a:ln/>
+        </p:spPr>
+        <p:txBody>
+          <a:bodyPr wrap="square" lIns="0" tIns="0" rIns="0" bIns="0" rtlCol="0" anchor="ctr"/>
+          <a:lstStyle/>
+          <a:p>
+            <a:pPr algn="r" indent="0" marL="0">
+              <a:buNone/>
+            </a:pPr>
+            <a:r>
+              <a:rPr lang="en-US" sz="1200" b="1" dirty="0">
+                <a:solidFill>
+                  <a:srgbClr val="FFFFFF"/>
+                </a:solidFill>
+                <a:latin typeface="Calibri" pitchFamily="34" charset="0"/>
+                <a:ea typeface="Calibri" pitchFamily="34" charset="-122"/>
+                <a:cs typeface="Calibri" pitchFamily="34" charset="-120"/>
+              </a:rPr>
+              <a:t>0.8400</a:t>
+            </a:r>
+            <a:endParaRPr lang="en-US" sz="1200" dirty="0"/>
+          </a:p>
+        </p:txBody>
+      </p:sp>
+      <p:sp>
+        <p:nvSpPr>
+          <p:cNvPr id="9" name="Text 7"/>
+          <p:cNvSpPr txBox="1"/>
+          <p:nvPr/>
+        </p:nvSpPr>
+        <p:spPr>
+          <a:xfrm>
+            <a:off x="1051560" y="3534156"/>
             <a:ext cx="2651760" cy="274320"/>
           </a:xfrm>
           <a:prstGeom prst="rect">
@@ -14802,13 +15142,13 @@
       </p:sp>
       <p:sp>
         <p:nvSpPr>
-          <p:cNvPr id="8" name="Text 6"/>
+          <p:cNvPr id="10" name="Text 8"/>
           <p:cNvSpPr txBox="1"/>
           <p:nvPr/>
         </p:nvSpPr>
         <p:spPr>
           <a:xfrm>
-            <a:off x="3840480" y="3310128"/>
+            <a:off x="3840480" y="3534156"/>
             <a:ext cx="1920240" cy="274320"/>
           </a:xfrm>
           <a:prstGeom prst="rect">
@@ -14841,13 +15181,13 @@
       </p:sp>
       <p:sp>
         <p:nvSpPr>
-          <p:cNvPr id="9" name="Text 7"/>
+          <p:cNvPr id="11" name="Text 9"/>
           <p:cNvSpPr txBox="1"/>
           <p:nvPr/>
         </p:nvSpPr>
         <p:spPr>
           <a:xfrm>
-            <a:off x="1051560" y="3675888"/>
+            <a:off x="1051560" y="3849624"/>
             <a:ext cx="2651760" cy="274320"/>
           </a:xfrm>
           <a:prstGeom prst="rect">
@@ -14872,7 +15212,7 @@
                 <a:ea typeface="Calibri" pitchFamily="34" charset="-122"/>
                 <a:cs typeface="Calibri" pitchFamily="34" charset="-120"/>
               </a:rPr>
-              <a:t>LS MSE</a:t>
+              <a:t>LQ 사전 가중</a:t>
             </a:r>
             <a:endParaRPr lang="en-US" sz="1100" dirty="0"/>
           </a:p>
@@ -14880,13 +15220,169 @@
       </p:sp>
       <p:sp>
         <p:nvSpPr>
-          <p:cNvPr id="10" name="Text 8"/>
+          <p:cNvPr id="12" name="Text 10"/>
           <p:cNvSpPr txBox="1"/>
           <p:nvPr/>
         </p:nvSpPr>
         <p:spPr>
           <a:xfrm>
-            <a:off x="3840480" y="3675888"/>
+            <a:off x="3840480" y="3849624"/>
+            <a:ext cx="1920240" cy="274320"/>
+          </a:xfrm>
+          <a:prstGeom prst="rect">
+            <a:avLst/>
+          </a:prstGeom>
+          <a:noFill/>
+          <a:ln/>
+        </p:spPr>
+        <p:txBody>
+          <a:bodyPr wrap="square" lIns="0" tIns="0" rIns="0" bIns="0" rtlCol="0" anchor="ctr"/>
+          <a:lstStyle/>
+          <a:p>
+            <a:pPr algn="r" indent="0" marL="0">
+              <a:buNone/>
+            </a:pPr>
+            <a:r>
+              <a:rPr lang="en-US" sz="1200" b="1" dirty="0">
+                <a:solidFill>
+                  <a:srgbClr val="FFFFFF"/>
+                </a:solidFill>
+                <a:latin typeface="Calibri" pitchFamily="34" charset="0"/>
+                <a:ea typeface="Calibri" pitchFamily="34" charset="-122"/>
+                <a:cs typeface="Calibri" pitchFamily="34" charset="-120"/>
+              </a:rPr>
+              <a:t>0.7698</a:t>
+            </a:r>
+            <a:endParaRPr lang="en-US" sz="1200" dirty="0"/>
+          </a:p>
+        </p:txBody>
+      </p:sp>
+      <p:sp>
+        <p:nvSpPr>
+          <p:cNvPr id="13" name="Text 11"/>
+          <p:cNvSpPr txBox="1"/>
+          <p:nvPr/>
+        </p:nvSpPr>
+        <p:spPr>
+          <a:xfrm>
+            <a:off x="1051560" y="4165092"/>
+            <a:ext cx="2651760" cy="274320"/>
+          </a:xfrm>
+          <a:prstGeom prst="rect">
+            <a:avLst/>
+          </a:prstGeom>
+          <a:noFill/>
+          <a:ln/>
+        </p:spPr>
+        <p:txBody>
+          <a:bodyPr wrap="square" lIns="0" tIns="0" rIns="0" bIns="0" rtlCol="0" anchor="ctr"/>
+          <a:lstStyle/>
+          <a:p>
+            <a:pPr indent="0" marL="0">
+              <a:buNone/>
+            </a:pPr>
+            <a:r>
+              <a:rPr lang="en-US" sz="1100" dirty="0">
+                <a:solidFill>
+                  <a:srgbClr val="A99A92"/>
+                </a:solidFill>
+                <a:latin typeface="Calibri" pitchFamily="34" charset="0"/>
+                <a:ea typeface="Calibri" pitchFamily="34" charset="-122"/>
+                <a:cs typeface="Calibri" pitchFamily="34" charset="-120"/>
+              </a:rPr>
+              <a:t>LQ 사후 가중</a:t>
+            </a:r>
+            <a:endParaRPr lang="en-US" sz="1100" dirty="0"/>
+          </a:p>
+        </p:txBody>
+      </p:sp>
+      <p:sp>
+        <p:nvSpPr>
+          <p:cNvPr id="14" name="Text 12"/>
+          <p:cNvSpPr txBox="1"/>
+          <p:nvPr/>
+        </p:nvSpPr>
+        <p:spPr>
+          <a:xfrm>
+            <a:off x="3840480" y="4165092"/>
+            <a:ext cx="1920240" cy="274320"/>
+          </a:xfrm>
+          <a:prstGeom prst="rect">
+            <a:avLst/>
+          </a:prstGeom>
+          <a:noFill/>
+          <a:ln/>
+        </p:spPr>
+        <p:txBody>
+          <a:bodyPr wrap="square" lIns="0" tIns="0" rIns="0" bIns="0" rtlCol="0" anchor="ctr"/>
+          <a:lstStyle/>
+          <a:p>
+            <a:pPr algn="r" indent="0" marL="0">
+              <a:buNone/>
+            </a:pPr>
+            <a:r>
+              <a:rPr lang="en-US" sz="1200" b="1" dirty="0">
+                <a:solidFill>
+                  <a:srgbClr val="FFFFFF"/>
+                </a:solidFill>
+                <a:latin typeface="Calibri" pitchFamily="34" charset="0"/>
+                <a:ea typeface="Calibri" pitchFamily="34" charset="-122"/>
+                <a:cs typeface="Calibri" pitchFamily="34" charset="-120"/>
+              </a:rPr>
+              <a:t>0.7812</a:t>
+            </a:r>
+            <a:endParaRPr lang="en-US" sz="1200" dirty="0"/>
+          </a:p>
+        </p:txBody>
+      </p:sp>
+      <p:sp>
+        <p:nvSpPr>
+          <p:cNvPr id="15" name="Text 13"/>
+          <p:cNvSpPr txBox="1"/>
+          <p:nvPr/>
+        </p:nvSpPr>
+        <p:spPr>
+          <a:xfrm>
+            <a:off x="1051560" y="4480560"/>
+            <a:ext cx="2651760" cy="274320"/>
+          </a:xfrm>
+          <a:prstGeom prst="rect">
+            <a:avLst/>
+          </a:prstGeom>
+          <a:noFill/>
+          <a:ln/>
+        </p:spPr>
+        <p:txBody>
+          <a:bodyPr wrap="square" lIns="0" tIns="0" rIns="0" bIns="0" rtlCol="0" anchor="ctr"/>
+          <a:lstStyle/>
+          <a:p>
+            <a:pPr indent="0" marL="0">
+              <a:buNone/>
+            </a:pPr>
+            <a:r>
+              <a:rPr lang="en-US" sz="1100" dirty="0">
+                <a:solidFill>
+                  <a:srgbClr val="A99A92"/>
+                </a:solidFill>
+                <a:latin typeface="Calibri" pitchFamily="34" charset="0"/>
+                <a:ea typeface="Calibri" pitchFamily="34" charset="-122"/>
+                <a:cs typeface="Calibri" pitchFamily="34" charset="-120"/>
+              </a:rPr>
+              <a:t>LS MSE (사후)</a:t>
+            </a:r>
+            <a:endParaRPr lang="en-US" sz="1100" dirty="0"/>
+          </a:p>
+        </p:txBody>
+      </p:sp>
+      <p:sp>
+        <p:nvSpPr>
+          <p:cNvPr id="16" name="Text 14"/>
+          <p:cNvSpPr txBox="1"/>
+          <p:nvPr/>
+        </p:nvSpPr>
+        <p:spPr>
+          <a:xfrm>
+            <a:off x="3840480" y="4480560"/>
             <a:ext cx="1920240" cy="274320"/>
           </a:xfrm>
           <a:prstGeom prst="rect">
@@ -14919,91 +15415,13 @@
       </p:sp>
       <p:sp>
         <p:nvSpPr>
-          <p:cNvPr id="11" name="Text 9"/>
+          <p:cNvPr id="17" name="Text 15"/>
           <p:cNvSpPr txBox="1"/>
           <p:nvPr/>
         </p:nvSpPr>
         <p:spPr>
           <a:xfrm>
-            <a:off x="1051560" y="4041648"/>
-            <a:ext cx="2651760" cy="274320"/>
-          </a:xfrm>
-          <a:prstGeom prst="rect">
-            <a:avLst/>
-          </a:prstGeom>
-          <a:noFill/>
-          <a:ln/>
-        </p:spPr>
-        <p:txBody>
-          <a:bodyPr wrap="square" lIns="0" tIns="0" rIns="0" bIns="0" rtlCol="0" anchor="ctr"/>
-          <a:lstStyle/>
-          <a:p>
-            <a:pPr indent="0" marL="0">
-              <a:buNone/>
-            </a:pPr>
-            <a:r>
-              <a:rPr lang="en-US" sz="1100" dirty="0">
-                <a:solidFill>
-                  <a:srgbClr val="A99A92"/>
-                </a:solidFill>
-                <a:latin typeface="Calibri" pitchFamily="34" charset="0"/>
-                <a:ea typeface="Calibri" pitchFamily="34" charset="-122"/>
-                <a:cs typeface="Calibri" pitchFamily="34" charset="-120"/>
-              </a:rPr>
-              <a:t>LQ 사후 가중</a:t>
-            </a:r>
-            <a:endParaRPr lang="en-US" sz="1100" dirty="0"/>
-          </a:p>
-        </p:txBody>
-      </p:sp>
-      <p:sp>
-        <p:nvSpPr>
-          <p:cNvPr id="12" name="Text 10"/>
-          <p:cNvSpPr txBox="1"/>
-          <p:nvPr/>
-        </p:nvSpPr>
-        <p:spPr>
-          <a:xfrm>
-            <a:off x="3840480" y="4041648"/>
-            <a:ext cx="1920240" cy="274320"/>
-          </a:xfrm>
-          <a:prstGeom prst="rect">
-            <a:avLst/>
-          </a:prstGeom>
-          <a:noFill/>
-          <a:ln/>
-        </p:spPr>
-        <p:txBody>
-          <a:bodyPr wrap="square" lIns="0" tIns="0" rIns="0" bIns="0" rtlCol="0" anchor="ctr"/>
-          <a:lstStyle/>
-          <a:p>
-            <a:pPr algn="r" indent="0" marL="0">
-              <a:buNone/>
-            </a:pPr>
-            <a:r>
-              <a:rPr lang="en-US" sz="1200" b="1" dirty="0">
-                <a:solidFill>
-                  <a:srgbClr val="FFFFFF"/>
-                </a:solidFill>
-                <a:latin typeface="Calibri" pitchFamily="34" charset="0"/>
-                <a:ea typeface="Calibri" pitchFamily="34" charset="-122"/>
-                <a:cs typeface="Calibri" pitchFamily="34" charset="-120"/>
-              </a:rPr>
-              <a:t>0.7812</a:t>
-            </a:r>
-            <a:endParaRPr lang="en-US" sz="1200" dirty="0"/>
-          </a:p>
-        </p:txBody>
-      </p:sp>
-      <p:sp>
-        <p:nvSpPr>
-          <p:cNvPr id="13" name="Text 11"/>
-          <p:cNvSpPr txBox="1"/>
-          <p:nvPr/>
-        </p:nvSpPr>
-        <p:spPr>
-          <a:xfrm>
-            <a:off x="1051560" y="4407408"/>
+            <a:off x="1051560" y="4796028"/>
             <a:ext cx="2651760" cy="274320"/>
           </a:xfrm>
           <a:prstGeom prst="rect">
@@ -15036,13 +15454,13 @@
       </p:sp>
       <p:sp>
         <p:nvSpPr>
-          <p:cNvPr id="14" name="Text 12"/>
+          <p:cNvPr id="18" name="Text 16"/>
           <p:cNvSpPr txBox="1"/>
           <p:nvPr/>
         </p:nvSpPr>
         <p:spPr>
           <a:xfrm>
-            <a:off x="3840480" y="4407408"/>
+            <a:off x="3840480" y="4796028"/>
             <a:ext cx="1920240" cy="274320"/>
           </a:xfrm>
           <a:prstGeom prst="rect">
@@ -15075,18 +15493,18 @@
       </p:sp>
       <p:sp>
         <p:nvSpPr>
-          <p:cNvPr id="15" name="Shape 13"/>
+          <p:cNvPr id="19" name="Shape 17"/>
           <p:cNvSpPr/>
           <p:nvPr/>
         </p:nvSpPr>
         <p:spPr>
           <a:xfrm>
             <a:off x="6355080" y="1664208"/>
-            <a:ext cx="5029200" cy="3200400"/>
+            <a:ext cx="5029200" cy="3520440"/>
           </a:xfrm>
           <a:prstGeom prst="roundRect">
             <a:avLst>
-              <a:gd name="adj" fmla="val 2571"/>
+              <a:gd name="adj" fmla="val 2338"/>
             </a:avLst>
           </a:prstGeom>
           <a:solidFill>
@@ -15102,7 +15520,7 @@
       </p:sp>
       <p:sp>
         <p:nvSpPr>
-          <p:cNvPr id="16" name="Text 14"/>
+          <p:cNvPr id="20" name="Text 18"/>
           <p:cNvSpPr txBox="1"/>
           <p:nvPr/>
         </p:nvSpPr>
@@ -15141,13 +15559,13 @@
       </p:sp>
       <p:sp>
         <p:nvSpPr>
-          <p:cNvPr id="17" name="Text 15"/>
+          <p:cNvPr id="21" name="Text 19"/>
           <p:cNvSpPr txBox="1"/>
           <p:nvPr/>
         </p:nvSpPr>
         <p:spPr>
           <a:xfrm>
-            <a:off x="6629400" y="2267712"/>
+            <a:off x="6629400" y="2249424"/>
             <a:ext cx="4480560" cy="914400"/>
           </a:xfrm>
           <a:prstGeom prst="rect">
@@ -15162,12 +15580,12 @@
           <a:p>
             <a:pPr indent="0" marL="0">
               <a:lnSpc>
-                <a:spcPts val="1900"/>
+                <a:spcPts val="1800"/>
               </a:lnSpc>
               <a:buNone/>
             </a:pPr>
             <a:r>
-              <a:rPr lang="en-US" sz="1250" dirty="0">
+              <a:rPr lang="en-US" sz="1200" dirty="0">
                 <a:solidFill>
                   <a:srgbClr val="FFFFFF"/>
                 </a:solidFill>
@@ -15175,19 +15593,19 @@
                 <a:ea typeface="Calibri" pitchFamily="34" charset="-122"/>
                 <a:cs typeface="Calibri" pitchFamily="34" charset="-120"/>
               </a:rPr>
-              <a:t>B0과 같되 b_LQ만 학습한다</a:t>
+              <a:t>B0과 같되 b_LQ만 학습한다 (−4.12로 수렴)</a:t>
             </a:r>
-            <a:endParaRPr lang="en-US" sz="1250" dirty="0"/>
+            <a:endParaRPr lang="en-US" sz="1200" dirty="0"/>
           </a:p>
           <a:p>
             <a:pPr indent="0" marL="0">
               <a:lnSpc>
-                <a:spcPts val="1900"/>
+                <a:spcPts val="1800"/>
               </a:lnSpc>
               <a:buNone/>
             </a:pPr>
             <a:r>
-              <a:rPr lang="en-US" sz="1250" dirty="0">
+              <a:rPr lang="en-US" sz="1200" dirty="0">
                 <a:solidFill>
                   <a:srgbClr val="FFFFFF"/>
                 </a:solidFill>
@@ -15195,19 +15613,19 @@
                 <a:ea typeface="Calibri" pitchFamily="34" charset="-122"/>
                 <a:cs typeface="Calibri" pitchFamily="34" charset="-120"/>
               </a:rPr>
-              <a:t>(b_LQ = −4.12로 수렴)</a:t>
+              <a:t>LS 식은 B0과 글자 하나 다르지 않다</a:t>
             </a:r>
-            <a:endParaRPr lang="en-US" sz="1250" dirty="0"/>
+            <a:endParaRPr lang="en-US" sz="1200" dirty="0"/>
           </a:p>
           <a:p>
             <a:pPr indent="0" marL="0">
               <a:lnSpc>
-                <a:spcPts val="1900"/>
+                <a:spcPts val="1800"/>
               </a:lnSpc>
               <a:buNone/>
             </a:pPr>
             <a:r>
-              <a:rPr lang="en-US" sz="1250" dirty="0">
+              <a:rPr lang="en-US" sz="1200" dirty="0">
                 <a:solidFill>
                   <a:srgbClr val="FFFFFF"/>
                 </a:solidFill>
@@ -15215,21 +15633,99 @@
                 <a:ea typeface="Calibri" pitchFamily="34" charset="-122"/>
                 <a:cs typeface="Calibri" pitchFamily="34" charset="-120"/>
               </a:rPr>
-              <a:t>순위 식은 B0과 완전히 동일</a:t>
+              <a:t>→ LS 사전확률 최대 절대차 0.00e+00</a:t>
             </a:r>
-            <a:endParaRPr lang="en-US" sz="1250" dirty="0"/>
+            <a:endParaRPr lang="en-US" sz="1200" dirty="0"/>
           </a:p>
         </p:txBody>
       </p:sp>
       <p:sp>
         <p:nvSpPr>
-          <p:cNvPr id="18" name="Text 16"/>
+          <p:cNvPr id="22" name="Text 20"/>
           <p:cNvSpPr txBox="1"/>
           <p:nvPr/>
         </p:nvSpPr>
         <p:spPr>
           <a:xfrm>
-            <a:off x="6629400" y="3310128"/>
+            <a:off x="6629400" y="3218688"/>
+            <a:ext cx="2560320" cy="274320"/>
+          </a:xfrm>
+          <a:prstGeom prst="rect">
+            <a:avLst/>
+          </a:prstGeom>
+          <a:noFill/>
+          <a:ln/>
+        </p:spPr>
+        <p:txBody>
+          <a:bodyPr wrap="square" lIns="0" tIns="0" rIns="0" bIns="0" rtlCol="0" anchor="ctr"/>
+          <a:lstStyle/>
+          <a:p>
+            <a:pPr indent="0" marL="0">
+              <a:buNone/>
+            </a:pPr>
+            <a:r>
+              <a:rPr lang="en-US" sz="1100" dirty="0">
+                <a:solidFill>
+                  <a:srgbClr val="A99A92"/>
+                </a:solidFill>
+                <a:latin typeface="Calibri" pitchFamily="34" charset="0"/>
+                <a:ea typeface="Calibri" pitchFamily="34" charset="-122"/>
+                <a:cs typeface="Calibri" pitchFamily="34" charset="-120"/>
+              </a:rPr>
+              <a:t>LS 사전 가중</a:t>
+            </a:r>
+            <a:endParaRPr lang="en-US" sz="1100" dirty="0"/>
+          </a:p>
+        </p:txBody>
+      </p:sp>
+      <p:sp>
+        <p:nvSpPr>
+          <p:cNvPr id="23" name="Text 21"/>
+          <p:cNvSpPr txBox="1"/>
+          <p:nvPr/>
+        </p:nvSpPr>
+        <p:spPr>
+          <a:xfrm>
+            <a:off x="9235440" y="3218688"/>
+            <a:ext cx="1874520" cy="274320"/>
+          </a:xfrm>
+          <a:prstGeom prst="rect">
+            <a:avLst/>
+          </a:prstGeom>
+          <a:noFill/>
+          <a:ln/>
+        </p:spPr>
+        <p:txBody>
+          <a:bodyPr wrap="square" lIns="0" tIns="0" rIns="0" bIns="0" rtlCol="0" anchor="ctr"/>
+          <a:lstStyle/>
+          <a:p>
+            <a:pPr algn="r" indent="0" marL="0">
+              <a:buNone/>
+            </a:pPr>
+            <a:r>
+              <a:rPr lang="en-US" sz="1200" b="1" dirty="0">
+                <a:solidFill>
+                  <a:srgbClr val="FFFFFF"/>
+                </a:solidFill>
+                <a:latin typeface="Calibri" pitchFamily="34" charset="0"/>
+                <a:ea typeface="Calibri" pitchFamily="34" charset="-122"/>
+                <a:cs typeface="Calibri" pitchFamily="34" charset="-120"/>
+              </a:rPr>
+              <a:t>0.8400</a:t>
+            </a:r>
+            <a:endParaRPr lang="en-US" sz="1200" dirty="0"/>
+          </a:p>
+        </p:txBody>
+      </p:sp>
+      <p:sp>
+        <p:nvSpPr>
+          <p:cNvPr id="24" name="Text 22"/>
+          <p:cNvSpPr txBox="1"/>
+          <p:nvPr/>
+        </p:nvSpPr>
+        <p:spPr>
+          <a:xfrm>
+            <a:off x="6629400" y="3534156"/>
             <a:ext cx="2560320" cy="274320"/>
           </a:xfrm>
           <a:prstGeom prst="rect">
@@ -15262,13 +15758,13 @@
       </p:sp>
       <p:sp>
         <p:nvSpPr>
-          <p:cNvPr id="19" name="Text 17"/>
+          <p:cNvPr id="25" name="Text 23"/>
           <p:cNvSpPr txBox="1"/>
           <p:nvPr/>
         </p:nvSpPr>
         <p:spPr>
           <a:xfrm>
-            <a:off x="9235440" y="3310128"/>
+            <a:off x="9235440" y="3534156"/>
             <a:ext cx="1874520" cy="274320"/>
           </a:xfrm>
           <a:prstGeom prst="rect">
@@ -15301,13 +15797,13 @@
       </p:sp>
       <p:sp>
         <p:nvSpPr>
-          <p:cNvPr id="20" name="Text 18"/>
+          <p:cNvPr id="26" name="Text 24"/>
           <p:cNvSpPr txBox="1"/>
           <p:nvPr/>
         </p:nvSpPr>
         <p:spPr>
           <a:xfrm>
-            <a:off x="6629400" y="3675888"/>
+            <a:off x="6629400" y="3849624"/>
             <a:ext cx="2560320" cy="274320"/>
           </a:xfrm>
           <a:prstGeom prst="rect">
@@ -15332,7 +15828,7 @@
                 <a:ea typeface="Calibri" pitchFamily="34" charset="-122"/>
                 <a:cs typeface="Calibri" pitchFamily="34" charset="-120"/>
               </a:rPr>
-              <a:t>LS MSE</a:t>
+              <a:t>LQ 사전 가중</a:t>
             </a:r>
             <a:endParaRPr lang="en-US" sz="1100" dirty="0"/>
           </a:p>
@@ -15340,13 +15836,169 @@
       </p:sp>
       <p:sp>
         <p:nvSpPr>
-          <p:cNvPr id="21" name="Text 19"/>
+          <p:cNvPr id="27" name="Text 25"/>
           <p:cNvSpPr txBox="1"/>
           <p:nvPr/>
         </p:nvSpPr>
         <p:spPr>
           <a:xfrm>
-            <a:off x="9235440" y="3675888"/>
+            <a:off x="9235440" y="3849624"/>
+            <a:ext cx="1874520" cy="274320"/>
+          </a:xfrm>
+          <a:prstGeom prst="rect">
+            <a:avLst/>
+          </a:prstGeom>
+          <a:noFill/>
+          <a:ln/>
+        </p:spPr>
+        <p:txBody>
+          <a:bodyPr wrap="square" lIns="0" tIns="0" rIns="0" bIns="0" rtlCol="0" anchor="ctr"/>
+          <a:lstStyle/>
+          <a:p>
+            <a:pPr algn="r" indent="0" marL="0">
+              <a:buNone/>
+            </a:pPr>
+            <a:r>
+              <a:rPr lang="en-US" sz="1200" b="1" dirty="0">
+                <a:solidFill>
+                  <a:srgbClr val="FFFFFF"/>
+                </a:solidFill>
+                <a:latin typeface="Calibri" pitchFamily="34" charset="0"/>
+                <a:ea typeface="Calibri" pitchFamily="34" charset="-122"/>
+                <a:cs typeface="Calibri" pitchFamily="34" charset="-120"/>
+              </a:rPr>
+              <a:t>0.7698</a:t>
+            </a:r>
+            <a:endParaRPr lang="en-US" sz="1200" dirty="0"/>
+          </a:p>
+        </p:txBody>
+      </p:sp>
+      <p:sp>
+        <p:nvSpPr>
+          <p:cNvPr id="28" name="Text 26"/>
+          <p:cNvSpPr txBox="1"/>
+          <p:nvPr/>
+        </p:nvSpPr>
+        <p:spPr>
+          <a:xfrm>
+            <a:off x="6629400" y="4165092"/>
+            <a:ext cx="2560320" cy="274320"/>
+          </a:xfrm>
+          <a:prstGeom prst="rect">
+            <a:avLst/>
+          </a:prstGeom>
+          <a:noFill/>
+          <a:ln/>
+        </p:spPr>
+        <p:txBody>
+          <a:bodyPr wrap="square" lIns="0" tIns="0" rIns="0" bIns="0" rtlCol="0" anchor="ctr"/>
+          <a:lstStyle/>
+          <a:p>
+            <a:pPr indent="0" marL="0">
+              <a:buNone/>
+            </a:pPr>
+            <a:r>
+              <a:rPr lang="en-US" sz="1100" dirty="0">
+                <a:solidFill>
+                  <a:srgbClr val="A99A92"/>
+                </a:solidFill>
+                <a:latin typeface="Calibri" pitchFamily="34" charset="0"/>
+                <a:ea typeface="Calibri" pitchFamily="34" charset="-122"/>
+                <a:cs typeface="Calibri" pitchFamily="34" charset="-120"/>
+              </a:rPr>
+              <a:t>LQ 사후 가중</a:t>
+            </a:r>
+            <a:endParaRPr lang="en-US" sz="1100" dirty="0"/>
+          </a:p>
+        </p:txBody>
+      </p:sp>
+      <p:sp>
+        <p:nvSpPr>
+          <p:cNvPr id="29" name="Text 27"/>
+          <p:cNvSpPr txBox="1"/>
+          <p:nvPr/>
+        </p:nvSpPr>
+        <p:spPr>
+          <a:xfrm>
+            <a:off x="9235440" y="4165092"/>
+            <a:ext cx="1874520" cy="274320"/>
+          </a:xfrm>
+          <a:prstGeom prst="rect">
+            <a:avLst/>
+          </a:prstGeom>
+          <a:noFill/>
+          <a:ln/>
+        </p:spPr>
+        <p:txBody>
+          <a:bodyPr wrap="square" lIns="0" tIns="0" rIns="0" bIns="0" rtlCol="0" anchor="ctr"/>
+          <a:lstStyle/>
+          <a:p>
+            <a:pPr algn="r" indent="0" marL="0">
+              <a:buNone/>
+            </a:pPr>
+            <a:r>
+              <a:rPr lang="en-US" sz="1200" b="1" dirty="0">
+                <a:solidFill>
+                  <a:srgbClr val="8FB8A2"/>
+                </a:solidFill>
+                <a:latin typeface="Calibri" pitchFamily="34" charset="0"/>
+                <a:ea typeface="Calibri" pitchFamily="34" charset="-122"/>
+                <a:cs typeface="Calibri" pitchFamily="34" charset="-120"/>
+              </a:rPr>
+              <a:t>0.8158</a:t>
+            </a:r>
+            <a:endParaRPr lang="en-US" sz="1200" dirty="0"/>
+          </a:p>
+        </p:txBody>
+      </p:sp>
+      <p:sp>
+        <p:nvSpPr>
+          <p:cNvPr id="30" name="Text 28"/>
+          <p:cNvSpPr txBox="1"/>
+          <p:nvPr/>
+        </p:nvSpPr>
+        <p:spPr>
+          <a:xfrm>
+            <a:off x="6629400" y="4480560"/>
+            <a:ext cx="2560320" cy="274320"/>
+          </a:xfrm>
+          <a:prstGeom prst="rect">
+            <a:avLst/>
+          </a:prstGeom>
+          <a:noFill/>
+          <a:ln/>
+        </p:spPr>
+        <p:txBody>
+          <a:bodyPr wrap="square" lIns="0" tIns="0" rIns="0" bIns="0" rtlCol="0" anchor="ctr"/>
+          <a:lstStyle/>
+          <a:p>
+            <a:pPr indent="0" marL="0">
+              <a:buNone/>
+            </a:pPr>
+            <a:r>
+              <a:rPr lang="en-US" sz="1100" dirty="0">
+                <a:solidFill>
+                  <a:srgbClr val="A99A92"/>
+                </a:solidFill>
+                <a:latin typeface="Calibri" pitchFamily="34" charset="0"/>
+                <a:ea typeface="Calibri" pitchFamily="34" charset="-122"/>
+                <a:cs typeface="Calibri" pitchFamily="34" charset="-120"/>
+              </a:rPr>
+              <a:t>LS MSE (사후)</a:t>
+            </a:r>
+            <a:endParaRPr lang="en-US" sz="1100" dirty="0"/>
+          </a:p>
+        </p:txBody>
+      </p:sp>
+      <p:sp>
+        <p:nvSpPr>
+          <p:cNvPr id="31" name="Text 29"/>
+          <p:cNvSpPr txBox="1"/>
+          <p:nvPr/>
+        </p:nvSpPr>
+        <p:spPr>
+          <a:xfrm>
+            <a:off x="9235440" y="4480560"/>
             <a:ext cx="1874520" cy="274320"/>
           </a:xfrm>
           <a:prstGeom prst="rect">
@@ -15379,91 +16031,13 @@
       </p:sp>
       <p:sp>
         <p:nvSpPr>
-          <p:cNvPr id="22" name="Text 20"/>
+          <p:cNvPr id="32" name="Text 30"/>
           <p:cNvSpPr txBox="1"/>
           <p:nvPr/>
         </p:nvSpPr>
         <p:spPr>
           <a:xfrm>
-            <a:off x="6629400" y="4041648"/>
-            <a:ext cx="2560320" cy="274320"/>
-          </a:xfrm>
-          <a:prstGeom prst="rect">
-            <a:avLst/>
-          </a:prstGeom>
-          <a:noFill/>
-          <a:ln/>
-        </p:spPr>
-        <p:txBody>
-          <a:bodyPr wrap="square" lIns="0" tIns="0" rIns="0" bIns="0" rtlCol="0" anchor="ctr"/>
-          <a:lstStyle/>
-          <a:p>
-            <a:pPr indent="0" marL="0">
-              <a:buNone/>
-            </a:pPr>
-            <a:r>
-              <a:rPr lang="en-US" sz="1100" dirty="0">
-                <a:solidFill>
-                  <a:srgbClr val="A99A92"/>
-                </a:solidFill>
-                <a:latin typeface="Calibri" pitchFamily="34" charset="0"/>
-                <a:ea typeface="Calibri" pitchFamily="34" charset="-122"/>
-                <a:cs typeface="Calibri" pitchFamily="34" charset="-120"/>
-              </a:rPr>
-              <a:t>LQ 사후 가중</a:t>
-            </a:r>
-            <a:endParaRPr lang="en-US" sz="1100" dirty="0"/>
-          </a:p>
-        </p:txBody>
-      </p:sp>
-      <p:sp>
-        <p:nvSpPr>
-          <p:cNvPr id="23" name="Text 21"/>
-          <p:cNvSpPr txBox="1"/>
-          <p:nvPr/>
-        </p:nvSpPr>
-        <p:spPr>
-          <a:xfrm>
-            <a:off x="9235440" y="4041648"/>
-            <a:ext cx="1874520" cy="274320"/>
-          </a:xfrm>
-          <a:prstGeom prst="rect">
-            <a:avLst/>
-          </a:prstGeom>
-          <a:noFill/>
-          <a:ln/>
-        </p:spPr>
-        <p:txBody>
-          <a:bodyPr wrap="square" lIns="0" tIns="0" rIns="0" bIns="0" rtlCol="0" anchor="ctr"/>
-          <a:lstStyle/>
-          <a:p>
-            <a:pPr algn="r" indent="0" marL="0">
-              <a:buNone/>
-            </a:pPr>
-            <a:r>
-              <a:rPr lang="en-US" sz="1200" b="1" dirty="0">
-                <a:solidFill>
-                  <a:srgbClr val="8FB8A2"/>
-                </a:solidFill>
-                <a:latin typeface="Calibri" pitchFamily="34" charset="0"/>
-                <a:ea typeface="Calibri" pitchFamily="34" charset="-122"/>
-                <a:cs typeface="Calibri" pitchFamily="34" charset="-120"/>
-              </a:rPr>
-              <a:t>0.8158</a:t>
-            </a:r>
-            <a:endParaRPr lang="en-US" sz="1200" dirty="0"/>
-          </a:p>
-        </p:txBody>
-      </p:sp>
-      <p:sp>
-        <p:nvSpPr>
-          <p:cNvPr id="24" name="Text 22"/>
-          <p:cNvSpPr txBox="1"/>
-          <p:nvPr/>
-        </p:nvSpPr>
-        <p:spPr>
-          <a:xfrm>
-            <a:off x="6629400" y="4407408"/>
+            <a:off x="6629400" y="4796028"/>
             <a:ext cx="2560320" cy="274320"/>
           </a:xfrm>
           <a:prstGeom prst="rect">
@@ -15496,13 +16070,13 @@
       </p:sp>
       <p:sp>
         <p:nvSpPr>
-          <p:cNvPr id="25" name="Text 23"/>
+          <p:cNvPr id="33" name="Text 31"/>
           <p:cNvSpPr txBox="1"/>
           <p:nvPr/>
         </p:nvSpPr>
         <p:spPr>
           <a:xfrm>
-            <a:off x="9235440" y="4407408"/>
+            <a:off x="9235440" y="4796028"/>
             <a:ext cx="1874520" cy="274320"/>
           </a:xfrm>
           <a:prstGeom prst="rect">
@@ -15535,14 +16109,14 @@
       </p:sp>
       <p:sp>
         <p:nvSpPr>
-          <p:cNvPr id="26" name="Text 24"/>
+          <p:cNvPr id="34" name="Text 32"/>
           <p:cNvSpPr txBox="1"/>
           <p:nvPr/>
         </p:nvSpPr>
         <p:spPr>
           <a:xfrm>
-            <a:off x="777240" y="5120640"/>
-            <a:ext cx="10607040" cy="914400"/>
+            <a:off x="777240" y="5413248"/>
+            <a:ext cx="10607040" cy="868680"/>
           </a:xfrm>
           <a:prstGeom prst="rect">
             <a:avLst/>
@@ -15556,12 +16130,12 @@
           <a:p>
             <a:pPr indent="0" marL="0">
               <a:lnSpc>
-                <a:spcPts val="1700"/>
+                <a:spcPts val="1600"/>
               </a:lnSpc>
               <a:buNone/>
             </a:pPr>
             <a:r>
-              <a:rPr lang="en-US" sz="1200" dirty="0">
+              <a:rPr lang="en-US" sz="1150" dirty="0">
                 <a:solidFill>
                   <a:srgbClr val="CFC4BC"/>
                 </a:solidFill>
@@ -15571,7 +16145,7 @@
               </a:rPr>
               <a:t>발표에서는 B0을 주 결과로 두고, A2는 '제안하신 LOEO 절차는 A 계열에서 유의하게 작동했으나(+0.0817, P=0.98), 면적 항이 이미 같은 정보를 담고 있어 B 계열에서는 추가 이득이 없었다'로 방법 검증 결과에 배치하는 것을 권한다. C0은 다음 실험 제안으로 붙인다.</a:t>
             </a:r>
-            <a:endParaRPr lang="en-US" sz="1200" dirty="0"/>
+            <a:endParaRPr lang="en-US" sz="1150" dirty="0"/>
           </a:p>
         </p:txBody>
       </p:sp>

--- a/results/deck/LOEO_발표자료.pptx
+++ b/results/deck/LOEO_발표자료.pptx
@@ -19,10 +19,9 @@
     <p:sldId id="267" r:id="rId13"/>
     <p:sldId id="268" r:id="rId14"/>
     <p:sldId id="269" r:id="rId15"/>
-    <p:sldId id="270" r:id="rId16"/>
   </p:sldIdLst>
   <p:notesMasterIdLst>
-    <p:notesMasterId r:id="rId17"/>
+    <p:notesMasterId r:id="rId16"/>
   </p:notesMasterIdLst>
   <p:sldSz cx="12192000" cy="6858000"/>
   <p:notesSz cx="6858000" cy="12192000"/>
@@ -1747,7 +1746,7 @@
           <a:p>
             <a:r>
               <a:rPr lang="en-US" dirty="0"/>
-              <a:t>결과를 보고 나온 아이디어이므로 판정표에 섞지 않고 별도 파일로 분리했다. 다만 예측이 명확했고 그대로 맞았다.</a:t>
+              <a:t>두 가지 모두 결과를 본 뒤에 나온 아이디어라 §5 판정표에는 섞지 않고 별도 파일(results/posthoc, results/centering)로 분리했다. 정식 조건으로 올리려면 조건을 미리 고정한 새 지시서가 필요하다.</a:t>
             </a:r>
             <a:endParaRPr lang="en-US" dirty="0"/>
           </a:p>
@@ -1835,7 +1834,7 @@
           <a:p>
             <a:r>
               <a:rPr lang="en-US" dirty="0"/>
-              <a:t>센터링은 성능을 바꾸는 장치가 아니라 해석과 수치 안정성을 위한 매개변수화 선택이다. 상자가 걸리지 않는다는 전제에서만 최적해가 같다.</a:t>
+              <a:t>가장 좋은 결과가 가장 적게 학습한 구성이라는 점이 이번 실험의 핵심 메시지다.</a:t>
             </a:r>
             <a:endParaRPr lang="en-US" dirty="0"/>
           </a:p>
@@ -1923,7 +1922,7 @@
           <a:p>
             <a:r>
               <a:rPr lang="en-US" dirty="0"/>
-              <a:t>가장 좋은 결과가 가장 적게 학습한 구성이라는 점이 이번 실험의 핵심 메시지다.</a:t>
+              <a:t>한계를 먼저 적는 것이 중요하다. 특히 음성 20개라는 표본 제약은 모든 LS 숫자에 걸린다.</a:t>
             </a:r>
             <a:endParaRPr lang="en-US" dirty="0"/>
           </a:p>
@@ -1947,94 +1946,6 @@
             <a:fld id="{F7021451-1387-4CA6-816F-3879F97B5CBC}" type="slidenum">
               <a:rPr lang="en-US"/>
               <a:t>14</a:t>
-            </a:fld>
-            <a:endParaRPr lang="en-US"/>
-          </a:p>
-        </p:txBody>
-      </p:sp>
-    </p:spTree>
-    <p:extLst>
-      <p:ext uri="{BB962C8B-B14F-4D97-AF65-F5344CB8AC3E}">
-        <p14:creationId xmlns:p14="http://schemas.microsoft.com/office/powerpoint/2010/main" val="1024086991"/>
-      </p:ext>
-    </p:extLst>
-  </p:cSld>
-  <p:clrMapOvr>
-    <a:masterClrMapping/>
-  </p:clrMapOvr>
-</p:notes>
-</file>
-
-<file path=ppt/notesSlides/notesSlide15.xml><?xml version="1.0" encoding="utf-8"?>
-<p:notes xmlns:a="http://schemas.openxmlformats.org/drawingml/2006/main" xmlns:r="http://schemas.openxmlformats.org/officeDocument/2006/relationships" xmlns:p="http://schemas.openxmlformats.org/presentationml/2006/main">
-  <p:cSld>
-    <p:spTree>
-      <p:nvGrpSpPr>
-        <p:cNvPr id="1" name=""/>
-        <p:cNvGrpSpPr/>
-        <p:nvPr/>
-      </p:nvGrpSpPr>
-      <p:grpSpPr>
-        <a:xfrm>
-          <a:off x="0" y="0"/>
-          <a:ext cx="0" cy="0"/>
-          <a:chOff x="0" y="0"/>
-          <a:chExt cx="0" cy="0"/>
-        </a:xfrm>
-      </p:grpSpPr>
-      <p:sp>
-        <p:nvSpPr>
-          <p:cNvPr id="2" name="Slide Image Placeholder 1"/>
-          <p:cNvSpPr>
-            <a:spLocks noGrp="1" noRot="1" noChangeAspect="1"/>
-          </p:cNvSpPr>
-          <p:nvPr>
-            <p:ph type="sldImg"/>
-          </p:nvPr>
-        </p:nvSpPr>
-        <p:spPr/>
-      </p:sp>
-      <p:sp>
-        <p:nvSpPr>
-          <p:cNvPr id="3" name="Notes Placeholder 2"/>
-          <p:cNvSpPr>
-            <a:spLocks noGrp="1"/>
-          </p:cNvSpPr>
-          <p:nvPr>
-            <p:ph type="body" idx="1"/>
-          </p:nvPr>
-        </p:nvSpPr>
-        <p:spPr/>
-        <p:txBody>
-          <a:bodyPr/>
-          <a:lstStyle/>
-          <a:p>
-            <a:r>
-              <a:rPr lang="en-US" dirty="0"/>
-              <a:t>한계를 먼저 적는 것이 중요하다. 특히 음성 20개라는 표본 제약은 모든 LS 숫자에 걸린다.</a:t>
-            </a:r>
-            <a:endParaRPr lang="en-US" dirty="0"/>
-          </a:p>
-        </p:txBody>
-      </p:sp>
-      <p:sp>
-        <p:nvSpPr>
-          <p:cNvPr id="4" name="Slide Number Placeholder 3"/>
-          <p:cNvSpPr>
-            <a:spLocks noGrp="1"/>
-          </p:cNvSpPr>
-          <p:nvPr>
-            <p:ph type="sldNum" sz="quarter" idx="10"/>
-          </p:nvPr>
-        </p:nvSpPr>
-        <p:spPr/>
-        <p:txBody>
-          <a:bodyPr/>
-          <a:lstStyle/>
-          <a:p>
-            <a:fld id="{F7021451-1387-4CA6-816F-3879F97B5CBC}" type="slidenum">
-              <a:rPr lang="en-US"/>
-              <a:t>15</a:t>
             </a:fld>
             <a:endParaRPr lang="en-US"/>
           </a:p>
@@ -8124,7 +8035,7 @@
                 <a:ea typeface="Cambria" pitchFamily="34" charset="-122"/>
                 <a:cs typeface="Cambria" pitchFamily="34" charset="-120"/>
               </a:rPr>
-              <a:t>사후 탐색 — b_LQ 고정을 풀면</a:t>
+              <a:t>사후 탐색 — 사전등록 조건표 밖</a:t>
             </a:r>
             <a:endParaRPr lang="en-US" sz="3400" dirty="0"/>
           </a:p>
@@ -8163,7 +8074,7 @@
                 <a:ea typeface="Calibri" pitchFamily="34" charset="-122"/>
                 <a:cs typeface="Calibri" pitchFamily="34" charset="-120"/>
               </a:rPr>
-              <a:t>사전등록 조건표 밖의 실험이며 판정 대상이 아니다</a:t>
+              <a:t>결과를 본 뒤에 확인한 두 가지다. §5 판정에는 반영하지 않았다</a:t>
             </a:r>
             <a:endParaRPr lang="en-US" sz="1400" dirty="0"/>
           </a:p>
@@ -8177,20 +8088,18 @@
         </p:nvSpPr>
         <p:spPr>
           <a:xfrm>
-            <a:off x="640080" y="1572768"/>
-            <a:ext cx="10927080" cy="868680"/>
+            <a:off x="640080" y="1536192"/>
+            <a:ext cx="310896" cy="310896"/>
           </a:xfrm>
-          <a:prstGeom prst="roundRect">
-            <a:avLst>
-              <a:gd name="adj" fmla="val 9474"/>
-            </a:avLst>
+          <a:prstGeom prst="ellipse">
+            <a:avLst/>
           </a:prstGeom>
           <a:solidFill>
-            <a:srgbClr val="F2EFE6"/>
+            <a:srgbClr val="B85042"/>
           </a:solidFill>
-          <a:ln w="6350">
+          <a:ln w="12700">
             <a:solidFill>
-              <a:srgbClr val="DCD6CC"/>
+              <a:srgbClr val="B85042"/>
             </a:solidFill>
             <a:prstDash val="solid"/>
           </a:ln>
@@ -8204,8 +8113,86 @@
         </p:nvSpPr>
         <p:spPr>
           <a:xfrm>
-            <a:off x="914400" y="1755648"/>
-            <a:ext cx="10378440" cy="548640"/>
+            <a:off x="640080" y="1536192"/>
+            <a:ext cx="310896" cy="310896"/>
+          </a:xfrm>
+          <a:prstGeom prst="rect">
+            <a:avLst/>
+          </a:prstGeom>
+          <a:noFill/>
+          <a:ln/>
+        </p:spPr>
+        <p:txBody>
+          <a:bodyPr wrap="square" lIns="0" tIns="0" rIns="0" bIns="0" rtlCol="0" anchor="ctr"/>
+          <a:lstStyle/>
+          <a:p>
+            <a:pPr algn="ctr" indent="0" marL="0">
+              <a:buNone/>
+            </a:pPr>
+            <a:r>
+              <a:rPr lang="en-US" sz="1300" b="1" dirty="0">
+                <a:solidFill>
+                  <a:srgbClr val="FFFFFF"/>
+                </a:solidFill>
+                <a:latin typeface="Cambria" pitchFamily="34" charset="0"/>
+                <a:ea typeface="Cambria" pitchFamily="34" charset="-122"/>
+                <a:cs typeface="Cambria" pitchFamily="34" charset="-120"/>
+              </a:rPr>
+              <a:t>1</a:t>
+            </a:r>
+            <a:endParaRPr lang="en-US" sz="1300" dirty="0"/>
+          </a:p>
+        </p:txBody>
+      </p:sp>
+      <p:sp>
+        <p:nvSpPr>
+          <p:cNvPr id="6" name="Text 4"/>
+          <p:cNvSpPr txBox="1"/>
+          <p:nvPr/>
+        </p:nvSpPr>
+        <p:spPr>
+          <a:xfrm>
+            <a:off x="1060704" y="1517904"/>
+            <a:ext cx="4846320" cy="310896"/>
+          </a:xfrm>
+          <a:prstGeom prst="rect">
+            <a:avLst/>
+          </a:prstGeom>
+          <a:noFill/>
+          <a:ln/>
+        </p:spPr>
+        <p:txBody>
+          <a:bodyPr wrap="square" lIns="0" tIns="0" rIns="0" bIns="0" rtlCol="0" anchor="ctr"/>
+          <a:lstStyle/>
+          <a:p>
+            <a:pPr indent="0" marL="0">
+              <a:buNone/>
+            </a:pPr>
+            <a:r>
+              <a:rPr lang="en-US" sz="1500" b="1" dirty="0">
+                <a:solidFill>
+                  <a:srgbClr val="2E2422"/>
+                </a:solidFill>
+                <a:latin typeface="Cambria" pitchFamily="34" charset="0"/>
+                <a:ea typeface="Cambria" pitchFamily="34" charset="-122"/>
+                <a:cs typeface="Cambria" pitchFamily="34" charset="-120"/>
+              </a:rPr>
+              <a:t>b_LQ 고정을 푼다</a:t>
+            </a:r>
+            <a:endParaRPr lang="en-US" sz="1500" dirty="0"/>
+          </a:p>
+        </p:txBody>
+      </p:sp>
+      <p:sp>
+        <p:nvSpPr>
+          <p:cNvPr id="7" name="Text 5"/>
+          <p:cNvSpPr txBox="1"/>
+          <p:nvPr/>
+        </p:nvSpPr>
+        <p:spPr>
+          <a:xfrm>
+            <a:off x="640080" y="1883664"/>
+            <a:ext cx="5257800" cy="512064"/>
           </a:xfrm>
           <a:prstGeom prst="rect">
             <a:avLst/>
@@ -8219,22 +8206,22 @@
           <a:p>
             <a:pPr indent="0" marL="0">
               <a:lnSpc>
-                <a:spcPts val="1600"/>
+                <a:spcPts val="1400"/>
               </a:lnSpc>
               <a:buNone/>
             </a:pPr>
             <a:r>
-              <a:rPr lang="en-US" sz="1200" dirty="0">
+              <a:rPr lang="en-US" sz="1100" dirty="0">
                 <a:solidFill>
-                  <a:srgbClr val="2E2422"/>
+                  <a:srgbClr val="7A6A63"/>
                 </a:solidFill>
                 <a:latin typeface="Calibri" pitchFamily="34" charset="0"/>
                 <a:ea typeface="Calibri" pitchFamily="34" charset="-122"/>
                 <a:cs typeface="Calibri" pitchFamily="34" charset="-120"/>
               </a:rPr>
-              <a:t>문제 — log k_LQ의 평균이 6.7쯤이라 q_LQ가 통째로 밀려 올라간다. 중앙값 0.9188인데 실제 LQ 발생률은 229행 중 0.476이다. b_LQ가 0으로 고정돼 수준을 잡을 수단이 없었다.</a:t>
+              <a:t>log k_LQ 평균이 6.66이라 q_LQ가 통째로 밀려 중앙값 0.9145가 된다. 실제 액상화 발생률은 229행 중 0.476이다.</a:t>
             </a:r>
-            <a:endParaRPr lang="en-US" sz="1200" dirty="0"/>
+            <a:endParaRPr lang="en-US" sz="1100" dirty="0"/>
           </a:p>
         </p:txBody>
       </p:sp>
@@ -8253,20 +8240,19 @@
           </p:nvPr>
         </p:nvGraphicFramePr>
         <p:xfrm>
-          <a:off x="640080" y="2615184"/>
-          <a:ext cx="7315200" cy="914400"/>
+          <a:off x="640080" y="2487168"/>
+          <a:ext cx="5257800" cy="914400"/>
         </p:xfrm>
         <a:graphic>
           <a:graphicData uri="http://schemas.openxmlformats.org/drawingml/2006/table">
             <a:tbl>
               <a:tblPr/>
               <a:tblGrid>
-                <a:gridCol w="1965960"/>
                 <a:gridCol w="1783080"/>
-                <a:gridCol w="2057400"/>
-                <a:gridCol w="1508760"/>
+                <a:gridCol w="1691640"/>
+                <a:gridCol w="1783080"/>
               </a:tblGrid>
-              <a:tr h="324612">
+              <a:tr h="288036">
                 <a:tc>
                   <a:txBody>
                     <a:bodyPr/>
@@ -8352,7 +8338,7 @@
                           <a:ea typeface="Calibri" pitchFamily="34" charset="-122"/>
                           <a:cs typeface="Calibri" pitchFamily="34" charset="-120"/>
                         </a:rPr>
-                        <a:t>B0  (b_LQ = 0 고정)</a:t>
+                        <a:t>B0  b_LQ=0</a:t>
                       </a:r>
                       <a:endParaRPr lang="en-US" sz="1050" dirty="0">
                         <a:latin typeface="Calibri" charset="0"/>
@@ -8420,7 +8406,7 @@
                           <a:ea typeface="Calibri" pitchFamily="34" charset="-122"/>
                           <a:cs typeface="Calibri" pitchFamily="34" charset="-120"/>
                         </a:rPr>
-                        <a:t>C0  (b_LQ 학습, b_LQ = −4.12)</a:t>
+                        <a:t>C0  b_LQ 학습</a:t>
                       </a:r>
                       <a:endParaRPr lang="en-US" sz="1050" dirty="0">
                         <a:latin typeface="Calibri" charset="0"/>
@@ -8471,76 +8457,8 @@
                     </a:solidFill>
                   </a:tcPr>
                 </a:tc>
-                <a:tc>
-                  <a:txBody>
-                    <a:bodyPr/>
-                    <a:lstStyle/>
-                    <a:p>
-                      <a:pPr algn="ctr" indent="0" marL="0">
-                        <a:buNone/>
-                      </a:pPr>
-                      <a:r>
-                        <a:rPr lang="en-US" sz="1050" b="1" dirty="0">
-                          <a:solidFill>
-                            <a:srgbClr val="FFFFFF"/>
-                          </a:solidFill>
-                          <a:latin typeface="Calibri" pitchFamily="34" charset="0"/>
-                          <a:ea typeface="Calibri" pitchFamily="34" charset="-122"/>
-                          <a:cs typeface="Calibri" pitchFamily="34" charset="-120"/>
-                        </a:rPr>
-                        <a:t>변화</a:t>
-                      </a:r>
-                      <a:endParaRPr lang="en-US" sz="1050" dirty="0">
-                        <a:latin typeface="Calibri" charset="0"/>
-                        <a:ea typeface="Calibri" charset="0"/>
-                        <a:cs typeface="Calibri" charset="0"/>
-                      </a:endParaRPr>
-                    </a:p>
-                  </a:txBody>
-                  <a:tcPr marL="91440" marR="91440" marT="45720" marB="45720" anchor="ctr">
-                    <a:lnL w="6350" cap="flat" cmpd="sng" algn="ctr">
-                      <a:solidFill>
-                        <a:srgbClr val="DCD6CC"/>
-                      </a:solidFill>
-                      <a:prstDash val="solid"/>
-                      <a:round/>
-                      <a:headEnd type="none" w="med" len="med"/>
-                      <a:tailEnd type="none" w="med" len="med"/>
-                    </a:lnL>
-                    <a:lnR w="6350" cap="flat" cmpd="sng" algn="ctr">
-                      <a:solidFill>
-                        <a:srgbClr val="DCD6CC"/>
-                      </a:solidFill>
-                      <a:prstDash val="solid"/>
-                      <a:round/>
-                      <a:headEnd type="none" w="med" len="med"/>
-                      <a:tailEnd type="none" w="med" len="med"/>
-                    </a:lnR>
-                    <a:lnT w="6350" cap="flat" cmpd="sng" algn="ctr">
-                      <a:solidFill>
-                        <a:srgbClr val="DCD6CC"/>
-                      </a:solidFill>
-                      <a:prstDash val="solid"/>
-                      <a:round/>
-                      <a:headEnd type="none" w="med" len="med"/>
-                      <a:tailEnd type="none" w="med" len="med"/>
-                    </a:lnT>
-                    <a:lnB w="6350" cap="flat" cmpd="sng" algn="ctr">
-                      <a:solidFill>
-                        <a:srgbClr val="DCD6CC"/>
-                      </a:solidFill>
-                      <a:prstDash val="solid"/>
-                      <a:round/>
-                      <a:headEnd type="none" w="med" len="med"/>
-                      <a:tailEnd type="none" w="med" len="med"/>
-                    </a:lnB>
-                    <a:solidFill>
-                      <a:srgbClr val="2E2422"/>
-                    </a:solidFill>
-                  </a:tcPr>
-                </a:tc>
               </a:tr>
-              <a:tr h="324612">
+              <a:tr h="288036">
                 <a:tc>
                   <a:txBody>
                     <a:bodyPr/>
@@ -8558,7 +8476,7 @@
                           <a:ea typeface="Calibri" pitchFamily="34" charset="-122"/>
                           <a:cs typeface="Calibri" pitchFamily="34" charset="-120"/>
                         </a:rPr>
-                        <a:t>LQ 사전 가중 AUC</a:t>
+                        <a:t>LQ 사전 가중</a:t>
                       </a:r>
                       <a:endParaRPr lang="en-US" sz="1050" dirty="0">
                         <a:latin typeface="Calibri" charset="0"/>
@@ -8680,9 +8598,9 @@
                         <a:buNone/>
                       </a:pPr>
                       <a:r>
-                        <a:rPr lang="en-US" sz="1050" b="1" dirty="0">
+                        <a:rPr lang="en-US" sz="1050" dirty="0">
                           <a:solidFill>
-                            <a:srgbClr val="2E2422"/>
+                            <a:srgbClr val="7A6A63"/>
                           </a:solidFill>
                           <a:latin typeface="Calibri" pitchFamily="34" charset="0"/>
                           <a:ea typeface="Calibri" pitchFamily="34" charset="-122"/>
@@ -8736,73 +8654,8 @@
                     </a:lnB>
                   </a:tcPr>
                 </a:tc>
-                <a:tc>
-                  <a:txBody>
-                    <a:bodyPr/>
-                    <a:lstStyle/>
-                    <a:p>
-                      <a:pPr algn="ctr" indent="0" marL="0">
-                        <a:buNone/>
-                      </a:pPr>
-                      <a:r>
-                        <a:rPr lang="en-US" sz="1050" dirty="0">
-                          <a:solidFill>
-                            <a:srgbClr val="7A6A63"/>
-                          </a:solidFill>
-                          <a:latin typeface="Calibri" pitchFamily="34" charset="0"/>
-                          <a:ea typeface="Calibri" pitchFamily="34" charset="-122"/>
-                          <a:cs typeface="Calibri" pitchFamily="34" charset="-120"/>
-                        </a:rPr>
-                        <a:t>변화 없음 (예측대로)</a:t>
-                      </a:r>
-                      <a:endParaRPr lang="en-US" sz="1050" dirty="0">
-                        <a:latin typeface="Calibri" charset="0"/>
-                        <a:ea typeface="Calibri" charset="0"/>
-                        <a:cs typeface="Calibri" charset="0"/>
-                      </a:endParaRPr>
-                    </a:p>
-                  </a:txBody>
-                  <a:tcPr marL="91440" marR="91440" marT="45720" marB="45720" anchor="ctr">
-                    <a:lnL w="6350" cap="flat" cmpd="sng" algn="ctr">
-                      <a:solidFill>
-                        <a:srgbClr val="DCD6CC"/>
-                      </a:solidFill>
-                      <a:prstDash val="solid"/>
-                      <a:round/>
-                      <a:headEnd type="none" w="med" len="med"/>
-                      <a:tailEnd type="none" w="med" len="med"/>
-                    </a:lnL>
-                    <a:lnR w="6350" cap="flat" cmpd="sng" algn="ctr">
-                      <a:solidFill>
-                        <a:srgbClr val="DCD6CC"/>
-                      </a:solidFill>
-                      <a:prstDash val="solid"/>
-                      <a:round/>
-                      <a:headEnd type="none" w="med" len="med"/>
-                      <a:tailEnd type="none" w="med" len="med"/>
-                    </a:lnR>
-                    <a:lnT w="6350" cap="flat" cmpd="sng" algn="ctr">
-                      <a:solidFill>
-                        <a:srgbClr val="DCD6CC"/>
-                      </a:solidFill>
-                      <a:prstDash val="solid"/>
-                      <a:round/>
-                      <a:headEnd type="none" w="med" len="med"/>
-                      <a:tailEnd type="none" w="med" len="med"/>
-                    </a:lnT>
-                    <a:lnB w="6350" cap="flat" cmpd="sng" algn="ctr">
-                      <a:solidFill>
-                        <a:srgbClr val="DCD6CC"/>
-                      </a:solidFill>
-                      <a:prstDash val="solid"/>
-                      <a:round/>
-                      <a:headEnd type="none" w="med" len="med"/>
-                      <a:tailEnd type="none" w="med" len="med"/>
-                    </a:lnB>
-                  </a:tcPr>
-                </a:tc>
               </a:tr>
-              <a:tr h="324612">
+              <a:tr h="288036">
                 <a:tc>
                   <a:txBody>
                     <a:bodyPr/>
@@ -8820,7 +8673,7 @@
                           <a:ea typeface="Calibri" pitchFamily="34" charset="-122"/>
                           <a:cs typeface="Calibri" pitchFamily="34" charset="-120"/>
                         </a:rPr>
-                        <a:t>LQ 사후 가중 AUC</a:t>
+                        <a:t>LQ 사후 가중</a:t>
                       </a:r>
                       <a:endParaRPr lang="en-US" sz="1050" dirty="0">
                         <a:latin typeface="Calibri" charset="0"/>
@@ -8944,7 +8797,7 @@
                       <a:r>
                         <a:rPr lang="en-US" sz="1050" b="1" dirty="0">
                           <a:solidFill>
-                            <a:srgbClr val="2E2422"/>
+                            <a:srgbClr val="5F7F6E"/>
                           </a:solidFill>
                           <a:latin typeface="Calibri" pitchFamily="34" charset="0"/>
                           <a:ea typeface="Calibri" pitchFamily="34" charset="-122"/>
@@ -8998,73 +8851,8 @@
                     </a:lnB>
                   </a:tcPr>
                 </a:tc>
-                <a:tc>
-                  <a:txBody>
-                    <a:bodyPr/>
-                    <a:lstStyle/>
-                    <a:p>
-                      <a:pPr algn="ctr" indent="0" marL="0">
-                        <a:buNone/>
-                      </a:pPr>
-                      <a:r>
-                        <a:rPr lang="en-US" sz="1050" b="1" dirty="0">
-                          <a:solidFill>
-                            <a:srgbClr val="5F7F6E"/>
-                          </a:solidFill>
-                          <a:latin typeface="Calibri" pitchFamily="34" charset="0"/>
-                          <a:ea typeface="Calibri" pitchFamily="34" charset="-122"/>
-                          <a:cs typeface="Calibri" pitchFamily="34" charset="-120"/>
-                        </a:rPr>
-                        <a:t>+0.0346</a:t>
-                      </a:r>
-                      <a:endParaRPr lang="en-US" sz="1050" dirty="0">
-                        <a:latin typeface="Calibri" charset="0"/>
-                        <a:ea typeface="Calibri" charset="0"/>
-                        <a:cs typeface="Calibri" charset="0"/>
-                      </a:endParaRPr>
-                    </a:p>
-                  </a:txBody>
-                  <a:tcPr marL="91440" marR="91440" marT="45720" marB="45720" anchor="ctr">
-                    <a:lnL w="6350" cap="flat" cmpd="sng" algn="ctr">
-                      <a:solidFill>
-                        <a:srgbClr val="DCD6CC"/>
-                      </a:solidFill>
-                      <a:prstDash val="solid"/>
-                      <a:round/>
-                      <a:headEnd type="none" w="med" len="med"/>
-                      <a:tailEnd type="none" w="med" len="med"/>
-                    </a:lnL>
-                    <a:lnR w="6350" cap="flat" cmpd="sng" algn="ctr">
-                      <a:solidFill>
-                        <a:srgbClr val="DCD6CC"/>
-                      </a:solidFill>
-                      <a:prstDash val="solid"/>
-                      <a:round/>
-                      <a:headEnd type="none" w="med" len="med"/>
-                      <a:tailEnd type="none" w="med" len="med"/>
-                    </a:lnR>
-                    <a:lnT w="6350" cap="flat" cmpd="sng" algn="ctr">
-                      <a:solidFill>
-                        <a:srgbClr val="DCD6CC"/>
-                      </a:solidFill>
-                      <a:prstDash val="solid"/>
-                      <a:round/>
-                      <a:headEnd type="none" w="med" len="med"/>
-                      <a:tailEnd type="none" w="med" len="med"/>
-                    </a:lnT>
-                    <a:lnB w="6350" cap="flat" cmpd="sng" algn="ctr">
-                      <a:solidFill>
-                        <a:srgbClr val="DCD6CC"/>
-                      </a:solidFill>
-                      <a:prstDash val="solid"/>
-                      <a:round/>
-                      <a:headEnd type="none" w="med" len="med"/>
-                      <a:tailEnd type="none" w="med" len="med"/>
-                    </a:lnB>
-                  </a:tcPr>
-                </a:tc>
               </a:tr>
-              <a:tr h="324612">
+              <a:tr h="288036">
                 <a:tc>
                   <a:txBody>
                     <a:bodyPr/>
@@ -9206,7 +8994,7 @@
                       <a:r>
                         <a:rPr lang="en-US" sz="1050" b="1" dirty="0">
                           <a:solidFill>
-                            <a:srgbClr val="2E2422"/>
+                            <a:srgbClr val="5F7F6E"/>
                           </a:solidFill>
                           <a:latin typeface="Calibri" pitchFamily="34" charset="0"/>
                           <a:ea typeface="Calibri" pitchFamily="34" charset="-122"/>
@@ -9260,335 +9048,8 @@
                     </a:lnB>
                   </a:tcPr>
                 </a:tc>
-                <a:tc>
-                  <a:txBody>
-                    <a:bodyPr/>
-                    <a:lstStyle/>
-                    <a:p>
-                      <a:pPr algn="ctr" indent="0" marL="0">
-                        <a:buNone/>
-                      </a:pPr>
-                      <a:r>
-                        <a:rPr lang="en-US" sz="1050" b="1" dirty="0">
-                          <a:solidFill>
-                            <a:srgbClr val="5F7F6E"/>
-                          </a:solidFill>
-                          <a:latin typeface="Calibri" pitchFamily="34" charset="0"/>
-                          <a:ea typeface="Calibri" pitchFamily="34" charset="-122"/>
-                          <a:cs typeface="Calibri" pitchFamily="34" charset="-120"/>
-                        </a:rPr>
-                        <a:t>−0.0098</a:t>
-                      </a:r>
-                      <a:endParaRPr lang="en-US" sz="1050" dirty="0">
-                        <a:latin typeface="Calibri" charset="0"/>
-                        <a:ea typeface="Calibri" charset="0"/>
-                        <a:cs typeface="Calibri" charset="0"/>
-                      </a:endParaRPr>
-                    </a:p>
-                  </a:txBody>
-                  <a:tcPr marL="91440" marR="91440" marT="45720" marB="45720" anchor="ctr">
-                    <a:lnL w="6350" cap="flat" cmpd="sng" algn="ctr">
-                      <a:solidFill>
-                        <a:srgbClr val="DCD6CC"/>
-                      </a:solidFill>
-                      <a:prstDash val="solid"/>
-                      <a:round/>
-                      <a:headEnd type="none" w="med" len="med"/>
-                      <a:tailEnd type="none" w="med" len="med"/>
-                    </a:lnL>
-                    <a:lnR w="6350" cap="flat" cmpd="sng" algn="ctr">
-                      <a:solidFill>
-                        <a:srgbClr val="DCD6CC"/>
-                      </a:solidFill>
-                      <a:prstDash val="solid"/>
-                      <a:round/>
-                      <a:headEnd type="none" w="med" len="med"/>
-                      <a:tailEnd type="none" w="med" len="med"/>
-                    </a:lnR>
-                    <a:lnT w="6350" cap="flat" cmpd="sng" algn="ctr">
-                      <a:solidFill>
-                        <a:srgbClr val="DCD6CC"/>
-                      </a:solidFill>
-                      <a:prstDash val="solid"/>
-                      <a:round/>
-                      <a:headEnd type="none" w="med" len="med"/>
-                      <a:tailEnd type="none" w="med" len="med"/>
-                    </a:lnT>
-                    <a:lnB w="6350" cap="flat" cmpd="sng" algn="ctr">
-                      <a:solidFill>
-                        <a:srgbClr val="DCD6CC"/>
-                      </a:solidFill>
-                      <a:prstDash val="solid"/>
-                      <a:round/>
-                      <a:headEnd type="none" w="med" len="med"/>
-                      <a:tailEnd type="none" w="med" len="med"/>
-                    </a:lnB>
-                  </a:tcPr>
-                </a:tc>
               </a:tr>
-              <a:tr h="324612">
-                <a:tc>
-                  <a:txBody>
-                    <a:bodyPr/>
-                    <a:lstStyle/>
-                    <a:p>
-                      <a:pPr algn="ctr" indent="0" marL="0">
-                        <a:buNone/>
-                      </a:pPr>
-                      <a:r>
-                        <a:rPr lang="en-US" sz="1050" dirty="0">
-                          <a:solidFill>
-                            <a:srgbClr val="2E2422"/>
-                          </a:solidFill>
-                          <a:latin typeface="Calibri" pitchFamily="34" charset="0"/>
-                          <a:ea typeface="Calibri" pitchFamily="34" charset="-122"/>
-                          <a:cs typeface="Calibri" pitchFamily="34" charset="-120"/>
-                        </a:rPr>
-                        <a:t>LQ BCE (사전)</a:t>
-                      </a:r>
-                      <a:endParaRPr lang="en-US" sz="1050" dirty="0">
-                        <a:latin typeface="Calibri" charset="0"/>
-                        <a:ea typeface="Calibri" charset="0"/>
-                        <a:cs typeface="Calibri" charset="0"/>
-                      </a:endParaRPr>
-                    </a:p>
-                  </a:txBody>
-                  <a:tcPr marL="91440" marR="91440" marT="45720" marB="45720" anchor="ctr">
-                    <a:lnL w="6350" cap="flat" cmpd="sng" algn="ctr">
-                      <a:solidFill>
-                        <a:srgbClr val="DCD6CC"/>
-                      </a:solidFill>
-                      <a:prstDash val="solid"/>
-                      <a:round/>
-                      <a:headEnd type="none" w="med" len="med"/>
-                      <a:tailEnd type="none" w="med" len="med"/>
-                    </a:lnL>
-                    <a:lnR w="6350" cap="flat" cmpd="sng" algn="ctr">
-                      <a:solidFill>
-                        <a:srgbClr val="DCD6CC"/>
-                      </a:solidFill>
-                      <a:prstDash val="solid"/>
-                      <a:round/>
-                      <a:headEnd type="none" w="med" len="med"/>
-                      <a:tailEnd type="none" w="med" len="med"/>
-                    </a:lnR>
-                    <a:lnT w="6350" cap="flat" cmpd="sng" algn="ctr">
-                      <a:solidFill>
-                        <a:srgbClr val="DCD6CC"/>
-                      </a:solidFill>
-                      <a:prstDash val="solid"/>
-                      <a:round/>
-                      <a:headEnd type="none" w="med" len="med"/>
-                      <a:tailEnd type="none" w="med" len="med"/>
-                    </a:lnT>
-                    <a:lnB w="6350" cap="flat" cmpd="sng" algn="ctr">
-                      <a:solidFill>
-                        <a:srgbClr val="DCD6CC"/>
-                      </a:solidFill>
-                      <a:prstDash val="solid"/>
-                      <a:round/>
-                      <a:headEnd type="none" w="med" len="med"/>
-                      <a:tailEnd type="none" w="med" len="med"/>
-                    </a:lnB>
-                  </a:tcPr>
-                </a:tc>
-                <a:tc>
-                  <a:txBody>
-                    <a:bodyPr/>
-                    <a:lstStyle/>
-                    <a:p>
-                      <a:pPr algn="ctr" indent="0" marL="0">
-                        <a:buNone/>
-                      </a:pPr>
-                      <a:r>
-                        <a:rPr lang="en-US" sz="1050" dirty="0">
-                          <a:solidFill>
-                            <a:srgbClr val="2E2422"/>
-                          </a:solidFill>
-                          <a:latin typeface="Calibri" pitchFamily="34" charset="0"/>
-                          <a:ea typeface="Calibri" pitchFamily="34" charset="-122"/>
-                          <a:cs typeface="Calibri" pitchFamily="34" charset="-120"/>
-                        </a:rPr>
-                        <a:t>0.8760</a:t>
-                      </a:r>
-                      <a:endParaRPr lang="en-US" sz="1050" dirty="0">
-                        <a:latin typeface="Calibri" charset="0"/>
-                        <a:ea typeface="Calibri" charset="0"/>
-                        <a:cs typeface="Calibri" charset="0"/>
-                      </a:endParaRPr>
-                    </a:p>
-                  </a:txBody>
-                  <a:tcPr marL="91440" marR="91440" marT="45720" marB="45720" anchor="ctr">
-                    <a:lnL w="6350" cap="flat" cmpd="sng" algn="ctr">
-                      <a:solidFill>
-                        <a:srgbClr val="DCD6CC"/>
-                      </a:solidFill>
-                      <a:prstDash val="solid"/>
-                      <a:round/>
-                      <a:headEnd type="none" w="med" len="med"/>
-                      <a:tailEnd type="none" w="med" len="med"/>
-                    </a:lnL>
-                    <a:lnR w="6350" cap="flat" cmpd="sng" algn="ctr">
-                      <a:solidFill>
-                        <a:srgbClr val="DCD6CC"/>
-                      </a:solidFill>
-                      <a:prstDash val="solid"/>
-                      <a:round/>
-                      <a:headEnd type="none" w="med" len="med"/>
-                      <a:tailEnd type="none" w="med" len="med"/>
-                    </a:lnR>
-                    <a:lnT w="6350" cap="flat" cmpd="sng" algn="ctr">
-                      <a:solidFill>
-                        <a:srgbClr val="DCD6CC"/>
-                      </a:solidFill>
-                      <a:prstDash val="solid"/>
-                      <a:round/>
-                      <a:headEnd type="none" w="med" len="med"/>
-                      <a:tailEnd type="none" w="med" len="med"/>
-                    </a:lnT>
-                    <a:lnB w="6350" cap="flat" cmpd="sng" algn="ctr">
-                      <a:solidFill>
-                        <a:srgbClr val="DCD6CC"/>
-                      </a:solidFill>
-                      <a:prstDash val="solid"/>
-                      <a:round/>
-                      <a:headEnd type="none" w="med" len="med"/>
-                      <a:tailEnd type="none" w="med" len="med"/>
-                    </a:lnB>
-                  </a:tcPr>
-                </a:tc>
-                <a:tc>
-                  <a:txBody>
-                    <a:bodyPr/>
-                    <a:lstStyle/>
-                    <a:p>
-                      <a:pPr algn="ctr" indent="0" marL="0">
-                        <a:buNone/>
-                      </a:pPr>
-                      <a:r>
-                        <a:rPr lang="en-US" sz="1050" b="1" dirty="0">
-                          <a:solidFill>
-                            <a:srgbClr val="2E2422"/>
-                          </a:solidFill>
-                          <a:latin typeface="Calibri" pitchFamily="34" charset="0"/>
-                          <a:ea typeface="Calibri" pitchFamily="34" charset="-122"/>
-                          <a:cs typeface="Calibri" pitchFamily="34" charset="-120"/>
-                        </a:rPr>
-                        <a:t>0.7257</a:t>
-                      </a:r>
-                      <a:endParaRPr lang="en-US" sz="1050" dirty="0">
-                        <a:latin typeface="Calibri" charset="0"/>
-                        <a:ea typeface="Calibri" charset="0"/>
-                        <a:cs typeface="Calibri" charset="0"/>
-                      </a:endParaRPr>
-                    </a:p>
-                  </a:txBody>
-                  <a:tcPr marL="91440" marR="91440" marT="45720" marB="45720" anchor="ctr">
-                    <a:lnL w="6350" cap="flat" cmpd="sng" algn="ctr">
-                      <a:solidFill>
-                        <a:srgbClr val="DCD6CC"/>
-                      </a:solidFill>
-                      <a:prstDash val="solid"/>
-                      <a:round/>
-                      <a:headEnd type="none" w="med" len="med"/>
-                      <a:tailEnd type="none" w="med" len="med"/>
-                    </a:lnL>
-                    <a:lnR w="6350" cap="flat" cmpd="sng" algn="ctr">
-                      <a:solidFill>
-                        <a:srgbClr val="DCD6CC"/>
-                      </a:solidFill>
-                      <a:prstDash val="solid"/>
-                      <a:round/>
-                      <a:headEnd type="none" w="med" len="med"/>
-                      <a:tailEnd type="none" w="med" len="med"/>
-                    </a:lnR>
-                    <a:lnT w="6350" cap="flat" cmpd="sng" algn="ctr">
-                      <a:solidFill>
-                        <a:srgbClr val="DCD6CC"/>
-                      </a:solidFill>
-                      <a:prstDash val="solid"/>
-                      <a:round/>
-                      <a:headEnd type="none" w="med" len="med"/>
-                      <a:tailEnd type="none" w="med" len="med"/>
-                    </a:lnT>
-                    <a:lnB w="6350" cap="flat" cmpd="sng" algn="ctr">
-                      <a:solidFill>
-                        <a:srgbClr val="DCD6CC"/>
-                      </a:solidFill>
-                      <a:prstDash val="solid"/>
-                      <a:round/>
-                      <a:headEnd type="none" w="med" len="med"/>
-                      <a:tailEnd type="none" w="med" len="med"/>
-                    </a:lnB>
-                  </a:tcPr>
-                </a:tc>
-                <a:tc>
-                  <a:txBody>
-                    <a:bodyPr/>
-                    <a:lstStyle/>
-                    <a:p>
-                      <a:pPr algn="ctr" indent="0" marL="0">
-                        <a:buNone/>
-                      </a:pPr>
-                      <a:r>
-                        <a:rPr lang="en-US" sz="1050" b="1" dirty="0">
-                          <a:solidFill>
-                            <a:srgbClr val="5F7F6E"/>
-                          </a:solidFill>
-                          <a:latin typeface="Calibri" pitchFamily="34" charset="0"/>
-                          <a:ea typeface="Calibri" pitchFamily="34" charset="-122"/>
-                          <a:cs typeface="Calibri" pitchFamily="34" charset="-120"/>
-                        </a:rPr>
-                        <a:t>−0.1503</a:t>
-                      </a:r>
-                      <a:endParaRPr lang="en-US" sz="1050" dirty="0">
-                        <a:latin typeface="Calibri" charset="0"/>
-                        <a:ea typeface="Calibri" charset="0"/>
-                        <a:cs typeface="Calibri" charset="0"/>
-                      </a:endParaRPr>
-                    </a:p>
-                  </a:txBody>
-                  <a:tcPr marL="91440" marR="91440" marT="45720" marB="45720" anchor="ctr">
-                    <a:lnL w="6350" cap="flat" cmpd="sng" algn="ctr">
-                      <a:solidFill>
-                        <a:srgbClr val="DCD6CC"/>
-                      </a:solidFill>
-                      <a:prstDash val="solid"/>
-                      <a:round/>
-                      <a:headEnd type="none" w="med" len="med"/>
-                      <a:tailEnd type="none" w="med" len="med"/>
-                    </a:lnL>
-                    <a:lnR w="6350" cap="flat" cmpd="sng" algn="ctr">
-                      <a:solidFill>
-                        <a:srgbClr val="DCD6CC"/>
-                      </a:solidFill>
-                      <a:prstDash val="solid"/>
-                      <a:round/>
-                      <a:headEnd type="none" w="med" len="med"/>
-                      <a:tailEnd type="none" w="med" len="med"/>
-                    </a:lnR>
-                    <a:lnT w="6350" cap="flat" cmpd="sng" algn="ctr">
-                      <a:solidFill>
-                        <a:srgbClr val="DCD6CC"/>
-                      </a:solidFill>
-                      <a:prstDash val="solid"/>
-                      <a:round/>
-                      <a:headEnd type="none" w="med" len="med"/>
-                      <a:tailEnd type="none" w="med" len="med"/>
-                    </a:lnT>
-                    <a:lnB w="6350" cap="flat" cmpd="sng" algn="ctr">
-                      <a:solidFill>
-                        <a:srgbClr val="DCD6CC"/>
-                      </a:solidFill>
-                      <a:prstDash val="solid"/>
-                      <a:round/>
-                      <a:headEnd type="none" w="med" len="med"/>
-                      <a:tailEnd type="none" w="med" len="med"/>
-                    </a:lnB>
-                  </a:tcPr>
-                </a:tc>
-              </a:tr>
-              <a:tr h="324612">
+              <a:tr h="288036">
                 <a:tc>
                   <a:txBody>
                     <a:bodyPr/>
@@ -9784,73 +9245,8 @@
                     </a:lnB>
                   </a:tcPr>
                 </a:tc>
-                <a:tc>
-                  <a:txBody>
-                    <a:bodyPr/>
-                    <a:lstStyle/>
-                    <a:p>
-                      <a:pPr algn="ctr" indent="0" marL="0">
-                        <a:buNone/>
-                      </a:pPr>
-                      <a:r>
-                        <a:rPr lang="en-US" sz="1050" dirty="0">
-                          <a:solidFill>
-                            <a:srgbClr val="7A6A63"/>
-                          </a:solidFill>
-                          <a:latin typeface="Calibri" pitchFamily="34" charset="0"/>
-                          <a:ea typeface="Calibri" pitchFamily="34" charset="-122"/>
-                          <a:cs typeface="Calibri" pitchFamily="34" charset="-120"/>
-                        </a:rPr>
-                        <a:t>실제 발생률 0.476</a:t>
-                      </a:r>
-                      <a:endParaRPr lang="en-US" sz="1050" dirty="0">
-                        <a:latin typeface="Calibri" charset="0"/>
-                        <a:ea typeface="Calibri" charset="0"/>
-                        <a:cs typeface="Calibri" charset="0"/>
-                      </a:endParaRPr>
-                    </a:p>
-                  </a:txBody>
-                  <a:tcPr marL="91440" marR="91440" marT="45720" marB="45720" anchor="ctr">
-                    <a:lnL w="6350" cap="flat" cmpd="sng" algn="ctr">
-                      <a:solidFill>
-                        <a:srgbClr val="DCD6CC"/>
-                      </a:solidFill>
-                      <a:prstDash val="solid"/>
-                      <a:round/>
-                      <a:headEnd type="none" w="med" len="med"/>
-                      <a:tailEnd type="none" w="med" len="med"/>
-                    </a:lnL>
-                    <a:lnR w="6350" cap="flat" cmpd="sng" algn="ctr">
-                      <a:solidFill>
-                        <a:srgbClr val="DCD6CC"/>
-                      </a:solidFill>
-                      <a:prstDash val="solid"/>
-                      <a:round/>
-                      <a:headEnd type="none" w="med" len="med"/>
-                      <a:tailEnd type="none" w="med" len="med"/>
-                    </a:lnR>
-                    <a:lnT w="6350" cap="flat" cmpd="sng" algn="ctr">
-                      <a:solidFill>
-                        <a:srgbClr val="DCD6CC"/>
-                      </a:solidFill>
-                      <a:prstDash val="solid"/>
-                      <a:round/>
-                      <a:headEnd type="none" w="med" len="med"/>
-                      <a:tailEnd type="none" w="med" len="med"/>
-                    </a:lnT>
-                    <a:lnB w="6350" cap="flat" cmpd="sng" algn="ctr">
-                      <a:solidFill>
-                        <a:srgbClr val="DCD6CC"/>
-                      </a:solidFill>
-                      <a:prstDash val="solid"/>
-                      <a:round/>
-                      <a:headEnd type="none" w="med" len="med"/>
-                      <a:tailEnd type="none" w="med" len="med"/>
-                    </a:lnB>
-                  </a:tcPr>
-                </a:tc>
               </a:tr>
-              <a:tr h="324612">
+              <a:tr h="288036">
                 <a:tc>
                   <a:txBody>
                     <a:bodyPr/>
@@ -9868,7 +9264,7 @@
                           <a:ea typeface="Calibri" pitchFamily="34" charset="-122"/>
                           <a:cs typeface="Calibri" pitchFamily="34" charset="-120"/>
                         </a:rPr>
-                        <a:t>LS 사전 가중 AUC</a:t>
+                        <a:t>LS 사전 가중</a:t>
                       </a:r>
                       <a:endParaRPr lang="en-US" sz="1050" dirty="0">
                         <a:latin typeface="Calibri" charset="0"/>
@@ -9990,9 +9386,9 @@
                         <a:buNone/>
                       </a:pPr>
                       <a:r>
-                        <a:rPr lang="en-US" sz="1050" b="1" dirty="0">
+                        <a:rPr lang="en-US" sz="1050" dirty="0">
                           <a:solidFill>
-                            <a:srgbClr val="2E2422"/>
+                            <a:srgbClr val="7A6A63"/>
                           </a:solidFill>
                           <a:latin typeface="Calibri" pitchFamily="34" charset="0"/>
                           <a:ea typeface="Calibri" pitchFamily="34" charset="-122"/>
@@ -10046,73 +9442,8 @@
                     </a:lnB>
                   </a:tcPr>
                 </a:tc>
-                <a:tc>
-                  <a:txBody>
-                    <a:bodyPr/>
-                    <a:lstStyle/>
-                    <a:p>
-                      <a:pPr algn="ctr" indent="0" marL="0">
-                        <a:buNone/>
-                      </a:pPr>
-                      <a:r>
-                        <a:rPr lang="en-US" sz="1050" dirty="0">
-                          <a:solidFill>
-                            <a:srgbClr val="7A6A63"/>
-                          </a:solidFill>
-                          <a:latin typeface="Calibri" pitchFamily="34" charset="0"/>
-                          <a:ea typeface="Calibri" pitchFamily="34" charset="-122"/>
-                          <a:cs typeface="Calibri" pitchFamily="34" charset="-120"/>
-                        </a:rPr>
-                        <a:t>완전히 동일 (0.00e+00)</a:t>
-                      </a:r>
-                      <a:endParaRPr lang="en-US" sz="1050" dirty="0">
-                        <a:latin typeface="Calibri" charset="0"/>
-                        <a:ea typeface="Calibri" charset="0"/>
-                        <a:cs typeface="Calibri" charset="0"/>
-                      </a:endParaRPr>
-                    </a:p>
-                  </a:txBody>
-                  <a:tcPr marL="91440" marR="91440" marT="45720" marB="45720" anchor="ctr">
-                    <a:lnL w="6350" cap="flat" cmpd="sng" algn="ctr">
-                      <a:solidFill>
-                        <a:srgbClr val="DCD6CC"/>
-                      </a:solidFill>
-                      <a:prstDash val="solid"/>
-                      <a:round/>
-                      <a:headEnd type="none" w="med" len="med"/>
-                      <a:tailEnd type="none" w="med" len="med"/>
-                    </a:lnL>
-                    <a:lnR w="6350" cap="flat" cmpd="sng" algn="ctr">
-                      <a:solidFill>
-                        <a:srgbClr val="DCD6CC"/>
-                      </a:solidFill>
-                      <a:prstDash val="solid"/>
-                      <a:round/>
-                      <a:headEnd type="none" w="med" len="med"/>
-                      <a:tailEnd type="none" w="med" len="med"/>
-                    </a:lnR>
-                    <a:lnT w="6350" cap="flat" cmpd="sng" algn="ctr">
-                      <a:solidFill>
-                        <a:srgbClr val="DCD6CC"/>
-                      </a:solidFill>
-                      <a:prstDash val="solid"/>
-                      <a:round/>
-                      <a:headEnd type="none" w="med" len="med"/>
-                      <a:tailEnd type="none" w="med" len="med"/>
-                    </a:lnT>
-                    <a:lnB w="6350" cap="flat" cmpd="sng" algn="ctr">
-                      <a:solidFill>
-                        <a:srgbClr val="DCD6CC"/>
-                      </a:solidFill>
-                      <a:prstDash val="solid"/>
-                      <a:round/>
-                      <a:headEnd type="none" w="med" len="med"/>
-                      <a:tailEnd type="none" w="med" len="med"/>
-                    </a:lnB>
-                  </a:tcPr>
-                </a:tc>
               </a:tr>
-              <a:tr h="324612">
+              <a:tr h="288036">
                 <a:tc>
                   <a:txBody>
                     <a:bodyPr/>
@@ -10130,7 +9461,7 @@
                           <a:ea typeface="Calibri" pitchFamily="34" charset="-122"/>
                           <a:cs typeface="Calibri" pitchFamily="34" charset="-120"/>
                         </a:rPr>
-                        <a:t>LS 사후 가중 AUC</a:t>
+                        <a:t>LS 사후 가중</a:t>
                       </a:r>
                       <a:endParaRPr lang="en-US" sz="1050" dirty="0">
                         <a:latin typeface="Calibri" charset="0"/>
@@ -10252,9 +9583,9 @@
                         <a:buNone/>
                       </a:pPr>
                       <a:r>
-                        <a:rPr lang="en-US" sz="1050" b="1" dirty="0">
+                        <a:rPr lang="en-US" sz="1050" dirty="0">
                           <a:solidFill>
-                            <a:srgbClr val="2E2422"/>
+                            <a:srgbClr val="7A6A63"/>
                           </a:solidFill>
                           <a:latin typeface="Calibri" pitchFamily="34" charset="0"/>
                           <a:ea typeface="Calibri" pitchFamily="34" charset="-122"/>
@@ -10308,71 +9639,6 @@
                     </a:lnB>
                   </a:tcPr>
                 </a:tc>
-                <a:tc>
-                  <a:txBody>
-                    <a:bodyPr/>
-                    <a:lstStyle/>
-                    <a:p>
-                      <a:pPr algn="ctr" indent="0" marL="0">
-                        <a:buNone/>
-                      </a:pPr>
-                      <a:r>
-                        <a:rPr lang="en-US" sz="1050" dirty="0">
-                          <a:solidFill>
-                            <a:srgbClr val="7A6A63"/>
-                          </a:solidFill>
-                          <a:latin typeface="Calibri" pitchFamily="34" charset="0"/>
-                          <a:ea typeface="Calibri" pitchFamily="34" charset="-122"/>
-                          <a:cs typeface="Calibri" pitchFamily="34" charset="-120"/>
-                        </a:rPr>
-                        <a:t>−0.0021</a:t>
-                      </a:r>
-                      <a:endParaRPr lang="en-US" sz="1050" dirty="0">
-                        <a:latin typeface="Calibri" charset="0"/>
-                        <a:ea typeface="Calibri" charset="0"/>
-                        <a:cs typeface="Calibri" charset="0"/>
-                      </a:endParaRPr>
-                    </a:p>
-                  </a:txBody>
-                  <a:tcPr marL="91440" marR="91440" marT="45720" marB="45720" anchor="ctr">
-                    <a:lnL w="6350" cap="flat" cmpd="sng" algn="ctr">
-                      <a:solidFill>
-                        <a:srgbClr val="DCD6CC"/>
-                      </a:solidFill>
-                      <a:prstDash val="solid"/>
-                      <a:round/>
-                      <a:headEnd type="none" w="med" len="med"/>
-                      <a:tailEnd type="none" w="med" len="med"/>
-                    </a:lnL>
-                    <a:lnR w="6350" cap="flat" cmpd="sng" algn="ctr">
-                      <a:solidFill>
-                        <a:srgbClr val="DCD6CC"/>
-                      </a:solidFill>
-                      <a:prstDash val="solid"/>
-                      <a:round/>
-                      <a:headEnd type="none" w="med" len="med"/>
-                      <a:tailEnd type="none" w="med" len="med"/>
-                    </a:lnR>
-                    <a:lnT w="6350" cap="flat" cmpd="sng" algn="ctr">
-                      <a:solidFill>
-                        <a:srgbClr val="DCD6CC"/>
-                      </a:solidFill>
-                      <a:prstDash val="solid"/>
-                      <a:round/>
-                      <a:headEnd type="none" w="med" len="med"/>
-                      <a:tailEnd type="none" w="med" len="med"/>
-                    </a:lnT>
-                    <a:lnB w="6350" cap="flat" cmpd="sng" algn="ctr">
-                      <a:solidFill>
-                        <a:srgbClr val="DCD6CC"/>
-                      </a:solidFill>
-                      <a:prstDash val="solid"/>
-                      <a:round/>
-                      <a:headEnd type="none" w="med" len="med"/>
-                      <a:tailEnd type="none" w="med" len="med"/>
-                    </a:lnB>
-                  </a:tcPr>
-                </a:tc>
               </a:tr>
             </a:tbl>
           </a:graphicData>
@@ -10380,26 +9646,66 @@
       </p:graphicFrame>
       <p:sp>
         <p:nvSpPr>
-          <p:cNvPr id="7" name="Shape 4"/>
+          <p:cNvPr id="9" name="Text 6"/>
+          <p:cNvSpPr txBox="1"/>
+          <p:nvPr/>
+        </p:nvSpPr>
+        <p:spPr>
+          <a:xfrm>
+            <a:off x="640080" y="4572000"/>
+            <a:ext cx="5257800" cy="566928"/>
+          </a:xfrm>
+          <a:prstGeom prst="rect">
+            <a:avLst/>
+          </a:prstGeom>
+          <a:noFill/>
+          <a:ln/>
+        </p:spPr>
+        <p:txBody>
+          <a:bodyPr wrap="square" lIns="0" tIns="0" rIns="0" bIns="0" rtlCol="0" anchor="ctr"/>
+          <a:lstStyle/>
+          <a:p>
+            <a:pPr indent="0" marL="0">
+              <a:lnSpc>
+                <a:spcPts val="1400"/>
+              </a:lnSpc>
+              <a:buNone/>
+            </a:pPr>
+            <a:r>
+              <a:rPr lang="en-US" sz="1100" dirty="0">
+                <a:solidFill>
+                  <a:srgbClr val="2E2422"/>
+                </a:solidFill>
+                <a:latin typeface="Calibri" pitchFamily="34" charset="0"/>
+                <a:ea typeface="Calibri" pitchFamily="34" charset="-122"/>
+                <a:cs typeface="Calibri" pitchFamily="34" charset="-120"/>
+              </a:rPr>
+              <a:t>사전 순위는 두 지표 모두 그대로다. b_LQ는 모든 행에 더해지는 같은 상수라 순위를 못 바꾼다. 확률 수준만 고쳤는데 사후가 올랐다.</a:t>
+            </a:r>
+            <a:endParaRPr lang="en-US" sz="1100" dirty="0"/>
+          </a:p>
+        </p:txBody>
+      </p:sp>
+      <p:sp>
+        <p:nvSpPr>
+          <p:cNvPr id="10" name="Shape 7"/>
           <p:cNvSpPr/>
           <p:nvPr/>
         </p:nvSpPr>
         <p:spPr>
           <a:xfrm>
-            <a:off x="8183880" y="2615184"/>
-            <a:ext cx="3383280" cy="2606040"/>
+            <a:off x="6309360" y="1536192"/>
+            <a:ext cx="310896" cy="310896"/>
           </a:xfrm>
-          <a:prstGeom prst="roundRect">
-            <a:avLst>
-              <a:gd name="adj" fmla="val 3158"/>
-            </a:avLst>
+          <a:prstGeom prst="ellipse">
+            <a:avLst/>
           </a:prstGeom>
           <a:solidFill>
-            <a:srgbClr val="F2EFE6"/>
+            <a:srgbClr val="5F7F6E"/>
           </a:solidFill>
-          <a:ln w="6350">
+          <a:ln w="12700">
             <a:solidFill>
-              <a:srgbClr val="DCD6CC"/>
+              <a:srgbClr val="5F7F6E"/>
             </a:solidFill>
             <a:prstDash val="solid"/>
           </a:ln>
@@ -10407,14 +9713,53 @@
       </p:sp>
       <p:sp>
         <p:nvSpPr>
-          <p:cNvPr id="8" name="Text 5"/>
+          <p:cNvPr id="11" name="Text 8"/>
           <p:cNvSpPr txBox="1"/>
           <p:nvPr/>
         </p:nvSpPr>
         <p:spPr>
           <a:xfrm>
-            <a:off x="8439912" y="2798064"/>
-            <a:ext cx="2880360" cy="274320"/>
+            <a:off x="6309360" y="1536192"/>
+            <a:ext cx="310896" cy="310896"/>
+          </a:xfrm>
+          <a:prstGeom prst="rect">
+            <a:avLst/>
+          </a:prstGeom>
+          <a:noFill/>
+          <a:ln/>
+        </p:spPr>
+        <p:txBody>
+          <a:bodyPr wrap="square" lIns="0" tIns="0" rIns="0" bIns="0" rtlCol="0" anchor="ctr"/>
+          <a:lstStyle/>
+          <a:p>
+            <a:pPr algn="ctr" indent="0" marL="0">
+              <a:buNone/>
+            </a:pPr>
+            <a:r>
+              <a:rPr lang="en-US" sz="1300" b="1" dirty="0">
+                <a:solidFill>
+                  <a:srgbClr val="FFFFFF"/>
+                </a:solidFill>
+                <a:latin typeface="Cambria" pitchFamily="34" charset="0"/>
+                <a:ea typeface="Cambria" pitchFamily="34" charset="-122"/>
+                <a:cs typeface="Cambria" pitchFamily="34" charset="-120"/>
+              </a:rPr>
+              <a:t>2</a:t>
+            </a:r>
+            <a:endParaRPr lang="en-US" sz="1300" dirty="0"/>
+          </a:p>
+        </p:txBody>
+      </p:sp>
+      <p:sp>
+        <p:nvSpPr>
+          <p:cNvPr id="12" name="Text 9"/>
+          <p:cNvSpPr txBox="1"/>
+          <p:nvPr/>
+        </p:nvSpPr>
+        <p:spPr>
+          <a:xfrm>
+            <a:off x="6729984" y="1517904"/>
+            <a:ext cx="4846320" cy="310896"/>
           </a:xfrm>
           <a:prstGeom prst="rect">
             <a:avLst/>
@@ -10430,7 +9775,7 @@
               <a:buNone/>
             </a:pPr>
             <a:r>
-              <a:rPr lang="en-US" sz="1250" b="1" dirty="0">
+              <a:rPr lang="en-US" sz="1500" b="1" dirty="0">
                 <a:solidFill>
                   <a:srgbClr val="2E2422"/>
                 </a:solidFill>
@@ -10438,22 +9783,22 @@
                 <a:ea typeface="Cambria" pitchFamily="34" charset="-122"/>
                 <a:cs typeface="Cambria" pitchFamily="34" charset="-120"/>
               </a:rPr>
-              <a:t>왜 순위는 그대로인가</a:t>
+              <a:t>log k에서 평균을 뺀다(중심화)</a:t>
             </a:r>
-            <a:endParaRPr lang="en-US" sz="1250" dirty="0"/>
+            <a:endParaRPr lang="en-US" sz="1500" dirty="0"/>
           </a:p>
         </p:txBody>
       </p:sp>
       <p:sp>
         <p:nvSpPr>
-          <p:cNvPr id="9" name="Text 6"/>
+          <p:cNvPr id="13" name="Text 10"/>
           <p:cNvSpPr txBox="1"/>
           <p:nvPr/>
         </p:nvSpPr>
         <p:spPr>
           <a:xfrm>
-            <a:off x="8439912" y="3163824"/>
-            <a:ext cx="2880360" cy="1920240"/>
+            <a:off x="6309360" y="1883664"/>
+            <a:ext cx="5257800" cy="512064"/>
           </a:xfrm>
           <a:prstGeom prst="rect">
             <a:avLst/>
@@ -10467,7 +9812,7 @@
           <a:p>
             <a:pPr indent="0" marL="0">
               <a:lnSpc>
-                <a:spcPts val="1500"/>
+                <a:spcPts val="1400"/>
               </a:lnSpc>
               <a:buNone/>
             </a:pPr>
@@ -10480,475 +9825,15 @@
                 <a:ea typeface="Calibri" pitchFamily="34" charset="-122"/>
                 <a:cs typeface="Calibri" pitchFamily="34" charset="-120"/>
               </a:rPr>
-              <a:t>b_LQ는 모든 행에 더해지는 같은 상수다. 상수를 더해도 순위는 바뀌지 않으므로 prior AUC가 0.7698 그대로다.</a:t>
-            </a:r>
-            <a:endParaRPr lang="en-US" sz="1100" dirty="0"/>
-          </a:p>
-          <a:p>
-            <a:pPr indent="0" marL="0">
-              <a:lnSpc>
-                <a:spcPts val="1500"/>
-              </a:lnSpc>
-              <a:buNone/>
-            </a:pPr>
-            <a:endParaRPr lang="en-US" sz="1100" dirty="0"/>
-          </a:p>
-          <a:p>
-            <a:pPr indent="0" marL="0">
-              <a:lnSpc>
-                <a:spcPts val="1500"/>
-              </a:lnSpc>
-              <a:buNone/>
-            </a:pPr>
-            <a:r>
-              <a:rPr lang="en-US" sz="1100" dirty="0">
-                <a:solidFill>
-                  <a:srgbClr val="7A6A63"/>
-                </a:solidFill>
-                <a:latin typeface="Calibri" pitchFamily="34" charset="0"/>
-                <a:ea typeface="Calibri" pitchFamily="34" charset="-122"/>
-                <a:cs typeface="Calibri" pitchFamily="34" charset="-120"/>
-              </a:rPr>
-              <a:t>그런데 4상태 가중치가 제대로 잡히면서 사후 AUC가 올랐다. 확률 수준만 고쳤는데 사후 순위가 좋아진 것이다.</a:t>
+              <a:t>b를 학습하는 채널에서만 뺀다. b를 고정한 채널에서 빼면 z = log(π̄·k) = log λ 라는 유도식이 깨진다 — B0이 그렇다.</a:t>
             </a:r>
             <a:endParaRPr lang="en-US" sz="1100" dirty="0"/>
           </a:p>
         </p:txBody>
       </p:sp>
-      <p:sp>
-        <p:nvSpPr>
-          <p:cNvPr id="10" name="Shape 7"/>
-          <p:cNvSpPr/>
-          <p:nvPr/>
-        </p:nvSpPr>
-        <p:spPr>
-          <a:xfrm>
-            <a:off x="640080" y="5577840"/>
-            <a:ext cx="7315200" cy="731520"/>
-          </a:xfrm>
-          <a:prstGeom prst="roundRect">
-            <a:avLst>
-              <a:gd name="adj" fmla="val 11250"/>
-            </a:avLst>
-          </a:prstGeom>
-          <a:solidFill>
-            <a:srgbClr val="2E2422"/>
-          </a:solidFill>
-          <a:ln w="12700">
-            <a:solidFill>
-              <a:srgbClr val="2E2422"/>
-            </a:solidFill>
-            <a:prstDash val="solid"/>
-          </a:ln>
-        </p:spPr>
-      </p:sp>
-      <p:sp>
-        <p:nvSpPr>
-          <p:cNvPr id="11" name="Text 8"/>
-          <p:cNvSpPr txBox="1"/>
-          <p:nvPr/>
-        </p:nvSpPr>
-        <p:spPr>
-          <a:xfrm>
-            <a:off x="914400" y="5760720"/>
-            <a:ext cx="6766560" cy="384048"/>
-          </a:xfrm>
-          <a:prstGeom prst="rect">
-            <a:avLst/>
-          </a:prstGeom>
-          <a:noFill/>
-          <a:ln/>
-        </p:spPr>
-        <p:txBody>
-          <a:bodyPr wrap="square" lIns="0" tIns="0" rIns="0" bIns="0" rtlCol="0" anchor="ctr"/>
-          <a:lstStyle/>
-          <a:p>
-            <a:pPr indent="0" marL="0">
-              <a:buNone/>
-            </a:pPr>
-            <a:r>
-              <a:rPr lang="en-US" sz="1100" b="1" dirty="0">
-                <a:solidFill>
-                  <a:srgbClr val="FFFFFF"/>
-                </a:solidFill>
-                <a:latin typeface="Calibri" pitchFamily="34" charset="0"/>
-                <a:ea typeface="Calibri" pitchFamily="34" charset="-122"/>
-                <a:cs typeface="Calibri" pitchFamily="34" charset="-120"/>
-              </a:rPr>
-              <a:t>짝지은 부트스트랩 3,000회 — C0 − B0 = +0.0342,  95% 구간 [+0.0009, +0.0698],  P(차이 &gt; 0) = 0.978</a:t>
-            </a:r>
-            <a:endParaRPr lang="en-US" sz="1100" dirty="0"/>
-          </a:p>
-        </p:txBody>
-      </p:sp>
-    </p:spTree>
-  </p:cSld>
-  <p:clrMapOvr>
-    <a:masterClrMapping/>
-  </p:clrMapOvr>
-</p:sld>
-</file>
-
-<file path=ppt/slides/slide13.xml><?xml version="1.0" encoding="utf-8"?>
-<p:sld xmlns:a="http://schemas.openxmlformats.org/drawingml/2006/main" xmlns:r="http://schemas.openxmlformats.org/officeDocument/2006/relationships" xmlns:p="http://schemas.openxmlformats.org/presentationml/2006/main">
-  <p:cSld name="Slide 13">
-    <p:bg>
-      <p:bgPr>
-        <a:solidFill>
-          <a:srgbClr val="FFFFFF"/>
-        </a:solidFill>
-      </p:bgPr>
-    </p:bg>
-    <p:spTree>
-      <p:nvGrpSpPr>
-        <p:cNvPr id="1" name=""/>
-        <p:cNvGrpSpPr/>
-        <p:nvPr/>
-      </p:nvGrpSpPr>
-      <p:grpSpPr>
-        <a:xfrm>
-          <a:off x="0" y="0"/>
-          <a:ext cx="0" cy="0"/>
-          <a:chOff x="0" y="0"/>
-          <a:chExt cx="0" cy="0"/>
-        </a:xfrm>
-      </p:grpSpPr>
-      <p:sp>
-        <p:nvSpPr>
-          <p:cNvPr id="2" name="Text 0"/>
-          <p:cNvSpPr txBox="1"/>
-          <p:nvPr/>
-        </p:nvSpPr>
-        <p:spPr>
-          <a:xfrm>
-            <a:off x="640080" y="384048"/>
-            <a:ext cx="10881360" cy="566928"/>
-          </a:xfrm>
-          <a:prstGeom prst="rect">
-            <a:avLst/>
-          </a:prstGeom>
-          <a:noFill/>
-          <a:ln/>
-        </p:spPr>
-        <p:txBody>
-          <a:bodyPr wrap="square" lIns="0" tIns="0" rIns="0" bIns="0" rtlCol="0" anchor="ctr"/>
-          <a:lstStyle/>
-          <a:p>
-            <a:pPr indent="0" marL="0">
-              <a:buNone/>
-            </a:pPr>
-            <a:r>
-              <a:rPr lang="en-US" sz="3400" b="1" dirty="0">
-                <a:solidFill>
-                  <a:srgbClr val="2E2422"/>
-                </a:solidFill>
-                <a:latin typeface="Cambria" pitchFamily="34" charset="0"/>
-                <a:ea typeface="Cambria" pitchFamily="34" charset="-122"/>
-                <a:cs typeface="Cambria" pitchFamily="34" charset="-120"/>
-              </a:rPr>
-              <a:t>매개변수화 점검 — log k에서 평균을 뺄 것인가</a:t>
-            </a:r>
-            <a:endParaRPr lang="en-US" sz="3400" dirty="0"/>
-          </a:p>
-        </p:txBody>
-      </p:sp>
-      <p:sp>
-        <p:nvSpPr>
-          <p:cNvPr id="3" name="Text 1"/>
-          <p:cNvSpPr txBox="1"/>
-          <p:nvPr/>
-        </p:nvSpPr>
-        <p:spPr>
-          <a:xfrm>
-            <a:off x="640080" y="969264"/>
-            <a:ext cx="10881360" cy="347472"/>
-          </a:xfrm>
-          <a:prstGeom prst="rect">
-            <a:avLst/>
-          </a:prstGeom>
-          <a:noFill/>
-          <a:ln/>
-        </p:spPr>
-        <p:txBody>
-          <a:bodyPr wrap="square" lIns="0" tIns="0" rIns="0" bIns="0" rtlCol="0" anchor="ctr"/>
-          <a:lstStyle/>
-          <a:p>
-            <a:pPr indent="0" marL="0">
-              <a:buNone/>
-            </a:pPr>
-            <a:r>
-              <a:rPr lang="en-US" sz="1400" dirty="0">
-                <a:solidFill>
-                  <a:srgbClr val="7A6A63"/>
-                </a:solidFill>
-                <a:latin typeface="Calibri" pitchFamily="34" charset="0"/>
-                <a:ea typeface="Calibri" pitchFamily="34" charset="-122"/>
-                <a:cs typeface="Calibri" pitchFamily="34" charset="-120"/>
-              </a:rPr>
-              <a:t>b를 학습하는 채널에서만 뺀다. b를 고정한 채널에서 빼면 유도식이 깨진다</a:t>
-            </a:r>
-            <a:endParaRPr lang="en-US" sz="1400" dirty="0"/>
-          </a:p>
-        </p:txBody>
-      </p:sp>
-      <p:sp>
-        <p:nvSpPr>
-          <p:cNvPr id="4" name="Shape 2"/>
-          <p:cNvSpPr/>
-          <p:nvPr/>
-        </p:nvSpPr>
-        <p:spPr>
-          <a:xfrm>
-            <a:off x="640080" y="1554480"/>
-            <a:ext cx="5349240" cy="1371600"/>
-          </a:xfrm>
-          <a:prstGeom prst="roundRect">
-            <a:avLst>
-              <a:gd name="adj" fmla="val 6000"/>
-            </a:avLst>
-          </a:prstGeom>
-          <a:solidFill>
-            <a:srgbClr val="EDF2EE"/>
-          </a:solidFill>
-          <a:ln w="15875">
-            <a:solidFill>
-              <a:srgbClr val="5F7F6E"/>
-            </a:solidFill>
-            <a:prstDash val="solid"/>
-          </a:ln>
-        </p:spPr>
-      </p:sp>
-      <p:sp>
-        <p:nvSpPr>
-          <p:cNvPr id="5" name="Text 3"/>
-          <p:cNvSpPr txBox="1"/>
-          <p:nvPr/>
-        </p:nvSpPr>
-        <p:spPr>
-          <a:xfrm>
-            <a:off x="914400" y="1737360"/>
-            <a:ext cx="4846320" cy="292608"/>
-          </a:xfrm>
-          <a:prstGeom prst="rect">
-            <a:avLst/>
-          </a:prstGeom>
-          <a:noFill/>
-          <a:ln/>
-        </p:spPr>
-        <p:txBody>
-          <a:bodyPr wrap="square" lIns="0" tIns="0" rIns="0" bIns="0" rtlCol="0" anchor="ctr"/>
-          <a:lstStyle/>
-          <a:p>
-            <a:pPr indent="0" marL="0">
-              <a:buNone/>
-            </a:pPr>
-            <a:r>
-              <a:rPr lang="en-US" sz="1300" b="1" dirty="0">
-                <a:solidFill>
-                  <a:srgbClr val="5F7F6E"/>
-                </a:solidFill>
-                <a:latin typeface="Cambria" pitchFamily="34" charset="0"/>
-                <a:ea typeface="Cambria" pitchFamily="34" charset="-122"/>
-                <a:cs typeface="Cambria" pitchFamily="34" charset="-120"/>
-              </a:rPr>
-              <a:t>b를 학습하는 채널 → 뺀다</a:t>
-            </a:r>
-            <a:endParaRPr lang="en-US" sz="1300" dirty="0"/>
-          </a:p>
-        </p:txBody>
-      </p:sp>
-      <p:sp>
-        <p:nvSpPr>
-          <p:cNvPr id="6" name="Text 4"/>
-          <p:cNvSpPr txBox="1"/>
-          <p:nvPr/>
-        </p:nvSpPr>
-        <p:spPr>
-          <a:xfrm>
-            <a:off x="914400" y="2103120"/>
-            <a:ext cx="4846320" cy="685800"/>
-          </a:xfrm>
-          <a:prstGeom prst="rect">
-            <a:avLst/>
-          </a:prstGeom>
-          <a:noFill/>
-          <a:ln/>
-        </p:spPr>
-        <p:txBody>
-          <a:bodyPr wrap="square" lIns="0" tIns="0" rIns="0" bIns="0" rtlCol="0" anchor="ctr"/>
-          <a:lstStyle/>
-          <a:p>
-            <a:pPr indent="0" marL="0">
-              <a:lnSpc>
-                <a:spcPts val="1500"/>
-              </a:lnSpc>
-              <a:buNone/>
-            </a:pPr>
-            <a:r>
-              <a:rPr lang="en-US" sz="1150" dirty="0">
-                <a:solidFill>
-                  <a:srgbClr val="7A6A63"/>
-                </a:solidFill>
-                <a:latin typeface="Calibri" pitchFamily="34" charset="0"/>
-                <a:ea typeface="Calibri" pitchFamily="34" charset="-122"/>
-                <a:cs typeface="Calibri" pitchFamily="34" charset="-120"/>
-              </a:rPr>
-              <a:t>b가 '평균 크기 시정촌에서의 log-odds'라는 뜻을 갖고, b와 log k의 상관이 줄어 최적화가 안정된다.</a:t>
-            </a:r>
-            <a:endParaRPr lang="en-US" sz="1150" dirty="0"/>
-          </a:p>
-        </p:txBody>
-      </p:sp>
-      <p:sp>
-        <p:nvSpPr>
-          <p:cNvPr id="7" name="Shape 5"/>
-          <p:cNvSpPr/>
-          <p:nvPr/>
-        </p:nvSpPr>
-        <p:spPr>
-          <a:xfrm>
-            <a:off x="6217920" y="1554480"/>
-            <a:ext cx="5349240" cy="1371600"/>
-          </a:xfrm>
-          <a:prstGeom prst="roundRect">
-            <a:avLst>
-              <a:gd name="adj" fmla="val 6000"/>
-            </a:avLst>
-          </a:prstGeom>
-          <a:solidFill>
-            <a:srgbClr val="F9EAE7"/>
-          </a:solidFill>
-          <a:ln w="15875">
-            <a:solidFill>
-              <a:srgbClr val="B85042"/>
-            </a:solidFill>
-            <a:prstDash val="solid"/>
-          </a:ln>
-        </p:spPr>
-      </p:sp>
-      <p:sp>
-        <p:nvSpPr>
-          <p:cNvPr id="8" name="Text 6"/>
-          <p:cNvSpPr txBox="1"/>
-          <p:nvPr/>
-        </p:nvSpPr>
-        <p:spPr>
-          <a:xfrm>
-            <a:off x="6492240" y="1737360"/>
-            <a:ext cx="4846320" cy="292608"/>
-          </a:xfrm>
-          <a:prstGeom prst="rect">
-            <a:avLst/>
-          </a:prstGeom>
-          <a:noFill/>
-          <a:ln/>
-        </p:spPr>
-        <p:txBody>
-          <a:bodyPr wrap="square" lIns="0" tIns="0" rIns="0" bIns="0" rtlCol="0" anchor="ctr"/>
-          <a:lstStyle/>
-          <a:p>
-            <a:pPr indent="0" marL="0">
-              <a:buNone/>
-            </a:pPr>
-            <a:r>
-              <a:rPr lang="en-US" sz="1300" b="1" dirty="0">
-                <a:solidFill>
-                  <a:srgbClr val="B85042"/>
-                </a:solidFill>
-                <a:latin typeface="Cambria" pitchFamily="34" charset="0"/>
-                <a:ea typeface="Cambria" pitchFamily="34" charset="-122"/>
-                <a:cs typeface="Cambria" pitchFamily="34" charset="-120"/>
-              </a:rPr>
-              <a:t>b = 0 고정인 채널 → 빼면 안 된다</a:t>
-            </a:r>
-            <a:endParaRPr lang="en-US" sz="1300" dirty="0"/>
-          </a:p>
-        </p:txBody>
-      </p:sp>
-      <p:sp>
-        <p:nvSpPr>
-          <p:cNvPr id="9" name="Text 7"/>
-          <p:cNvSpPr txBox="1"/>
-          <p:nvPr/>
-        </p:nvSpPr>
-        <p:spPr>
-          <a:xfrm>
-            <a:off x="6492240" y="2103120"/>
-            <a:ext cx="4846320" cy="685800"/>
-          </a:xfrm>
-          <a:prstGeom prst="rect">
-            <a:avLst/>
-          </a:prstGeom>
-          <a:noFill/>
-          <a:ln/>
-        </p:spPr>
-        <p:txBody>
-          <a:bodyPr wrap="square" lIns="0" tIns="0" rIns="0" bIns="0" rtlCol="0" anchor="ctr"/>
-          <a:lstStyle/>
-          <a:p>
-            <a:pPr indent="0" marL="0">
-              <a:lnSpc>
-                <a:spcPts val="1500"/>
-              </a:lnSpc>
-              <a:buNone/>
-            </a:pPr>
-            <a:r>
-              <a:rPr lang="en-US" sz="1150" dirty="0">
-                <a:solidFill>
-                  <a:srgbClr val="7A6A63"/>
-                </a:solidFill>
-                <a:latin typeface="Calibri" pitchFamily="34" charset="0"/>
-                <a:ea typeface="Calibri" pitchFamily="34" charset="-122"/>
-                <a:cs typeface="Calibri" pitchFamily="34" charset="-120"/>
-              </a:rPr>
-              <a:t>재매개변수화가 아니라 다른 모형이 된다. 안 뺀 z = log(π̄ · k) = log λ 가 유도식 그 자체다. B0이 여기 해당한다.</a:t>
-            </a:r>
-            <a:endParaRPr lang="en-US" sz="1150" dirty="0"/>
-          </a:p>
-        </p:txBody>
-      </p:sp>
-      <p:sp>
-        <p:nvSpPr>
-          <p:cNvPr id="10" name="Text 8"/>
-          <p:cNvSpPr txBox="1"/>
-          <p:nvPr/>
-        </p:nvSpPr>
-        <p:spPr>
-          <a:xfrm>
-            <a:off x="640080" y="3072384"/>
-            <a:ext cx="10927080" cy="274320"/>
-          </a:xfrm>
-          <a:prstGeom prst="rect">
-            <a:avLst/>
-          </a:prstGeom>
-          <a:noFill/>
-          <a:ln/>
-        </p:spPr>
-        <p:txBody>
-          <a:bodyPr wrap="square" lIns="0" tIns="0" rIns="0" bIns="0" rtlCol="0" anchor="ctr"/>
-          <a:lstStyle/>
-          <a:p>
-            <a:pPr indent="0" marL="0">
-              <a:buNone/>
-            </a:pPr>
-            <a:r>
-              <a:rPr lang="en-US" sz="1250" b="1" dirty="0">
-                <a:solidFill>
-                  <a:srgbClr val="2E2422"/>
-                </a:solidFill>
-                <a:latin typeface="Calibri" pitchFamily="34" charset="0"/>
-                <a:ea typeface="Calibri" pitchFamily="34" charset="-122"/>
-                <a:cs typeface="Calibri" pitchFamily="34" charset="-120"/>
-              </a:rPr>
-              <a:t>확인 — b 상자를 [−12, 20]으로 똑같이 열고 센터링 유/무를 비교했다</a:t>
-            </a:r>
-            <a:endParaRPr lang="en-US" sz="1250" dirty="0"/>
-          </a:p>
-        </p:txBody>
-      </p:sp>
       <p:graphicFrame>
         <p:nvGraphicFramePr>
-          <p:cNvPr id="14" name="Table 0"/>
+          <p:cNvPr id="25" name="Table 1"/>
           <p:cNvGraphicFramePr>
             <a:graphicFrameLocks noGrp="1"/>
           </p:cNvGraphicFramePr>
@@ -10961,24 +9846,21 @@
           </p:nvPr>
         </p:nvGraphicFramePr>
         <p:xfrm>
-          <a:off x="640080" y="3438144"/>
-          <a:ext cx="10927080" cy="914400"/>
+          <a:off x="6309360" y="2487168"/>
+          <a:ext cx="5257800" cy="914400"/>
         </p:xfrm>
         <a:graphic>
           <a:graphicData uri="http://schemas.openxmlformats.org/drawingml/2006/table">
             <a:tbl>
               <a:tblPr/>
               <a:tblGrid>
-                <a:gridCol w="914400"/>
-                <a:gridCol w="1051560"/>
-                <a:gridCol w="2286000"/>
-                <a:gridCol w="1691640"/>
-                <a:gridCol w="1691640"/>
-                <a:gridCol w="1188720"/>
-                <a:gridCol w="1051560"/>
-                <a:gridCol w="1051560"/>
+                <a:gridCol w="777240"/>
+                <a:gridCol w="1097280"/>
+                <a:gridCol w="1371600"/>
+                <a:gridCol w="1005840"/>
+                <a:gridCol w="1005840"/>
               </a:tblGrid>
-              <a:tr h="306324">
+              <a:tr h="288036">
                 <a:tc>
                   <a:txBody>
                     <a:bodyPr/>
@@ -11064,7 +9946,7 @@
                           <a:ea typeface="Calibri" pitchFamily="34" charset="-122"/>
                           <a:cs typeface="Calibri" pitchFamily="34" charset="-120"/>
                         </a:rPr>
-                        <a:t>센터링</a:t>
+                        <a:t>중심화</a:t>
                       </a:r>
                       <a:endParaRPr lang="en-US" sz="1050" dirty="0">
                         <a:latin typeface="Calibri" charset="0"/>
@@ -11132,211 +10014,7 @@
                           <a:ea typeface="Calibri" pitchFamily="34" charset="-122"/>
                           <a:cs typeface="Calibri" pitchFamily="34" charset="-120"/>
                         </a:rPr>
-                        <a:t>뺀 값 off_LS / off_LQ</a:t>
-                      </a:r>
-                      <a:endParaRPr lang="en-US" sz="1050" dirty="0">
-                        <a:latin typeface="Calibri" charset="0"/>
-                        <a:ea typeface="Calibri" charset="0"/>
-                        <a:cs typeface="Calibri" charset="0"/>
-                      </a:endParaRPr>
-                    </a:p>
-                  </a:txBody>
-                  <a:tcPr marL="91440" marR="91440" marT="45720" marB="45720" anchor="ctr">
-                    <a:lnL w="6350" cap="flat" cmpd="sng" algn="ctr">
-                      <a:solidFill>
-                        <a:srgbClr val="DCD6CC"/>
-                      </a:solidFill>
-                      <a:prstDash val="solid"/>
-                      <a:round/>
-                      <a:headEnd type="none" w="med" len="med"/>
-                      <a:tailEnd type="none" w="med" len="med"/>
-                    </a:lnL>
-                    <a:lnR w="6350" cap="flat" cmpd="sng" algn="ctr">
-                      <a:solidFill>
-                        <a:srgbClr val="DCD6CC"/>
-                      </a:solidFill>
-                      <a:prstDash val="solid"/>
-                      <a:round/>
-                      <a:headEnd type="none" w="med" len="med"/>
-                      <a:tailEnd type="none" w="med" len="med"/>
-                    </a:lnR>
-                    <a:lnT w="6350" cap="flat" cmpd="sng" algn="ctr">
-                      <a:solidFill>
-                        <a:srgbClr val="DCD6CC"/>
-                      </a:solidFill>
-                      <a:prstDash val="solid"/>
-                      <a:round/>
-                      <a:headEnd type="none" w="med" len="med"/>
-                      <a:tailEnd type="none" w="med" len="med"/>
-                    </a:lnT>
-                    <a:lnB w="6350" cap="flat" cmpd="sng" algn="ctr">
-                      <a:solidFill>
-                        <a:srgbClr val="DCD6CC"/>
-                      </a:solidFill>
-                      <a:prstDash val="solid"/>
-                      <a:round/>
-                      <a:headEnd type="none" w="med" len="med"/>
-                      <a:tailEnd type="none" w="med" len="med"/>
-                    </a:lnB>
-                    <a:solidFill>
-                      <a:srgbClr val="2E2422"/>
-                    </a:solidFill>
-                  </a:tcPr>
-                </a:tc>
-                <a:tc>
-                  <a:txBody>
-                    <a:bodyPr/>
-                    <a:lstStyle/>
-                    <a:p>
-                      <a:pPr algn="ctr" indent="0" marL="0">
-                        <a:buNone/>
-                      </a:pPr>
-                      <a:r>
-                        <a:rPr lang="en-US" sz="1050" b="1" dirty="0">
-                          <a:solidFill>
-                            <a:srgbClr val="FFFFFF"/>
-                          </a:solidFill>
-                          <a:latin typeface="Calibri" pitchFamily="34" charset="0"/>
-                          <a:ea typeface="Calibri" pitchFamily="34" charset="-122"/>
-                          <a:cs typeface="Calibri" pitchFamily="34" charset="-120"/>
-                        </a:rPr>
-                        <a:t>b_LS 유효수준</a:t>
-                      </a:r>
-                      <a:endParaRPr lang="en-US" sz="1050" dirty="0">
-                        <a:latin typeface="Calibri" charset="0"/>
-                        <a:ea typeface="Calibri" charset="0"/>
-                        <a:cs typeface="Calibri" charset="0"/>
-                      </a:endParaRPr>
-                    </a:p>
-                  </a:txBody>
-                  <a:tcPr marL="91440" marR="91440" marT="45720" marB="45720" anchor="ctr">
-                    <a:lnL w="6350" cap="flat" cmpd="sng" algn="ctr">
-                      <a:solidFill>
-                        <a:srgbClr val="DCD6CC"/>
-                      </a:solidFill>
-                      <a:prstDash val="solid"/>
-                      <a:round/>
-                      <a:headEnd type="none" w="med" len="med"/>
-                      <a:tailEnd type="none" w="med" len="med"/>
-                    </a:lnL>
-                    <a:lnR w="6350" cap="flat" cmpd="sng" algn="ctr">
-                      <a:solidFill>
-                        <a:srgbClr val="DCD6CC"/>
-                      </a:solidFill>
-                      <a:prstDash val="solid"/>
-                      <a:round/>
-                      <a:headEnd type="none" w="med" len="med"/>
-                      <a:tailEnd type="none" w="med" len="med"/>
-                    </a:lnR>
-                    <a:lnT w="6350" cap="flat" cmpd="sng" algn="ctr">
-                      <a:solidFill>
-                        <a:srgbClr val="DCD6CC"/>
-                      </a:solidFill>
-                      <a:prstDash val="solid"/>
-                      <a:round/>
-                      <a:headEnd type="none" w="med" len="med"/>
-                      <a:tailEnd type="none" w="med" len="med"/>
-                    </a:lnT>
-                    <a:lnB w="6350" cap="flat" cmpd="sng" algn="ctr">
-                      <a:solidFill>
-                        <a:srgbClr val="DCD6CC"/>
-                      </a:solidFill>
-                      <a:prstDash val="solid"/>
-                      <a:round/>
-                      <a:headEnd type="none" w="med" len="med"/>
-                      <a:tailEnd type="none" w="med" len="med"/>
-                    </a:lnB>
-                    <a:solidFill>
-                      <a:srgbClr val="2E2422"/>
-                    </a:solidFill>
-                  </a:tcPr>
-                </a:tc>
-                <a:tc>
-                  <a:txBody>
-                    <a:bodyPr/>
-                    <a:lstStyle/>
-                    <a:p>
-                      <a:pPr algn="ctr" indent="0" marL="0">
-                        <a:buNone/>
-                      </a:pPr>
-                      <a:r>
-                        <a:rPr lang="en-US" sz="1050" b="1" dirty="0">
-                          <a:solidFill>
-                            <a:srgbClr val="FFFFFF"/>
-                          </a:solidFill>
-                          <a:latin typeface="Calibri" pitchFamily="34" charset="0"/>
-                          <a:ea typeface="Calibri" pitchFamily="34" charset="-122"/>
-                          <a:cs typeface="Calibri" pitchFamily="34" charset="-120"/>
-                        </a:rPr>
-                        <a:t>b_LQ 유효수준</a:t>
-                      </a:r>
-                      <a:endParaRPr lang="en-US" sz="1050" dirty="0">
-                        <a:latin typeface="Calibri" charset="0"/>
-                        <a:ea typeface="Calibri" charset="0"/>
-                        <a:cs typeface="Calibri" charset="0"/>
-                      </a:endParaRPr>
-                    </a:p>
-                  </a:txBody>
-                  <a:tcPr marL="91440" marR="91440" marT="45720" marB="45720" anchor="ctr">
-                    <a:lnL w="6350" cap="flat" cmpd="sng" algn="ctr">
-                      <a:solidFill>
-                        <a:srgbClr val="DCD6CC"/>
-                      </a:solidFill>
-                      <a:prstDash val="solid"/>
-                      <a:round/>
-                      <a:headEnd type="none" w="med" len="med"/>
-                      <a:tailEnd type="none" w="med" len="med"/>
-                    </a:lnL>
-                    <a:lnR w="6350" cap="flat" cmpd="sng" algn="ctr">
-                      <a:solidFill>
-                        <a:srgbClr val="DCD6CC"/>
-                      </a:solidFill>
-                      <a:prstDash val="solid"/>
-                      <a:round/>
-                      <a:headEnd type="none" w="med" len="med"/>
-                      <a:tailEnd type="none" w="med" len="med"/>
-                    </a:lnR>
-                    <a:lnT w="6350" cap="flat" cmpd="sng" algn="ctr">
-                      <a:solidFill>
-                        <a:srgbClr val="DCD6CC"/>
-                      </a:solidFill>
-                      <a:prstDash val="solid"/>
-                      <a:round/>
-                      <a:headEnd type="none" w="med" len="med"/>
-                      <a:tailEnd type="none" w="med" len="med"/>
-                    </a:lnT>
-                    <a:lnB w="6350" cap="flat" cmpd="sng" algn="ctr">
-                      <a:solidFill>
-                        <a:srgbClr val="DCD6CC"/>
-                      </a:solidFill>
-                      <a:prstDash val="solid"/>
-                      <a:round/>
-                      <a:headEnd type="none" w="med" len="med"/>
-                      <a:tailEnd type="none" w="med" len="med"/>
-                    </a:lnB>
-                    <a:solidFill>
-                      <a:srgbClr val="2E2422"/>
-                    </a:solidFill>
-                  </a:tcPr>
-                </a:tc>
-                <a:tc>
-                  <a:txBody>
-                    <a:bodyPr/>
-                    <a:lstStyle/>
-                    <a:p>
-                      <a:pPr algn="ctr" indent="0" marL="0">
-                        <a:buNone/>
-                      </a:pPr>
-                      <a:r>
-                        <a:rPr lang="en-US" sz="1050" b="1" dirty="0">
-                          <a:solidFill>
-                            <a:srgbClr val="FFFFFF"/>
-                          </a:solidFill>
-                          <a:latin typeface="Calibri" pitchFamily="34" charset="0"/>
-                          <a:ea typeface="Calibri" pitchFamily="34" charset="-122"/>
-                          <a:cs typeface="Calibri" pitchFamily="34" charset="-120"/>
-                        </a:rPr>
-                        <a:t>κ</a:t>
+                        <a:t>b 유효수준</a:t>
                       </a:r>
                       <a:endParaRPr lang="en-US" sz="1050" dirty="0">
                         <a:latin typeface="Calibri" charset="0"/>
@@ -11524,7 +10202,7 @@
                   </a:tcPr>
                 </a:tc>
               </a:tr>
-              <a:tr h="306324">
+              <a:tr h="288036">
                 <a:tc>
                   <a:txBody>
                     <a:bodyPr/>
@@ -11672,202 +10350,7 @@
                           <a:ea typeface="Calibri" pitchFamily="34" charset="-122"/>
                           <a:cs typeface="Calibri" pitchFamily="34" charset="-120"/>
                         </a:rPr>
-                        <a:t>8.0422 / 0</a:t>
-                      </a:r>
-                      <a:endParaRPr lang="en-US" sz="1050" dirty="0">
-                        <a:latin typeface="Calibri" charset="0"/>
-                        <a:ea typeface="Calibri" charset="0"/>
-                        <a:cs typeface="Calibri" charset="0"/>
-                      </a:endParaRPr>
-                    </a:p>
-                  </a:txBody>
-                  <a:tcPr marL="91440" marR="91440" marT="45720" marB="45720" anchor="ctr">
-                    <a:lnL w="6350" cap="flat" cmpd="sng" algn="ctr">
-                      <a:solidFill>
-                        <a:srgbClr val="DCD6CC"/>
-                      </a:solidFill>
-                      <a:prstDash val="solid"/>
-                      <a:round/>
-                      <a:headEnd type="none" w="med" len="med"/>
-                      <a:tailEnd type="none" w="med" len="med"/>
-                    </a:lnL>
-                    <a:lnR w="6350" cap="flat" cmpd="sng" algn="ctr">
-                      <a:solidFill>
-                        <a:srgbClr val="DCD6CC"/>
-                      </a:solidFill>
-                      <a:prstDash val="solid"/>
-                      <a:round/>
-                      <a:headEnd type="none" w="med" len="med"/>
-                      <a:tailEnd type="none" w="med" len="med"/>
-                    </a:lnR>
-                    <a:lnT w="6350" cap="flat" cmpd="sng" algn="ctr">
-                      <a:solidFill>
-                        <a:srgbClr val="DCD6CC"/>
-                      </a:solidFill>
-                      <a:prstDash val="solid"/>
-                      <a:round/>
-                      <a:headEnd type="none" w="med" len="med"/>
-                      <a:tailEnd type="none" w="med" len="med"/>
-                    </a:lnT>
-                    <a:lnB w="6350" cap="flat" cmpd="sng" algn="ctr">
-                      <a:solidFill>
-                        <a:srgbClr val="DCD6CC"/>
-                      </a:solidFill>
-                      <a:prstDash val="solid"/>
-                      <a:round/>
-                      <a:headEnd type="none" w="med" len="med"/>
-                      <a:tailEnd type="none" w="med" len="med"/>
-                    </a:lnB>
-                  </a:tcPr>
-                </a:tc>
-                <a:tc>
-                  <a:txBody>
-                    <a:bodyPr/>
-                    <a:lstStyle/>
-                    <a:p>
-                      <a:pPr algn="ctr" indent="0" marL="0">
-                        <a:buNone/>
-                      </a:pPr>
-                      <a:r>
-                        <a:rPr lang="en-US" sz="1050" dirty="0">
-                          <a:solidFill>
-                            <a:srgbClr val="2E2422"/>
-                          </a:solidFill>
-                          <a:latin typeface="Calibri" pitchFamily="34" charset="0"/>
-                          <a:ea typeface="Calibri" pitchFamily="34" charset="-122"/>
-                          <a:cs typeface="Calibri" pitchFamily="34" charset="-120"/>
-                        </a:rPr>
                         <a:t>−2.4362</a:t>
-                      </a:r>
-                      <a:endParaRPr lang="en-US" sz="1050" dirty="0">
-                        <a:latin typeface="Calibri" charset="0"/>
-                        <a:ea typeface="Calibri" charset="0"/>
-                        <a:cs typeface="Calibri" charset="0"/>
-                      </a:endParaRPr>
-                    </a:p>
-                  </a:txBody>
-                  <a:tcPr marL="91440" marR="91440" marT="45720" marB="45720" anchor="ctr">
-                    <a:lnL w="6350" cap="flat" cmpd="sng" algn="ctr">
-                      <a:solidFill>
-                        <a:srgbClr val="DCD6CC"/>
-                      </a:solidFill>
-                      <a:prstDash val="solid"/>
-                      <a:round/>
-                      <a:headEnd type="none" w="med" len="med"/>
-                      <a:tailEnd type="none" w="med" len="med"/>
-                    </a:lnL>
-                    <a:lnR w="6350" cap="flat" cmpd="sng" algn="ctr">
-                      <a:solidFill>
-                        <a:srgbClr val="DCD6CC"/>
-                      </a:solidFill>
-                      <a:prstDash val="solid"/>
-                      <a:round/>
-                      <a:headEnd type="none" w="med" len="med"/>
-                      <a:tailEnd type="none" w="med" len="med"/>
-                    </a:lnR>
-                    <a:lnT w="6350" cap="flat" cmpd="sng" algn="ctr">
-                      <a:solidFill>
-                        <a:srgbClr val="DCD6CC"/>
-                      </a:solidFill>
-                      <a:prstDash val="solid"/>
-                      <a:round/>
-                      <a:headEnd type="none" w="med" len="med"/>
-                      <a:tailEnd type="none" w="med" len="med"/>
-                    </a:lnT>
-                    <a:lnB w="6350" cap="flat" cmpd="sng" algn="ctr">
-                      <a:solidFill>
-                        <a:srgbClr val="DCD6CC"/>
-                      </a:solidFill>
-                      <a:prstDash val="solid"/>
-                      <a:round/>
-                      <a:headEnd type="none" w="med" len="med"/>
-                      <a:tailEnd type="none" w="med" len="med"/>
-                    </a:lnB>
-                  </a:tcPr>
-                </a:tc>
-                <a:tc>
-                  <a:txBody>
-                    <a:bodyPr/>
-                    <a:lstStyle/>
-                    <a:p>
-                      <a:pPr algn="ctr" indent="0" marL="0">
-                        <a:buNone/>
-                      </a:pPr>
-                      <a:r>
-                        <a:rPr lang="en-US" sz="1050" dirty="0">
-                          <a:solidFill>
-                            <a:srgbClr val="2E2422"/>
-                          </a:solidFill>
-                          <a:latin typeface="Calibri" pitchFamily="34" charset="0"/>
-                          <a:ea typeface="Calibri" pitchFamily="34" charset="-122"/>
-                          <a:cs typeface="Calibri" pitchFamily="34" charset="-120"/>
-                        </a:rPr>
-                        <a:t>0</a:t>
-                      </a:r>
-                      <a:endParaRPr lang="en-US" sz="1050" dirty="0">
-                        <a:latin typeface="Calibri" charset="0"/>
-                        <a:ea typeface="Calibri" charset="0"/>
-                        <a:cs typeface="Calibri" charset="0"/>
-                      </a:endParaRPr>
-                    </a:p>
-                  </a:txBody>
-                  <a:tcPr marL="91440" marR="91440" marT="45720" marB="45720" anchor="ctr">
-                    <a:lnL w="6350" cap="flat" cmpd="sng" algn="ctr">
-                      <a:solidFill>
-                        <a:srgbClr val="DCD6CC"/>
-                      </a:solidFill>
-                      <a:prstDash val="solid"/>
-                      <a:round/>
-                      <a:headEnd type="none" w="med" len="med"/>
-                      <a:tailEnd type="none" w="med" len="med"/>
-                    </a:lnL>
-                    <a:lnR w="6350" cap="flat" cmpd="sng" algn="ctr">
-                      <a:solidFill>
-                        <a:srgbClr val="DCD6CC"/>
-                      </a:solidFill>
-                      <a:prstDash val="solid"/>
-                      <a:round/>
-                      <a:headEnd type="none" w="med" len="med"/>
-                      <a:tailEnd type="none" w="med" len="med"/>
-                    </a:lnR>
-                    <a:lnT w="6350" cap="flat" cmpd="sng" algn="ctr">
-                      <a:solidFill>
-                        <a:srgbClr val="DCD6CC"/>
-                      </a:solidFill>
-                      <a:prstDash val="solid"/>
-                      <a:round/>
-                      <a:headEnd type="none" w="med" len="med"/>
-                      <a:tailEnd type="none" w="med" len="med"/>
-                    </a:lnT>
-                    <a:lnB w="6350" cap="flat" cmpd="sng" algn="ctr">
-                      <a:solidFill>
-                        <a:srgbClr val="DCD6CC"/>
-                      </a:solidFill>
-                      <a:prstDash val="solid"/>
-                      <a:round/>
-                      <a:headEnd type="none" w="med" len="med"/>
-                      <a:tailEnd type="none" w="med" len="med"/>
-                    </a:lnB>
-                  </a:tcPr>
-                </a:tc>
-                <a:tc>
-                  <a:txBody>
-                    <a:bodyPr/>
-                    <a:lstStyle/>
-                    <a:p>
-                      <a:pPr algn="ctr" indent="0" marL="0">
-                        <a:buNone/>
-                      </a:pPr>
-                      <a:r>
-                        <a:rPr lang="en-US" sz="1050" dirty="0">
-                          <a:solidFill>
-                            <a:srgbClr val="2E2422"/>
-                          </a:solidFill>
-                          <a:latin typeface="Calibri" pitchFamily="34" charset="0"/>
-                          <a:ea typeface="Calibri" pitchFamily="34" charset="-122"/>
-                          <a:cs typeface="Calibri" pitchFamily="34" charset="-120"/>
-                        </a:rPr>
-                        <a:t>−0.8395</a:t>
                       </a:r>
                       <a:endParaRPr lang="en-US" sz="1050" dirty="0">
                         <a:latin typeface="Calibri" charset="0"/>
@@ -12046,7 +10529,7 @@
                   </a:tcPr>
                 </a:tc>
               </a:tr>
-              <a:tr h="306324">
+              <a:tr h="288036">
                 <a:tc>
                   <a:txBody>
                     <a:bodyPr/>
@@ -12194,202 +10677,7 @@
                           <a:ea typeface="Calibri" pitchFamily="34" charset="-122"/>
                           <a:cs typeface="Calibri" pitchFamily="34" charset="-120"/>
                         </a:rPr>
-                        <a:t>0 / 0</a:t>
-                      </a:r>
-                      <a:endParaRPr lang="en-US" sz="1050" dirty="0">
-                        <a:latin typeface="Calibri" charset="0"/>
-                        <a:ea typeface="Calibri" charset="0"/>
-                        <a:cs typeface="Calibri" charset="0"/>
-                      </a:endParaRPr>
-                    </a:p>
-                  </a:txBody>
-                  <a:tcPr marL="91440" marR="91440" marT="45720" marB="45720" anchor="ctr">
-                    <a:lnL w="6350" cap="flat" cmpd="sng" algn="ctr">
-                      <a:solidFill>
-                        <a:srgbClr val="DCD6CC"/>
-                      </a:solidFill>
-                      <a:prstDash val="solid"/>
-                      <a:round/>
-                      <a:headEnd type="none" w="med" len="med"/>
-                      <a:tailEnd type="none" w="med" len="med"/>
-                    </a:lnL>
-                    <a:lnR w="6350" cap="flat" cmpd="sng" algn="ctr">
-                      <a:solidFill>
-                        <a:srgbClr val="DCD6CC"/>
-                      </a:solidFill>
-                      <a:prstDash val="solid"/>
-                      <a:round/>
-                      <a:headEnd type="none" w="med" len="med"/>
-                      <a:tailEnd type="none" w="med" len="med"/>
-                    </a:lnR>
-                    <a:lnT w="6350" cap="flat" cmpd="sng" algn="ctr">
-                      <a:solidFill>
-                        <a:srgbClr val="DCD6CC"/>
-                      </a:solidFill>
-                      <a:prstDash val="solid"/>
-                      <a:round/>
-                      <a:headEnd type="none" w="med" len="med"/>
-                      <a:tailEnd type="none" w="med" len="med"/>
-                    </a:lnT>
-                    <a:lnB w="6350" cap="flat" cmpd="sng" algn="ctr">
-                      <a:solidFill>
-                        <a:srgbClr val="DCD6CC"/>
-                      </a:solidFill>
-                      <a:prstDash val="solid"/>
-                      <a:round/>
-                      <a:headEnd type="none" w="med" len="med"/>
-                      <a:tailEnd type="none" w="med" len="med"/>
-                    </a:lnB>
-                  </a:tcPr>
-                </a:tc>
-                <a:tc>
-                  <a:txBody>
-                    <a:bodyPr/>
-                    <a:lstStyle/>
-                    <a:p>
-                      <a:pPr algn="ctr" indent="0" marL="0">
-                        <a:buNone/>
-                      </a:pPr>
-                      <a:r>
-                        <a:rPr lang="en-US" sz="1050" dirty="0">
-                          <a:solidFill>
-                            <a:srgbClr val="2E2422"/>
-                          </a:solidFill>
-                          <a:latin typeface="Calibri" pitchFamily="34" charset="0"/>
-                          <a:ea typeface="Calibri" pitchFamily="34" charset="-122"/>
-                          <a:cs typeface="Calibri" pitchFamily="34" charset="-120"/>
-                        </a:rPr>
                         <a:t>−2.4309</a:t>
-                      </a:r>
-                      <a:endParaRPr lang="en-US" sz="1050" dirty="0">
-                        <a:latin typeface="Calibri" charset="0"/>
-                        <a:ea typeface="Calibri" charset="0"/>
-                        <a:cs typeface="Calibri" charset="0"/>
-                      </a:endParaRPr>
-                    </a:p>
-                  </a:txBody>
-                  <a:tcPr marL="91440" marR="91440" marT="45720" marB="45720" anchor="ctr">
-                    <a:lnL w="6350" cap="flat" cmpd="sng" algn="ctr">
-                      <a:solidFill>
-                        <a:srgbClr val="DCD6CC"/>
-                      </a:solidFill>
-                      <a:prstDash val="solid"/>
-                      <a:round/>
-                      <a:headEnd type="none" w="med" len="med"/>
-                      <a:tailEnd type="none" w="med" len="med"/>
-                    </a:lnL>
-                    <a:lnR w="6350" cap="flat" cmpd="sng" algn="ctr">
-                      <a:solidFill>
-                        <a:srgbClr val="DCD6CC"/>
-                      </a:solidFill>
-                      <a:prstDash val="solid"/>
-                      <a:round/>
-                      <a:headEnd type="none" w="med" len="med"/>
-                      <a:tailEnd type="none" w="med" len="med"/>
-                    </a:lnR>
-                    <a:lnT w="6350" cap="flat" cmpd="sng" algn="ctr">
-                      <a:solidFill>
-                        <a:srgbClr val="DCD6CC"/>
-                      </a:solidFill>
-                      <a:prstDash val="solid"/>
-                      <a:round/>
-                      <a:headEnd type="none" w="med" len="med"/>
-                      <a:tailEnd type="none" w="med" len="med"/>
-                    </a:lnT>
-                    <a:lnB w="6350" cap="flat" cmpd="sng" algn="ctr">
-                      <a:solidFill>
-                        <a:srgbClr val="DCD6CC"/>
-                      </a:solidFill>
-                      <a:prstDash val="solid"/>
-                      <a:round/>
-                      <a:headEnd type="none" w="med" len="med"/>
-                      <a:tailEnd type="none" w="med" len="med"/>
-                    </a:lnB>
-                  </a:tcPr>
-                </a:tc>
-                <a:tc>
-                  <a:txBody>
-                    <a:bodyPr/>
-                    <a:lstStyle/>
-                    <a:p>
-                      <a:pPr algn="ctr" indent="0" marL="0">
-                        <a:buNone/>
-                      </a:pPr>
-                      <a:r>
-                        <a:rPr lang="en-US" sz="1050" dirty="0">
-                          <a:solidFill>
-                            <a:srgbClr val="2E2422"/>
-                          </a:solidFill>
-                          <a:latin typeface="Calibri" pitchFamily="34" charset="0"/>
-                          <a:ea typeface="Calibri" pitchFamily="34" charset="-122"/>
-                          <a:cs typeface="Calibri" pitchFamily="34" charset="-120"/>
-                        </a:rPr>
-                        <a:t>0</a:t>
-                      </a:r>
-                      <a:endParaRPr lang="en-US" sz="1050" dirty="0">
-                        <a:latin typeface="Calibri" charset="0"/>
-                        <a:ea typeface="Calibri" charset="0"/>
-                        <a:cs typeface="Calibri" charset="0"/>
-                      </a:endParaRPr>
-                    </a:p>
-                  </a:txBody>
-                  <a:tcPr marL="91440" marR="91440" marT="45720" marB="45720" anchor="ctr">
-                    <a:lnL w="6350" cap="flat" cmpd="sng" algn="ctr">
-                      <a:solidFill>
-                        <a:srgbClr val="DCD6CC"/>
-                      </a:solidFill>
-                      <a:prstDash val="solid"/>
-                      <a:round/>
-                      <a:headEnd type="none" w="med" len="med"/>
-                      <a:tailEnd type="none" w="med" len="med"/>
-                    </a:lnL>
-                    <a:lnR w="6350" cap="flat" cmpd="sng" algn="ctr">
-                      <a:solidFill>
-                        <a:srgbClr val="DCD6CC"/>
-                      </a:solidFill>
-                      <a:prstDash val="solid"/>
-                      <a:round/>
-                      <a:headEnd type="none" w="med" len="med"/>
-                      <a:tailEnd type="none" w="med" len="med"/>
-                    </a:lnR>
-                    <a:lnT w="6350" cap="flat" cmpd="sng" algn="ctr">
-                      <a:solidFill>
-                        <a:srgbClr val="DCD6CC"/>
-                      </a:solidFill>
-                      <a:prstDash val="solid"/>
-                      <a:round/>
-                      <a:headEnd type="none" w="med" len="med"/>
-                      <a:tailEnd type="none" w="med" len="med"/>
-                    </a:lnT>
-                    <a:lnB w="6350" cap="flat" cmpd="sng" algn="ctr">
-                      <a:solidFill>
-                        <a:srgbClr val="DCD6CC"/>
-                      </a:solidFill>
-                      <a:prstDash val="solid"/>
-                      <a:round/>
-                      <a:headEnd type="none" w="med" len="med"/>
-                      <a:tailEnd type="none" w="med" len="med"/>
-                    </a:lnB>
-                  </a:tcPr>
-                </a:tc>
-                <a:tc>
-                  <a:txBody>
-                    <a:bodyPr/>
-                    <a:lstStyle/>
-                    <a:p>
-                      <a:pPr algn="ctr" indent="0" marL="0">
-                        <a:buNone/>
-                      </a:pPr>
-                      <a:r>
-                        <a:rPr lang="en-US" sz="1050" dirty="0">
-                          <a:solidFill>
-                            <a:srgbClr val="2E2422"/>
-                          </a:solidFill>
-                          <a:latin typeface="Calibri" pitchFamily="34" charset="0"/>
-                          <a:ea typeface="Calibri" pitchFamily="34" charset="-122"/>
-                          <a:cs typeface="Calibri" pitchFamily="34" charset="-120"/>
-                        </a:rPr>
-                        <a:t>−0.8386</a:t>
                       </a:r>
                       <a:endParaRPr lang="en-US" sz="1050" dirty="0">
                         <a:latin typeface="Calibri" charset="0"/>
@@ -12568,7 +10856,7 @@
                   </a:tcPr>
                 </a:tc>
               </a:tr>
-              <a:tr h="306324">
+              <a:tr h="288036">
                 <a:tc>
                   <a:txBody>
                     <a:bodyPr/>
@@ -12716,202 +11004,7 @@
                           <a:ea typeface="Calibri" pitchFamily="34" charset="-122"/>
                           <a:cs typeface="Calibri" pitchFamily="34" charset="-120"/>
                         </a:rPr>
-                        <a:t>0 / 6.6559</a:t>
-                      </a:r>
-                      <a:endParaRPr lang="en-US" sz="1050" dirty="0">
-                        <a:latin typeface="Calibri" charset="0"/>
-                        <a:ea typeface="Calibri" charset="0"/>
-                        <a:cs typeface="Calibri" charset="0"/>
-                      </a:endParaRPr>
-                    </a:p>
-                  </a:txBody>
-                  <a:tcPr marL="91440" marR="91440" marT="45720" marB="45720" anchor="ctr">
-                    <a:lnL w="6350" cap="flat" cmpd="sng" algn="ctr">
-                      <a:solidFill>
-                        <a:srgbClr val="DCD6CC"/>
-                      </a:solidFill>
-                      <a:prstDash val="solid"/>
-                      <a:round/>
-                      <a:headEnd type="none" w="med" len="med"/>
-                      <a:tailEnd type="none" w="med" len="med"/>
-                    </a:lnL>
-                    <a:lnR w="6350" cap="flat" cmpd="sng" algn="ctr">
-                      <a:solidFill>
-                        <a:srgbClr val="DCD6CC"/>
-                      </a:solidFill>
-                      <a:prstDash val="solid"/>
-                      <a:round/>
-                      <a:headEnd type="none" w="med" len="med"/>
-                      <a:tailEnd type="none" w="med" len="med"/>
-                    </a:lnR>
-                    <a:lnT w="6350" cap="flat" cmpd="sng" algn="ctr">
-                      <a:solidFill>
-                        <a:srgbClr val="DCD6CC"/>
-                      </a:solidFill>
-                      <a:prstDash val="solid"/>
-                      <a:round/>
-                      <a:headEnd type="none" w="med" len="med"/>
-                      <a:tailEnd type="none" w="med" len="med"/>
-                    </a:lnT>
-                    <a:lnB w="6350" cap="flat" cmpd="sng" algn="ctr">
-                      <a:solidFill>
-                        <a:srgbClr val="DCD6CC"/>
-                      </a:solidFill>
-                      <a:prstDash val="solid"/>
-                      <a:round/>
-                      <a:headEnd type="none" w="med" len="med"/>
-                      <a:tailEnd type="none" w="med" len="med"/>
-                    </a:lnB>
-                  </a:tcPr>
-                </a:tc>
-                <a:tc>
-                  <a:txBody>
-                    <a:bodyPr/>
-                    <a:lstStyle/>
-                    <a:p>
-                      <a:pPr algn="ctr" indent="0" marL="0">
-                        <a:buNone/>
-                      </a:pPr>
-                      <a:r>
-                        <a:rPr lang="en-US" sz="1050" dirty="0">
-                          <a:solidFill>
-                            <a:srgbClr val="2E2422"/>
-                          </a:solidFill>
-                          <a:latin typeface="Calibri" pitchFamily="34" charset="0"/>
-                          <a:ea typeface="Calibri" pitchFamily="34" charset="-122"/>
-                          <a:cs typeface="Calibri" pitchFamily="34" charset="-120"/>
-                        </a:rPr>
-                        <a:t>0</a:t>
-                      </a:r>
-                      <a:endParaRPr lang="en-US" sz="1050" dirty="0">
-                        <a:latin typeface="Calibri" charset="0"/>
-                        <a:ea typeface="Calibri" charset="0"/>
-                        <a:cs typeface="Calibri" charset="0"/>
-                      </a:endParaRPr>
-                    </a:p>
-                  </a:txBody>
-                  <a:tcPr marL="91440" marR="91440" marT="45720" marB="45720" anchor="ctr">
-                    <a:lnL w="6350" cap="flat" cmpd="sng" algn="ctr">
-                      <a:solidFill>
-                        <a:srgbClr val="DCD6CC"/>
-                      </a:solidFill>
-                      <a:prstDash val="solid"/>
-                      <a:round/>
-                      <a:headEnd type="none" w="med" len="med"/>
-                      <a:tailEnd type="none" w="med" len="med"/>
-                    </a:lnL>
-                    <a:lnR w="6350" cap="flat" cmpd="sng" algn="ctr">
-                      <a:solidFill>
-                        <a:srgbClr val="DCD6CC"/>
-                      </a:solidFill>
-                      <a:prstDash val="solid"/>
-                      <a:round/>
-                      <a:headEnd type="none" w="med" len="med"/>
-                      <a:tailEnd type="none" w="med" len="med"/>
-                    </a:lnR>
-                    <a:lnT w="6350" cap="flat" cmpd="sng" algn="ctr">
-                      <a:solidFill>
-                        <a:srgbClr val="DCD6CC"/>
-                      </a:solidFill>
-                      <a:prstDash val="solid"/>
-                      <a:round/>
-                      <a:headEnd type="none" w="med" len="med"/>
-                      <a:tailEnd type="none" w="med" len="med"/>
-                    </a:lnT>
-                    <a:lnB w="6350" cap="flat" cmpd="sng" algn="ctr">
-                      <a:solidFill>
-                        <a:srgbClr val="DCD6CC"/>
-                      </a:solidFill>
-                      <a:prstDash val="solid"/>
-                      <a:round/>
-                      <a:headEnd type="none" w="med" len="med"/>
-                      <a:tailEnd type="none" w="med" len="med"/>
-                    </a:lnB>
-                  </a:tcPr>
-                </a:tc>
-                <a:tc>
-                  <a:txBody>
-                    <a:bodyPr/>
-                    <a:lstStyle/>
-                    <a:p>
-                      <a:pPr algn="ctr" indent="0" marL="0">
-                        <a:buNone/>
-                      </a:pPr>
-                      <a:r>
-                        <a:rPr lang="en-US" sz="1050" dirty="0">
-                          <a:solidFill>
-                            <a:srgbClr val="2E2422"/>
-                          </a:solidFill>
-                          <a:latin typeface="Calibri" pitchFamily="34" charset="0"/>
-                          <a:ea typeface="Calibri" pitchFamily="34" charset="-122"/>
-                          <a:cs typeface="Calibri" pitchFamily="34" charset="-120"/>
-                        </a:rPr>
                         <a:t>−4.1139</a:t>
-                      </a:r>
-                      <a:endParaRPr lang="en-US" sz="1050" dirty="0">
-                        <a:latin typeface="Calibri" charset="0"/>
-                        <a:ea typeface="Calibri" charset="0"/>
-                        <a:cs typeface="Calibri" charset="0"/>
-                      </a:endParaRPr>
-                    </a:p>
-                  </a:txBody>
-                  <a:tcPr marL="91440" marR="91440" marT="45720" marB="45720" anchor="ctr">
-                    <a:lnL w="6350" cap="flat" cmpd="sng" algn="ctr">
-                      <a:solidFill>
-                        <a:srgbClr val="DCD6CC"/>
-                      </a:solidFill>
-                      <a:prstDash val="solid"/>
-                      <a:round/>
-                      <a:headEnd type="none" w="med" len="med"/>
-                      <a:tailEnd type="none" w="med" len="med"/>
-                    </a:lnL>
-                    <a:lnR w="6350" cap="flat" cmpd="sng" algn="ctr">
-                      <a:solidFill>
-                        <a:srgbClr val="DCD6CC"/>
-                      </a:solidFill>
-                      <a:prstDash val="solid"/>
-                      <a:round/>
-                      <a:headEnd type="none" w="med" len="med"/>
-                      <a:tailEnd type="none" w="med" len="med"/>
-                    </a:lnR>
-                    <a:lnT w="6350" cap="flat" cmpd="sng" algn="ctr">
-                      <a:solidFill>
-                        <a:srgbClr val="DCD6CC"/>
-                      </a:solidFill>
-                      <a:prstDash val="solid"/>
-                      <a:round/>
-                      <a:headEnd type="none" w="med" len="med"/>
-                      <a:tailEnd type="none" w="med" len="med"/>
-                    </a:lnT>
-                    <a:lnB w="6350" cap="flat" cmpd="sng" algn="ctr">
-                      <a:solidFill>
-                        <a:srgbClr val="DCD6CC"/>
-                      </a:solidFill>
-                      <a:prstDash val="solid"/>
-                      <a:round/>
-                      <a:headEnd type="none" w="med" len="med"/>
-                      <a:tailEnd type="none" w="med" len="med"/>
-                    </a:lnB>
-                  </a:tcPr>
-                </a:tc>
-                <a:tc>
-                  <a:txBody>
-                    <a:bodyPr/>
-                    <a:lstStyle/>
-                    <a:p>
-                      <a:pPr algn="ctr" indent="0" marL="0">
-                        <a:buNone/>
-                      </a:pPr>
-                      <a:r>
-                        <a:rPr lang="en-US" sz="1050" dirty="0">
-                          <a:solidFill>
-                            <a:srgbClr val="2E2422"/>
-                          </a:solidFill>
-                          <a:latin typeface="Calibri" pitchFamily="34" charset="0"/>
-                          <a:ea typeface="Calibri" pitchFamily="34" charset="-122"/>
-                          <a:cs typeface="Calibri" pitchFamily="34" charset="-120"/>
-                        </a:rPr>
-                        <a:t>—</a:t>
                       </a:r>
                       <a:endParaRPr lang="en-US" sz="1050" dirty="0">
                         <a:latin typeface="Calibri" charset="0"/>
@@ -13090,7 +11183,7 @@
                   </a:tcPr>
                 </a:tc>
               </a:tr>
-              <a:tr h="306324">
+              <a:tr h="288036">
                 <a:tc>
                   <a:txBody>
                     <a:bodyPr/>
@@ -13238,202 +11331,7 @@
                           <a:ea typeface="Calibri" pitchFamily="34" charset="-122"/>
                           <a:cs typeface="Calibri" pitchFamily="34" charset="-120"/>
                         </a:rPr>
-                        <a:t>0 / 0</a:t>
-                      </a:r>
-                      <a:endParaRPr lang="en-US" sz="1050" dirty="0">
-                        <a:latin typeface="Calibri" charset="0"/>
-                        <a:ea typeface="Calibri" charset="0"/>
-                        <a:cs typeface="Calibri" charset="0"/>
-                      </a:endParaRPr>
-                    </a:p>
-                  </a:txBody>
-                  <a:tcPr marL="91440" marR="91440" marT="45720" marB="45720" anchor="ctr">
-                    <a:lnL w="6350" cap="flat" cmpd="sng" algn="ctr">
-                      <a:solidFill>
-                        <a:srgbClr val="DCD6CC"/>
-                      </a:solidFill>
-                      <a:prstDash val="solid"/>
-                      <a:round/>
-                      <a:headEnd type="none" w="med" len="med"/>
-                      <a:tailEnd type="none" w="med" len="med"/>
-                    </a:lnL>
-                    <a:lnR w="6350" cap="flat" cmpd="sng" algn="ctr">
-                      <a:solidFill>
-                        <a:srgbClr val="DCD6CC"/>
-                      </a:solidFill>
-                      <a:prstDash val="solid"/>
-                      <a:round/>
-                      <a:headEnd type="none" w="med" len="med"/>
-                      <a:tailEnd type="none" w="med" len="med"/>
-                    </a:lnR>
-                    <a:lnT w="6350" cap="flat" cmpd="sng" algn="ctr">
-                      <a:solidFill>
-                        <a:srgbClr val="DCD6CC"/>
-                      </a:solidFill>
-                      <a:prstDash val="solid"/>
-                      <a:round/>
-                      <a:headEnd type="none" w="med" len="med"/>
-                      <a:tailEnd type="none" w="med" len="med"/>
-                    </a:lnT>
-                    <a:lnB w="6350" cap="flat" cmpd="sng" algn="ctr">
-                      <a:solidFill>
-                        <a:srgbClr val="DCD6CC"/>
-                      </a:solidFill>
-                      <a:prstDash val="solid"/>
-                      <a:round/>
-                      <a:headEnd type="none" w="med" len="med"/>
-                      <a:tailEnd type="none" w="med" len="med"/>
-                    </a:lnB>
-                  </a:tcPr>
-                </a:tc>
-                <a:tc>
-                  <a:txBody>
-                    <a:bodyPr/>
-                    <a:lstStyle/>
-                    <a:p>
-                      <a:pPr algn="ctr" indent="0" marL="0">
-                        <a:buNone/>
-                      </a:pPr>
-                      <a:r>
-                        <a:rPr lang="en-US" sz="1050" dirty="0">
-                          <a:solidFill>
-                            <a:srgbClr val="2E2422"/>
-                          </a:solidFill>
-                          <a:latin typeface="Calibri" pitchFamily="34" charset="0"/>
-                          <a:ea typeface="Calibri" pitchFamily="34" charset="-122"/>
-                          <a:cs typeface="Calibri" pitchFamily="34" charset="-120"/>
-                        </a:rPr>
-                        <a:t>0</a:t>
-                      </a:r>
-                      <a:endParaRPr lang="en-US" sz="1050" dirty="0">
-                        <a:latin typeface="Calibri" charset="0"/>
-                        <a:ea typeface="Calibri" charset="0"/>
-                        <a:cs typeface="Calibri" charset="0"/>
-                      </a:endParaRPr>
-                    </a:p>
-                  </a:txBody>
-                  <a:tcPr marL="91440" marR="91440" marT="45720" marB="45720" anchor="ctr">
-                    <a:lnL w="6350" cap="flat" cmpd="sng" algn="ctr">
-                      <a:solidFill>
-                        <a:srgbClr val="DCD6CC"/>
-                      </a:solidFill>
-                      <a:prstDash val="solid"/>
-                      <a:round/>
-                      <a:headEnd type="none" w="med" len="med"/>
-                      <a:tailEnd type="none" w="med" len="med"/>
-                    </a:lnL>
-                    <a:lnR w="6350" cap="flat" cmpd="sng" algn="ctr">
-                      <a:solidFill>
-                        <a:srgbClr val="DCD6CC"/>
-                      </a:solidFill>
-                      <a:prstDash val="solid"/>
-                      <a:round/>
-                      <a:headEnd type="none" w="med" len="med"/>
-                      <a:tailEnd type="none" w="med" len="med"/>
-                    </a:lnR>
-                    <a:lnT w="6350" cap="flat" cmpd="sng" algn="ctr">
-                      <a:solidFill>
-                        <a:srgbClr val="DCD6CC"/>
-                      </a:solidFill>
-                      <a:prstDash val="solid"/>
-                      <a:round/>
-                      <a:headEnd type="none" w="med" len="med"/>
-                      <a:tailEnd type="none" w="med" len="med"/>
-                    </a:lnT>
-                    <a:lnB w="6350" cap="flat" cmpd="sng" algn="ctr">
-                      <a:solidFill>
-                        <a:srgbClr val="DCD6CC"/>
-                      </a:solidFill>
-                      <a:prstDash val="solid"/>
-                      <a:round/>
-                      <a:headEnd type="none" w="med" len="med"/>
-                      <a:tailEnd type="none" w="med" len="med"/>
-                    </a:lnB>
-                  </a:tcPr>
-                </a:tc>
-                <a:tc>
-                  <a:txBody>
-                    <a:bodyPr/>
-                    <a:lstStyle/>
-                    <a:p>
-                      <a:pPr algn="ctr" indent="0" marL="0">
-                        <a:buNone/>
-                      </a:pPr>
-                      <a:r>
-                        <a:rPr lang="en-US" sz="1050" dirty="0">
-                          <a:solidFill>
-                            <a:srgbClr val="2E2422"/>
-                          </a:solidFill>
-                          <a:latin typeface="Calibri" pitchFamily="34" charset="0"/>
-                          <a:ea typeface="Calibri" pitchFamily="34" charset="-122"/>
-                          <a:cs typeface="Calibri" pitchFamily="34" charset="-120"/>
-                        </a:rPr>
                         <a:t>−4.1186</a:t>
-                      </a:r>
-                      <a:endParaRPr lang="en-US" sz="1050" dirty="0">
-                        <a:latin typeface="Calibri" charset="0"/>
-                        <a:ea typeface="Calibri" charset="0"/>
-                        <a:cs typeface="Calibri" charset="0"/>
-                      </a:endParaRPr>
-                    </a:p>
-                  </a:txBody>
-                  <a:tcPr marL="91440" marR="91440" marT="45720" marB="45720" anchor="ctr">
-                    <a:lnL w="6350" cap="flat" cmpd="sng" algn="ctr">
-                      <a:solidFill>
-                        <a:srgbClr val="DCD6CC"/>
-                      </a:solidFill>
-                      <a:prstDash val="solid"/>
-                      <a:round/>
-                      <a:headEnd type="none" w="med" len="med"/>
-                      <a:tailEnd type="none" w="med" len="med"/>
-                    </a:lnL>
-                    <a:lnR w="6350" cap="flat" cmpd="sng" algn="ctr">
-                      <a:solidFill>
-                        <a:srgbClr val="DCD6CC"/>
-                      </a:solidFill>
-                      <a:prstDash val="solid"/>
-                      <a:round/>
-                      <a:headEnd type="none" w="med" len="med"/>
-                      <a:tailEnd type="none" w="med" len="med"/>
-                    </a:lnR>
-                    <a:lnT w="6350" cap="flat" cmpd="sng" algn="ctr">
-                      <a:solidFill>
-                        <a:srgbClr val="DCD6CC"/>
-                      </a:solidFill>
-                      <a:prstDash val="solid"/>
-                      <a:round/>
-                      <a:headEnd type="none" w="med" len="med"/>
-                      <a:tailEnd type="none" w="med" len="med"/>
-                    </a:lnT>
-                    <a:lnB w="6350" cap="flat" cmpd="sng" algn="ctr">
-                      <a:solidFill>
-                        <a:srgbClr val="DCD6CC"/>
-                      </a:solidFill>
-                      <a:prstDash val="solid"/>
-                      <a:round/>
-                      <a:headEnd type="none" w="med" len="med"/>
-                      <a:tailEnd type="none" w="med" len="med"/>
-                    </a:lnB>
-                  </a:tcPr>
-                </a:tc>
-                <a:tc>
-                  <a:txBody>
-                    <a:bodyPr/>
-                    <a:lstStyle/>
-                    <a:p>
-                      <a:pPr algn="ctr" indent="0" marL="0">
-                        <a:buNone/>
-                      </a:pPr>
-                      <a:r>
-                        <a:rPr lang="en-US" sz="1050" dirty="0">
-                          <a:solidFill>
-                            <a:srgbClr val="2E2422"/>
-                          </a:solidFill>
-                          <a:latin typeface="Calibri" pitchFamily="34" charset="0"/>
-                          <a:ea typeface="Calibri" pitchFamily="34" charset="-122"/>
-                          <a:cs typeface="Calibri" pitchFamily="34" charset="-120"/>
-                        </a:rPr>
-                        <a:t>—</a:t>
                       </a:r>
                       <a:endParaRPr lang="en-US" sz="1050" dirty="0">
                         <a:latin typeface="Calibri" charset="0"/>
@@ -13612,7 +11510,7 @@
                   </a:tcPr>
                 </a:tc>
               </a:tr>
-              <a:tr h="306324">
+              <a:tr h="288036">
                 <a:tc>
                   <a:txBody>
                     <a:bodyPr/>
@@ -13760,202 +11658,7 @@
                           <a:ea typeface="Calibri" pitchFamily="34" charset="-122"/>
                           <a:cs typeface="Calibri" pitchFamily="34" charset="-120"/>
                         </a:rPr>
-                        <a:t>8.0422 / 0</a:t>
-                      </a:r>
-                      <a:endParaRPr lang="en-US" sz="1050" dirty="0">
-                        <a:latin typeface="Calibri" charset="0"/>
-                        <a:ea typeface="Calibri" charset="0"/>
-                        <a:cs typeface="Calibri" charset="0"/>
-                      </a:endParaRPr>
-                    </a:p>
-                  </a:txBody>
-                  <a:tcPr marL="91440" marR="91440" marT="45720" marB="45720" anchor="ctr">
-                    <a:lnL w="6350" cap="flat" cmpd="sng" algn="ctr">
-                      <a:solidFill>
-                        <a:srgbClr val="DCD6CC"/>
-                      </a:solidFill>
-                      <a:prstDash val="solid"/>
-                      <a:round/>
-                      <a:headEnd type="none" w="med" len="med"/>
-                      <a:tailEnd type="none" w="med" len="med"/>
-                    </a:lnL>
-                    <a:lnR w="6350" cap="flat" cmpd="sng" algn="ctr">
-                      <a:solidFill>
-                        <a:srgbClr val="DCD6CC"/>
-                      </a:solidFill>
-                      <a:prstDash val="solid"/>
-                      <a:round/>
-                      <a:headEnd type="none" w="med" len="med"/>
-                      <a:tailEnd type="none" w="med" len="med"/>
-                    </a:lnR>
-                    <a:lnT w="6350" cap="flat" cmpd="sng" algn="ctr">
-                      <a:solidFill>
-                        <a:srgbClr val="DCD6CC"/>
-                      </a:solidFill>
-                      <a:prstDash val="solid"/>
-                      <a:round/>
-                      <a:headEnd type="none" w="med" len="med"/>
-                      <a:tailEnd type="none" w="med" len="med"/>
-                    </a:lnT>
-                    <a:lnB w="6350" cap="flat" cmpd="sng" algn="ctr">
-                      <a:solidFill>
-                        <a:srgbClr val="DCD6CC"/>
-                      </a:solidFill>
-                      <a:prstDash val="solid"/>
-                      <a:round/>
-                      <a:headEnd type="none" w="med" len="med"/>
-                      <a:tailEnd type="none" w="med" len="med"/>
-                    </a:lnB>
-                  </a:tcPr>
-                </a:tc>
-                <a:tc>
-                  <a:txBody>
-                    <a:bodyPr/>
-                    <a:lstStyle/>
-                    <a:p>
-                      <a:pPr algn="ctr" indent="0" marL="0">
-                        <a:buNone/>
-                      </a:pPr>
-                      <a:r>
-                        <a:rPr lang="en-US" sz="1050" dirty="0">
-                          <a:solidFill>
-                            <a:srgbClr val="2E2422"/>
-                          </a:solidFill>
-                          <a:latin typeface="Calibri" pitchFamily="34" charset="0"/>
-                          <a:ea typeface="Calibri" pitchFamily="34" charset="-122"/>
-                          <a:cs typeface="Calibri" pitchFamily="34" charset="-120"/>
-                        </a:rPr>
                         <a:t>−0.2946</a:t>
-                      </a:r>
-                      <a:endParaRPr lang="en-US" sz="1050" dirty="0">
-                        <a:latin typeface="Calibri" charset="0"/>
-                        <a:ea typeface="Calibri" charset="0"/>
-                        <a:cs typeface="Calibri" charset="0"/>
-                      </a:endParaRPr>
-                    </a:p>
-                  </a:txBody>
-                  <a:tcPr marL="91440" marR="91440" marT="45720" marB="45720" anchor="ctr">
-                    <a:lnL w="6350" cap="flat" cmpd="sng" algn="ctr">
-                      <a:solidFill>
-                        <a:srgbClr val="DCD6CC"/>
-                      </a:solidFill>
-                      <a:prstDash val="solid"/>
-                      <a:round/>
-                      <a:headEnd type="none" w="med" len="med"/>
-                      <a:tailEnd type="none" w="med" len="med"/>
-                    </a:lnL>
-                    <a:lnR w="6350" cap="flat" cmpd="sng" algn="ctr">
-                      <a:solidFill>
-                        <a:srgbClr val="DCD6CC"/>
-                      </a:solidFill>
-                      <a:prstDash val="solid"/>
-                      <a:round/>
-                      <a:headEnd type="none" w="med" len="med"/>
-                      <a:tailEnd type="none" w="med" len="med"/>
-                    </a:lnR>
-                    <a:lnT w="6350" cap="flat" cmpd="sng" algn="ctr">
-                      <a:solidFill>
-                        <a:srgbClr val="DCD6CC"/>
-                      </a:solidFill>
-                      <a:prstDash val="solid"/>
-                      <a:round/>
-                      <a:headEnd type="none" w="med" len="med"/>
-                      <a:tailEnd type="none" w="med" len="med"/>
-                    </a:lnT>
-                    <a:lnB w="6350" cap="flat" cmpd="sng" algn="ctr">
-                      <a:solidFill>
-                        <a:srgbClr val="DCD6CC"/>
-                      </a:solidFill>
-                      <a:prstDash val="solid"/>
-                      <a:round/>
-                      <a:headEnd type="none" w="med" len="med"/>
-                      <a:tailEnd type="none" w="med" len="med"/>
-                    </a:lnB>
-                  </a:tcPr>
-                </a:tc>
-                <a:tc>
-                  <a:txBody>
-                    <a:bodyPr/>
-                    <a:lstStyle/>
-                    <a:p>
-                      <a:pPr algn="ctr" indent="0" marL="0">
-                        <a:buNone/>
-                      </a:pPr>
-                      <a:r>
-                        <a:rPr lang="en-US" sz="1050" dirty="0">
-                          <a:solidFill>
-                            <a:srgbClr val="2E2422"/>
-                          </a:solidFill>
-                          <a:latin typeface="Calibri" pitchFamily="34" charset="0"/>
-                          <a:ea typeface="Calibri" pitchFamily="34" charset="-122"/>
-                          <a:cs typeface="Calibri" pitchFamily="34" charset="-120"/>
-                        </a:rPr>
-                        <a:t>0</a:t>
-                      </a:r>
-                      <a:endParaRPr lang="en-US" sz="1050" dirty="0">
-                        <a:latin typeface="Calibri" charset="0"/>
-                        <a:ea typeface="Calibri" charset="0"/>
-                        <a:cs typeface="Calibri" charset="0"/>
-                      </a:endParaRPr>
-                    </a:p>
-                  </a:txBody>
-                  <a:tcPr marL="91440" marR="91440" marT="45720" marB="45720" anchor="ctr">
-                    <a:lnL w="6350" cap="flat" cmpd="sng" algn="ctr">
-                      <a:solidFill>
-                        <a:srgbClr val="DCD6CC"/>
-                      </a:solidFill>
-                      <a:prstDash val="solid"/>
-                      <a:round/>
-                      <a:headEnd type="none" w="med" len="med"/>
-                      <a:tailEnd type="none" w="med" len="med"/>
-                    </a:lnL>
-                    <a:lnR w="6350" cap="flat" cmpd="sng" algn="ctr">
-                      <a:solidFill>
-                        <a:srgbClr val="DCD6CC"/>
-                      </a:solidFill>
-                      <a:prstDash val="solid"/>
-                      <a:round/>
-                      <a:headEnd type="none" w="med" len="med"/>
-                      <a:tailEnd type="none" w="med" len="med"/>
-                    </a:lnR>
-                    <a:lnT w="6350" cap="flat" cmpd="sng" algn="ctr">
-                      <a:solidFill>
-                        <a:srgbClr val="DCD6CC"/>
-                      </a:solidFill>
-                      <a:prstDash val="solid"/>
-                      <a:round/>
-                      <a:headEnd type="none" w="med" len="med"/>
-                      <a:tailEnd type="none" w="med" len="med"/>
-                    </a:lnT>
-                    <a:lnB w="6350" cap="flat" cmpd="sng" algn="ctr">
-                      <a:solidFill>
-                        <a:srgbClr val="DCD6CC"/>
-                      </a:solidFill>
-                      <a:prstDash val="solid"/>
-                      <a:round/>
-                      <a:headEnd type="none" w="med" len="med"/>
-                      <a:tailEnd type="none" w="med" len="med"/>
-                    </a:lnB>
-                  </a:tcPr>
-                </a:tc>
-                <a:tc>
-                  <a:txBody>
-                    <a:bodyPr/>
-                    <a:lstStyle/>
-                    <a:p>
-                      <a:pPr algn="ctr" indent="0" marL="0">
-                        <a:buNone/>
-                      </a:pPr>
-                      <a:r>
-                        <a:rPr lang="en-US" sz="1050" dirty="0">
-                          <a:solidFill>
-                            <a:srgbClr val="2E2422"/>
-                          </a:solidFill>
-                          <a:latin typeface="Calibri" pitchFamily="34" charset="0"/>
-                          <a:ea typeface="Calibri" pitchFamily="34" charset="-122"/>
-                          <a:cs typeface="Calibri" pitchFamily="34" charset="-120"/>
-                        </a:rPr>
-                        <a:t>−0.1462</a:t>
                       </a:r>
                       <a:endParaRPr lang="en-US" sz="1050" dirty="0">
                         <a:latin typeface="Calibri" charset="0"/>
@@ -14134,7 +11837,7 @@
                   </a:tcPr>
                 </a:tc>
               </a:tr>
-              <a:tr h="306324">
+              <a:tr h="288036">
                 <a:tc>
                   <a:txBody>
                     <a:bodyPr/>
@@ -14282,202 +11985,7 @@
                           <a:ea typeface="Calibri" pitchFamily="34" charset="-122"/>
                           <a:cs typeface="Calibri" pitchFamily="34" charset="-120"/>
                         </a:rPr>
-                        <a:t>0 / 0</a:t>
-                      </a:r>
-                      <a:endParaRPr lang="en-US" sz="1050" dirty="0">
-                        <a:latin typeface="Calibri" charset="0"/>
-                        <a:ea typeface="Calibri" charset="0"/>
-                        <a:cs typeface="Calibri" charset="0"/>
-                      </a:endParaRPr>
-                    </a:p>
-                  </a:txBody>
-                  <a:tcPr marL="91440" marR="91440" marT="45720" marB="45720" anchor="ctr">
-                    <a:lnL w="6350" cap="flat" cmpd="sng" algn="ctr">
-                      <a:solidFill>
-                        <a:srgbClr val="DCD6CC"/>
-                      </a:solidFill>
-                      <a:prstDash val="solid"/>
-                      <a:round/>
-                      <a:headEnd type="none" w="med" len="med"/>
-                      <a:tailEnd type="none" w="med" len="med"/>
-                    </a:lnL>
-                    <a:lnR w="6350" cap="flat" cmpd="sng" algn="ctr">
-                      <a:solidFill>
-                        <a:srgbClr val="DCD6CC"/>
-                      </a:solidFill>
-                      <a:prstDash val="solid"/>
-                      <a:round/>
-                      <a:headEnd type="none" w="med" len="med"/>
-                      <a:tailEnd type="none" w="med" len="med"/>
-                    </a:lnR>
-                    <a:lnT w="6350" cap="flat" cmpd="sng" algn="ctr">
-                      <a:solidFill>
-                        <a:srgbClr val="DCD6CC"/>
-                      </a:solidFill>
-                      <a:prstDash val="solid"/>
-                      <a:round/>
-                      <a:headEnd type="none" w="med" len="med"/>
-                      <a:tailEnd type="none" w="med" len="med"/>
-                    </a:lnT>
-                    <a:lnB w="6350" cap="flat" cmpd="sng" algn="ctr">
-                      <a:solidFill>
-                        <a:srgbClr val="DCD6CC"/>
-                      </a:solidFill>
-                      <a:prstDash val="solid"/>
-                      <a:round/>
-                      <a:headEnd type="none" w="med" len="med"/>
-                      <a:tailEnd type="none" w="med" len="med"/>
-                    </a:lnB>
-                  </a:tcPr>
-                </a:tc>
-                <a:tc>
-                  <a:txBody>
-                    <a:bodyPr/>
-                    <a:lstStyle/>
-                    <a:p>
-                      <a:pPr algn="ctr" indent="0" marL="0">
-                        <a:buNone/>
-                      </a:pPr>
-                      <a:r>
-                        <a:rPr lang="en-US" sz="1050" dirty="0">
-                          <a:solidFill>
-                            <a:srgbClr val="2E2422"/>
-                          </a:solidFill>
-                          <a:latin typeface="Calibri" pitchFamily="34" charset="0"/>
-                          <a:ea typeface="Calibri" pitchFamily="34" charset="-122"/>
-                          <a:cs typeface="Calibri" pitchFamily="34" charset="-120"/>
-                        </a:rPr>
                         <a:t>−0.2955</a:t>
-                      </a:r>
-                      <a:endParaRPr lang="en-US" sz="1050" dirty="0">
-                        <a:latin typeface="Calibri" charset="0"/>
-                        <a:ea typeface="Calibri" charset="0"/>
-                        <a:cs typeface="Calibri" charset="0"/>
-                      </a:endParaRPr>
-                    </a:p>
-                  </a:txBody>
-                  <a:tcPr marL="91440" marR="91440" marT="45720" marB="45720" anchor="ctr">
-                    <a:lnL w="6350" cap="flat" cmpd="sng" algn="ctr">
-                      <a:solidFill>
-                        <a:srgbClr val="DCD6CC"/>
-                      </a:solidFill>
-                      <a:prstDash val="solid"/>
-                      <a:round/>
-                      <a:headEnd type="none" w="med" len="med"/>
-                      <a:tailEnd type="none" w="med" len="med"/>
-                    </a:lnL>
-                    <a:lnR w="6350" cap="flat" cmpd="sng" algn="ctr">
-                      <a:solidFill>
-                        <a:srgbClr val="DCD6CC"/>
-                      </a:solidFill>
-                      <a:prstDash val="solid"/>
-                      <a:round/>
-                      <a:headEnd type="none" w="med" len="med"/>
-                      <a:tailEnd type="none" w="med" len="med"/>
-                    </a:lnR>
-                    <a:lnT w="6350" cap="flat" cmpd="sng" algn="ctr">
-                      <a:solidFill>
-                        <a:srgbClr val="DCD6CC"/>
-                      </a:solidFill>
-                      <a:prstDash val="solid"/>
-                      <a:round/>
-                      <a:headEnd type="none" w="med" len="med"/>
-                      <a:tailEnd type="none" w="med" len="med"/>
-                    </a:lnT>
-                    <a:lnB w="6350" cap="flat" cmpd="sng" algn="ctr">
-                      <a:solidFill>
-                        <a:srgbClr val="DCD6CC"/>
-                      </a:solidFill>
-                      <a:prstDash val="solid"/>
-                      <a:round/>
-                      <a:headEnd type="none" w="med" len="med"/>
-                      <a:tailEnd type="none" w="med" len="med"/>
-                    </a:lnB>
-                  </a:tcPr>
-                </a:tc>
-                <a:tc>
-                  <a:txBody>
-                    <a:bodyPr/>
-                    <a:lstStyle/>
-                    <a:p>
-                      <a:pPr algn="ctr" indent="0" marL="0">
-                        <a:buNone/>
-                      </a:pPr>
-                      <a:r>
-                        <a:rPr lang="en-US" sz="1050" dirty="0">
-                          <a:solidFill>
-                            <a:srgbClr val="2E2422"/>
-                          </a:solidFill>
-                          <a:latin typeface="Calibri" pitchFamily="34" charset="0"/>
-                          <a:ea typeface="Calibri" pitchFamily="34" charset="-122"/>
-                          <a:cs typeface="Calibri" pitchFamily="34" charset="-120"/>
-                        </a:rPr>
-                        <a:t>0</a:t>
-                      </a:r>
-                      <a:endParaRPr lang="en-US" sz="1050" dirty="0">
-                        <a:latin typeface="Calibri" charset="0"/>
-                        <a:ea typeface="Calibri" charset="0"/>
-                        <a:cs typeface="Calibri" charset="0"/>
-                      </a:endParaRPr>
-                    </a:p>
-                  </a:txBody>
-                  <a:tcPr marL="91440" marR="91440" marT="45720" marB="45720" anchor="ctr">
-                    <a:lnL w="6350" cap="flat" cmpd="sng" algn="ctr">
-                      <a:solidFill>
-                        <a:srgbClr val="DCD6CC"/>
-                      </a:solidFill>
-                      <a:prstDash val="solid"/>
-                      <a:round/>
-                      <a:headEnd type="none" w="med" len="med"/>
-                      <a:tailEnd type="none" w="med" len="med"/>
-                    </a:lnL>
-                    <a:lnR w="6350" cap="flat" cmpd="sng" algn="ctr">
-                      <a:solidFill>
-                        <a:srgbClr val="DCD6CC"/>
-                      </a:solidFill>
-                      <a:prstDash val="solid"/>
-                      <a:round/>
-                      <a:headEnd type="none" w="med" len="med"/>
-                      <a:tailEnd type="none" w="med" len="med"/>
-                    </a:lnR>
-                    <a:lnT w="6350" cap="flat" cmpd="sng" algn="ctr">
-                      <a:solidFill>
-                        <a:srgbClr val="DCD6CC"/>
-                      </a:solidFill>
-                      <a:prstDash val="solid"/>
-                      <a:round/>
-                      <a:headEnd type="none" w="med" len="med"/>
-                      <a:tailEnd type="none" w="med" len="med"/>
-                    </a:lnT>
-                    <a:lnB w="6350" cap="flat" cmpd="sng" algn="ctr">
-                      <a:solidFill>
-                        <a:srgbClr val="DCD6CC"/>
-                      </a:solidFill>
-                      <a:prstDash val="solid"/>
-                      <a:round/>
-                      <a:headEnd type="none" w="med" len="med"/>
-                      <a:tailEnd type="none" w="med" len="med"/>
-                    </a:lnB>
-                  </a:tcPr>
-                </a:tc>
-                <a:tc>
-                  <a:txBody>
-                    <a:bodyPr/>
-                    <a:lstStyle/>
-                    <a:p>
-                      <a:pPr algn="ctr" indent="0" marL="0">
-                        <a:buNone/>
-                      </a:pPr>
-                      <a:r>
-                        <a:rPr lang="en-US" sz="1050" dirty="0">
-                          <a:solidFill>
-                            <a:srgbClr val="2E2422"/>
-                          </a:solidFill>
-                          <a:latin typeface="Calibri" pitchFamily="34" charset="0"/>
-                          <a:ea typeface="Calibri" pitchFamily="34" charset="-122"/>
-                          <a:cs typeface="Calibri" pitchFamily="34" charset="-120"/>
-                        </a:rPr>
-                        <a:t>−0.1461</a:t>
                       </a:r>
                       <a:endParaRPr lang="en-US" sz="1050" dirty="0">
                         <a:latin typeface="Calibri" charset="0"/>
@@ -14662,18 +12170,60 @@
       </p:graphicFrame>
       <p:sp>
         <p:nvSpPr>
-          <p:cNvPr id="12" name="Shape 9"/>
+          <p:cNvPr id="15" name="Text 11"/>
+          <p:cNvSpPr txBox="1"/>
+          <p:nvPr/>
+        </p:nvSpPr>
+        <p:spPr>
+          <a:xfrm>
+            <a:off x="6309360" y="4572000"/>
+            <a:ext cx="5257800" cy="566928"/>
+          </a:xfrm>
+          <a:prstGeom prst="rect">
+            <a:avLst/>
+          </a:prstGeom>
+          <a:noFill/>
+          <a:ln/>
+        </p:spPr>
+        <p:txBody>
+          <a:bodyPr wrap="square" lIns="0" tIns="0" rIns="0" bIns="0" rtlCol="0" anchor="ctr"/>
+          <a:lstStyle/>
+          <a:p>
+            <a:pPr indent="0" marL="0">
+              <a:lnSpc>
+                <a:spcPts val="1400"/>
+              </a:lnSpc>
+              <a:buNone/>
+            </a:pPr>
+            <a:r>
+              <a:rPr lang="en-US" sz="1100" dirty="0">
+                <a:solidFill>
+                  <a:srgbClr val="2E2422"/>
+                </a:solidFill>
+                <a:latin typeface="Calibri" pitchFamily="34" charset="0"/>
+                <a:ea typeface="Calibri" pitchFamily="34" charset="-122"/>
+                <a:cs typeface="Calibri" pitchFamily="34" charset="-120"/>
+              </a:rPr>
+              <a:t>최적해가 같다 — 소수 셋째 자리까지 일치한다. 차이는 b의 해석과 조건수뿐이다. 단 상자를 함께 열어야 한다.</a:t>
+            </a:r>
+            <a:endParaRPr lang="en-US" sz="1100" dirty="0"/>
+          </a:p>
+        </p:txBody>
+      </p:sp>
+      <p:sp>
+        <p:nvSpPr>
+          <p:cNvPr id="16" name="Shape 12"/>
           <p:cNvSpPr/>
           <p:nvPr/>
         </p:nvSpPr>
         <p:spPr>
           <a:xfrm>
-            <a:off x="640080" y="5376672"/>
-            <a:ext cx="10927080" cy="914400"/>
+            <a:off x="640080" y="5266944"/>
+            <a:ext cx="10927080" cy="1024128"/>
           </a:xfrm>
           <a:prstGeom prst="roundRect">
             <a:avLst>
-              <a:gd name="adj" fmla="val 9000"/>
+              <a:gd name="adj" fmla="val 8036"/>
             </a:avLst>
           </a:prstGeom>
           <a:solidFill>
@@ -14689,14 +12239,14 @@
       </p:sp>
       <p:sp>
         <p:nvSpPr>
-          <p:cNvPr id="13" name="Text 10"/>
+          <p:cNvPr id="17" name="Text 13"/>
           <p:cNvSpPr txBox="1"/>
           <p:nvPr/>
         </p:nvSpPr>
         <p:spPr>
           <a:xfrm>
-            <a:off x="914400" y="5532120"/>
-            <a:ext cx="10378440" cy="292608"/>
+            <a:off x="914400" y="5431536"/>
+            <a:ext cx="777240" cy="274320"/>
           </a:xfrm>
           <a:prstGeom prst="rect">
             <a:avLst/>
@@ -14712,30 +12262,30 @@
               <a:buNone/>
             </a:pPr>
             <a:r>
-              <a:rPr lang="en-US" sz="1300" b="1" dirty="0">
+              <a:rPr lang="en-US" sz="1200" b="1" dirty="0">
                 <a:solidFill>
                   <a:srgbClr val="B85042"/>
                 </a:solidFill>
-                <a:latin typeface="Cambria" pitchFamily="34" charset="0"/>
-                <a:ea typeface="Cambria" pitchFamily="34" charset="-122"/>
-                <a:cs typeface="Cambria" pitchFamily="34" charset="-120"/>
+                <a:latin typeface="Calibri" pitchFamily="34" charset="0"/>
+                <a:ea typeface="Calibri" pitchFamily="34" charset="-122"/>
+                <a:cs typeface="Calibri" pitchFamily="34" charset="-120"/>
               </a:rPr>
-              <a:t>최적해는 같다 — 소수 셋째 자리까지 일치한다. 차이는 b의 해석과 조건수뿐이다.</a:t>
+              <a:t>정리</a:t>
             </a:r>
-            <a:endParaRPr lang="en-US" sz="1300" dirty="0"/>
+            <a:endParaRPr lang="en-US" sz="1200" dirty="0"/>
           </a:p>
         </p:txBody>
       </p:sp>
       <p:sp>
         <p:nvSpPr>
-          <p:cNvPr id="14" name="Text 11"/>
+          <p:cNvPr id="18" name="Text 14"/>
           <p:cNvSpPr txBox="1"/>
           <p:nvPr/>
         </p:nvSpPr>
         <p:spPr>
           <a:xfrm>
-            <a:off x="914400" y="5870448"/>
-            <a:ext cx="10378440" cy="310896"/>
+            <a:off x="1874520" y="5413248"/>
+            <a:ext cx="9418320" cy="749808"/>
           </a:xfrm>
           <a:prstGeom prst="rect">
             <a:avLst/>
@@ -14748,10 +12298,13 @@
           <a:lstStyle/>
           <a:p>
             <a:pPr indent="0" marL="0">
+              <a:lnSpc>
+                <a:spcPts val="1400"/>
+              </a:lnSpc>
               <a:buNone/>
             </a:pPr>
             <a:r>
-              <a:rPr lang="en-US" sz="1100" dirty="0">
+              <a:rPr lang="en-US" sz="1050" dirty="0">
                 <a:solidFill>
                   <a:srgbClr val="CFC4BC"/>
                 </a:solidFill>
@@ -14759,9 +12312,29 @@
                 <a:ea typeface="Calibri" pitchFamily="34" charset="-122"/>
                 <a:cs typeface="Calibri" pitchFamily="34" charset="-120"/>
               </a:rPr>
-              <a:t>단, 상자를 함께 열어야 한다. 기존 상자 [−2, 4]는 실제로 걸리고 있었고(B1의 b_LS가 하한 −2에 붙음), 센터링하면 LS는 b가 +8.21까지 가야 하는데 상한 4에 닿지 못한다.</a:t>
+              <a:t>① b_LQ 해제는 LQ를 0.7812 → 0.8158로 올렸다 (짝지은 부트스트랩 3,000회, P = 0.978).   ② 중심화는 성능을 바꾸는 장치가 아니라 해석·수치 안정성을 위한 매개변수화 선택이다.</a:t>
             </a:r>
-            <a:endParaRPr lang="en-US" sz="1100" dirty="0"/>
+            <a:endParaRPr lang="en-US" sz="1050" dirty="0"/>
+          </a:p>
+          <a:p>
+            <a:pPr indent="0" marL="0">
+              <a:lnSpc>
+                <a:spcPts val="1400"/>
+              </a:lnSpc>
+              <a:buNone/>
+            </a:pPr>
+            <a:r>
+              <a:rPr lang="en-US" sz="1050" dirty="0">
+                <a:solidFill>
+                  <a:srgbClr val="CFC4BC"/>
+                </a:solidFill>
+                <a:latin typeface="Calibri" pitchFamily="34" charset="0"/>
+                <a:ea typeface="Calibri" pitchFamily="34" charset="-122"/>
+                <a:cs typeface="Calibri" pitchFamily="34" charset="-120"/>
+              </a:rPr>
+              <a:t>기존 상자 [−2, 4]는 실제로 걸리고 있었고(B1의 b_LS가 하한 −2에 붙음), 중심화하면 LS는 b가 +8.21까지 가야 해 상한 4에 닿지 못한다. 켤 때는 상자도 함께 연다.</a:t>
+            </a:r>
+            <a:endParaRPr lang="en-US" sz="1050" dirty="0"/>
           </a:p>
         </p:txBody>
       </p:sp>
@@ -14773,9 +12346,9 @@
 </p:sld>
 </file>
 
-<file path=ppt/slides/slide14.xml><?xml version="1.0" encoding="utf-8"?>
+<file path=ppt/slides/slide13.xml><?xml version="1.0" encoding="utf-8"?>
 <p:sld xmlns:a="http://schemas.openxmlformats.org/drawingml/2006/main" xmlns:r="http://schemas.openxmlformats.org/officeDocument/2006/relationships" xmlns:p="http://schemas.openxmlformats.org/presentationml/2006/main">
-  <p:cSld name="Slide 14">
+  <p:cSld name="Slide 13">
     <p:bg>
       <p:bgPr>
         <a:solidFill>
@@ -16157,9 +13730,9 @@
 </p:sld>
 </file>
 
-<file path=ppt/slides/slide15.xml><?xml version="1.0" encoding="utf-8"?>
+<file path=ppt/slides/slide14.xml><?xml version="1.0" encoding="utf-8"?>
 <p:sld xmlns:a="http://schemas.openxmlformats.org/drawingml/2006/main" xmlns:r="http://schemas.openxmlformats.org/officeDocument/2006/relationships" xmlns:p="http://schemas.openxmlformats.org/presentationml/2006/main">
-  <p:cSld name="Slide 15">
+  <p:cSld name="Slide 14">
     <p:bg>
       <p:bgPr>
         <a:solidFill>

--- a/results/deck/LOEO_발표자료.pptx
+++ b/results/deck/LOEO_발표자료.pptx
@@ -427,7 +427,7 @@
               <a:lstStyle/>
               <a:p>
                 <a:pPr>
-                  <a:defRPr b="0" i="0" strike="noStrike" sz="950" u="none">
+                  <a:defRPr b="0" i="0" strike="noStrike" sz="900" u="none">
                     <a:solidFill>
                       <a:srgbClr val="2E2422"/>
                     </a:solidFill>
@@ -451,7 +451,7 @@
                 <c:ptCount val="4"/>
                 <c:lvl>
                   <c:pt idx="0">
-                    <c:v>USGS π 단독</c:v>
+                    <c:v>USGS π̄ 단독</c:v>
                   </c:pt>
                   <c:pt idx="1">
                     <c:v>시정촌 면적 log k 단독</c:v>
@@ -460,7 +460,7 @@
                     <c:v>산지 비율 단독</c:v>
                   </c:pt>
                   <c:pt idx="3">
-                    <c:v>π + 면적 항</c:v>
+                    <c:v>π̄ + 면적 항</c:v>
                   </c:pt>
                 </c:lvl>
               </c:multiLvlStrCache>
@@ -516,7 +516,7 @@
               <a:lstStyle/>
               <a:p>
                 <a:pPr>
-                  <a:defRPr b="0" i="0" strike="noStrike" sz="950" u="none">
+                  <a:defRPr b="0" i="0" strike="noStrike" sz="900" u="none">
                     <a:solidFill>
                       <a:srgbClr val="2E2422"/>
                     </a:solidFill>
@@ -540,7 +540,7 @@
                 <c:ptCount val="4"/>
                 <c:lvl>
                   <c:pt idx="0">
-                    <c:v>USGS π 단독</c:v>
+                    <c:v>USGS π̄ 단독</c:v>
                   </c:pt>
                   <c:pt idx="1">
                     <c:v>시정촌 면적 log k 단독</c:v>
@@ -549,7 +549,7 @@
                     <c:v>산지 비율 단독</c:v>
                   </c:pt>
                   <c:pt idx="3">
-                    <c:v>π + 면적 항</c:v>
+                    <c:v>π̄ + 면적 항</c:v>
                   </c:pt>
                 </c:lvl>
               </c:multiLvlStrCache>
@@ -584,7 +584,7 @@
             <a:lstStyle/>
             <a:p>
               <a:pPr>
-                <a:defRPr b="0" i="0" strike="noStrike" sz="950" u="none">
+                <a:defRPr b="0" i="0" strike="noStrike" sz="900" u="none">
                   <a:solidFill>
                     <a:srgbClr val="2E2422"/>
                   </a:solidFill>
@@ -632,7 +632,7 @@
           <a:lstStyle/>
           <a:p>
             <a:pPr>
-              <a:defRPr sz="1100" b="0" i="0" u="none" strike="noStrike">
+              <a:defRPr sz="950" b="0" i="0" u="none" strike="noStrike">
                 <a:solidFill>
                   <a:srgbClr val="7A6A63"/>
                 </a:solidFill>
@@ -717,7 +717,7 @@
         <a:lstStyle/>
         <a:p>
           <a:pPr>
-            <a:defRPr sz="1100">
+            <a:defRPr sz="1050">
               <a:solidFill>
                 <a:srgbClr val="7A6A63"/>
               </a:solidFill>
@@ -2626,7 +2626,7 @@
           <a:p>
             <a:r>
               <a:rPr lang="en-US" dirty="0"/>
-              <a:t>LQ에서 면적 단독이 무력하다는 점이 중요하다. 'LS 결과는 시정촌이 크면 라벨이 켜지는 아티팩트 아닌가'라는 의심에 대한 반증이다.</a:t>
+              <a:t>B0의 사후 이득 +0.015는 전부 2004 니가타(양성 8/음성 2, 16쌍)에서 0.8750 -&gt; 1.0000 한 곳에서 나온다. 나머지 네 지진은 사전과 사후의 AUC가 완전히 같다. 즉 지금 LS 순위 성능은 엑셀 두 열(LS_prior(평균), area_km2)이 거의 다 만들고 있다.</a:t>
             </a:r>
             <a:endParaRPr lang="en-US" dirty="0"/>
           </a:p>
@@ -14566,7 +14566,7 @@
                 <a:ea typeface="Calibri" pitchFamily="34" charset="-122"/>
                 <a:cs typeface="Calibri" pitchFamily="34" charset="-120"/>
               </a:rPr>
-              <a:t>병목은 prior가 아니라 우도다</a:t>
+              <a:t>병목은 사전이 아니라 우도다</a:t>
             </a:r>
             <a:endParaRPr lang="en-US" sz="1150" dirty="0"/>
           </a:p>
@@ -14608,7 +14608,7 @@
                 <a:ea typeface="Calibri" pitchFamily="34" charset="-122"/>
                 <a:cs typeface="Calibri" pitchFamily="34" charset="-120"/>
               </a:rPr>
-              <a:t>A0은 prior 0.7969 → 사후 0.7222로 깎인다. 어느 피해 채널이 LS 순위를 망치는지 채널별로 끄고 재본다.</a:t>
+              <a:t>B0은 음성 충분한 세 지진에서 사전=사후(0.8177)이고 A0은 사전을 0.075 깎는다. 어느 피해 채널이 LS 순위를 망치는지 채널별로 끄고 재본다.</a:t>
             </a:r>
             <a:endParaRPr lang="en-US" sz="1050" dirty="0"/>
           </a:p>
@@ -32541,7 +32541,7 @@
                 <a:ea typeface="Cambria" pitchFamily="34" charset="-122"/>
                 <a:cs typeface="Cambria" pitchFamily="34" charset="-120"/>
               </a:rPr>
-              <a:t>왜 그런가 ① 면적 항이 산지 정보를 이미 담고 있다</a:t>
+              <a:t>왜 그런가 ① 성능은 사전확률이 거의 다 만든다</a:t>
             </a:r>
             <a:endParaRPr lang="en-US" sz="3400" dirty="0"/>
           </a:p>
@@ -32580,7 +32580,7 @@
                 <a:ea typeface="Calibri" pitchFamily="34" charset="-122"/>
                 <a:cs typeface="Calibri" pitchFamily="34" charset="-120"/>
               </a:rPr>
-              <a:t>회귀를 거치지 않은 prior 점수만으로 잰 가중 AUC</a:t>
+              <a:t>왼쪽은 회귀를 거치지 않은 사전 점수, 오른쪽은 그 사전이 회귀·우도를 지나며 얼마나 나아지는지</a:t>
             </a:r>
             <a:endParaRPr lang="en-US" sz="1400" dirty="0"/>
           </a:p>
@@ -32593,8 +32593,8 @@
           <p:nvPr/>
         </p:nvGraphicFramePr>
         <p:xfrm>
-          <a:off x="640080" y="1609344"/>
-          <a:ext cx="6858000" cy="3200400"/>
+          <a:off x="640080" y="1572768"/>
+          <a:ext cx="5806440" cy="3063240"/>
         </p:xfrm>
         <a:graphic xmlns:a="http://schemas.openxmlformats.org/drawingml/2006/main">
           <a:graphicData uri="http://schemas.openxmlformats.org/drawingml/2006/chart">
@@ -32604,30 +32604,45 @@
       </p:graphicFrame>
       <p:sp>
         <p:nvSpPr>
-          <p:cNvPr id="5" name="Shape 2"/>
-          <p:cNvSpPr/>
+          <p:cNvPr id="5" name="Text 2"/>
+          <p:cNvSpPr txBox="1"/>
           <p:nvPr/>
         </p:nvSpPr>
         <p:spPr>
           <a:xfrm>
-            <a:off x="7772400" y="1609344"/>
-            <a:ext cx="3794760" cy="3200400"/>
+            <a:off x="640080" y="4700016"/>
+            <a:ext cx="5806440" cy="566928"/>
           </a:xfrm>
-          <a:prstGeom prst="roundRect">
-            <a:avLst>
-              <a:gd name="adj" fmla="val 2571"/>
-            </a:avLst>
+          <a:prstGeom prst="rect">
+            <a:avLst/>
           </a:prstGeom>
-          <a:solidFill>
-            <a:srgbClr val="F2EFE6"/>
-          </a:solidFill>
-          <a:ln w="6350">
-            <a:solidFill>
-              <a:srgbClr val="DCD6CC"/>
-            </a:solidFill>
-            <a:prstDash val="solid"/>
-          </a:ln>
+          <a:noFill/>
+          <a:ln/>
         </p:spPr>
+        <p:txBody>
+          <a:bodyPr wrap="square" lIns="0" tIns="0" rIns="0" bIns="0" rtlCol="0" anchor="ctr"/>
+          <a:lstStyle/>
+          <a:p>
+            <a:pPr indent="0" marL="0">
+              <a:lnSpc>
+                <a:spcPts val="1400"/>
+              </a:lnSpc>
+              <a:buNone/>
+            </a:pPr>
+            <a:r>
+              <a:rPr lang="en-US" sz="1050" dirty="0">
+                <a:solidFill>
+                  <a:srgbClr val="7A6A63"/>
+                </a:solidFill>
+                <a:latin typeface="Calibri" pitchFamily="34" charset="0"/>
+                <a:ea typeface="Calibri" pitchFamily="34" charset="-122"/>
+                <a:cs typeface="Calibri" pitchFamily="34" charset="-120"/>
+              </a:rPr>
+              <a:t>LQ에서는 면적 단독이 0.5470으로 우연 수준인데도 π̄와 더하면 0.7154 → 0.7698로 오른다. 면적이 라벨을 직접 켜는 게 아니라 λ = π̄ × k 가 작동한다는 뜻이다.</a:t>
+            </a:r>
+            <a:endParaRPr lang="en-US" sz="1050" dirty="0"/>
+          </a:p>
+        </p:txBody>
       </p:sp>
       <p:sp>
         <p:nvSpPr>
@@ -32637,8 +32652,8 @@
         </p:nvSpPr>
         <p:spPr>
           <a:xfrm>
-            <a:off x="8046720" y="1810512"/>
-            <a:ext cx="3291840" cy="274320"/>
+            <a:off x="6629400" y="1572768"/>
+            <a:ext cx="4937760" cy="274320"/>
           </a:xfrm>
           <a:prstGeom prst="rect">
             <a:avLst/>
@@ -32654,30 +32669,2367 @@
               <a:buNone/>
             </a:pPr>
             <a:r>
-              <a:rPr lang="en-US" sz="1250" b="1" dirty="0">
+              <a:rPr lang="en-US" sz="1200" b="1" dirty="0">
                 <a:solidFill>
                   <a:srgbClr val="2E2422"/>
                 </a:solidFill>
-                <a:latin typeface="Cambria" pitchFamily="34" charset="0"/>
-                <a:ea typeface="Cambria" pitchFamily="34" charset="-122"/>
-                <a:cs typeface="Cambria" pitchFamily="34" charset="-120"/>
+                <a:latin typeface="Calibri" pitchFamily="34" charset="0"/>
+                <a:ea typeface="Calibri" pitchFamily="34" charset="-122"/>
+                <a:cs typeface="Calibri" pitchFamily="34" charset="-120"/>
               </a:rPr>
-              <a:t>두 가지가 보인다</a:t>
+              <a:t>LS 사전 → 사후 (가중 AUC)</a:t>
             </a:r>
-            <a:endParaRPr lang="en-US" sz="1250" dirty="0"/>
+            <a:endParaRPr lang="en-US" sz="1200" dirty="0"/>
           </a:p>
         </p:txBody>
       </p:sp>
+      <p:graphicFrame>
+        <p:nvGraphicFramePr>
+          <p:cNvPr id="10" name="Table 0"/>
+          <p:cNvGraphicFramePr>
+            <a:graphicFrameLocks noGrp="1"/>
+          </p:cNvGraphicFramePr>
+          <p:nvPr>
+            <p:extLst>
+              <p:ext uri="{D42A27DB-BD31-4B8C-83A1-F6EECF244321}">
+                <p14:modId xmlns:p14="http://schemas.microsoft.com/office/powerpoint/2010/main" val="1579011935"/>
+              </p:ext>
+            </p:extLst>
+          </p:nvPr>
+        </p:nvGraphicFramePr>
+        <p:xfrm>
+          <a:off x="6629400" y="1938528"/>
+          <a:ext cx="4937760" cy="914400"/>
+        </p:xfrm>
+        <a:graphic>
+          <a:graphicData uri="http://schemas.openxmlformats.org/drawingml/2006/table">
+            <a:tbl>
+              <a:tblPr/>
+              <a:tblGrid>
+                <a:gridCol w="731520"/>
+                <a:gridCol w="1078992"/>
+                <a:gridCol w="1078992"/>
+                <a:gridCol w="1024128"/>
+                <a:gridCol w="1024128"/>
+              </a:tblGrid>
+              <a:tr h="306324">
+                <a:tc>
+                  <a:txBody>
+                    <a:bodyPr/>
+                    <a:lstStyle/>
+                    <a:p>
+                      <a:pPr algn="ctr" indent="0" marL="0">
+                        <a:buNone/>
+                      </a:pPr>
+                      <a:r>
+                        <a:rPr lang="en-US" sz="1050" b="1" dirty="0">
+                          <a:solidFill>
+                            <a:srgbClr val="FFFFFF"/>
+                          </a:solidFill>
+                          <a:latin typeface="Calibri" pitchFamily="34" charset="0"/>
+                          <a:ea typeface="Calibri" pitchFamily="34" charset="-122"/>
+                          <a:cs typeface="Calibri" pitchFamily="34" charset="-120"/>
+                        </a:rPr>
+                        <a:t>조건</a:t>
+                      </a:r>
+                      <a:endParaRPr lang="en-US" sz="1050" dirty="0">
+                        <a:latin typeface="Calibri" charset="0"/>
+                        <a:ea typeface="Calibri" charset="0"/>
+                        <a:cs typeface="Calibri" charset="0"/>
+                      </a:endParaRPr>
+                    </a:p>
+                  </a:txBody>
+                  <a:tcPr marL="91440" marR="91440" marT="45720" marB="45720" anchor="ctr">
+                    <a:lnL w="6350" cap="flat" cmpd="sng" algn="ctr">
+                      <a:solidFill>
+                        <a:srgbClr val="DCD6CC"/>
+                      </a:solidFill>
+                      <a:prstDash val="solid"/>
+                      <a:round/>
+                      <a:headEnd type="none" w="med" len="med"/>
+                      <a:tailEnd type="none" w="med" len="med"/>
+                    </a:lnL>
+                    <a:lnR w="6350" cap="flat" cmpd="sng" algn="ctr">
+                      <a:solidFill>
+                        <a:srgbClr val="DCD6CC"/>
+                      </a:solidFill>
+                      <a:prstDash val="solid"/>
+                      <a:round/>
+                      <a:headEnd type="none" w="med" len="med"/>
+                      <a:tailEnd type="none" w="med" len="med"/>
+                    </a:lnR>
+                    <a:lnT w="6350" cap="flat" cmpd="sng" algn="ctr">
+                      <a:solidFill>
+                        <a:srgbClr val="DCD6CC"/>
+                      </a:solidFill>
+                      <a:prstDash val="solid"/>
+                      <a:round/>
+                      <a:headEnd type="none" w="med" len="med"/>
+                      <a:tailEnd type="none" w="med" len="med"/>
+                    </a:lnT>
+                    <a:lnB w="6350" cap="flat" cmpd="sng" algn="ctr">
+                      <a:solidFill>
+                        <a:srgbClr val="DCD6CC"/>
+                      </a:solidFill>
+                      <a:prstDash val="solid"/>
+                      <a:round/>
+                      <a:headEnd type="none" w="med" len="med"/>
+                      <a:tailEnd type="none" w="med" len="med"/>
+                    </a:lnB>
+                    <a:solidFill>
+                      <a:srgbClr val="2E2422"/>
+                    </a:solidFill>
+                  </a:tcPr>
+                </a:tc>
+                <a:tc>
+                  <a:txBody>
+                    <a:bodyPr/>
+                    <a:lstStyle/>
+                    <a:p>
+                      <a:pPr algn="ctr" indent="0" marL="0">
+                        <a:buNone/>
+                      </a:pPr>
+                      <a:r>
+                        <a:rPr lang="en-US" sz="1050" b="1" dirty="0">
+                          <a:solidFill>
+                            <a:srgbClr val="FFFFFF"/>
+                          </a:solidFill>
+                          <a:latin typeface="Calibri" pitchFamily="34" charset="0"/>
+                          <a:ea typeface="Calibri" pitchFamily="34" charset="-122"/>
+                          <a:cs typeface="Calibri" pitchFamily="34" charset="-120"/>
+                        </a:rPr>
+                        <a:t>사전 (83)</a:t>
+                      </a:r>
+                      <a:endParaRPr lang="en-US" sz="1050" dirty="0">
+                        <a:latin typeface="Calibri" charset="0"/>
+                        <a:ea typeface="Calibri" charset="0"/>
+                        <a:cs typeface="Calibri" charset="0"/>
+                      </a:endParaRPr>
+                    </a:p>
+                  </a:txBody>
+                  <a:tcPr marL="91440" marR="91440" marT="45720" marB="45720" anchor="ctr">
+                    <a:lnL w="6350" cap="flat" cmpd="sng" algn="ctr">
+                      <a:solidFill>
+                        <a:srgbClr val="DCD6CC"/>
+                      </a:solidFill>
+                      <a:prstDash val="solid"/>
+                      <a:round/>
+                      <a:headEnd type="none" w="med" len="med"/>
+                      <a:tailEnd type="none" w="med" len="med"/>
+                    </a:lnL>
+                    <a:lnR w="6350" cap="flat" cmpd="sng" algn="ctr">
+                      <a:solidFill>
+                        <a:srgbClr val="DCD6CC"/>
+                      </a:solidFill>
+                      <a:prstDash val="solid"/>
+                      <a:round/>
+                      <a:headEnd type="none" w="med" len="med"/>
+                      <a:tailEnd type="none" w="med" len="med"/>
+                    </a:lnR>
+                    <a:lnT w="6350" cap="flat" cmpd="sng" algn="ctr">
+                      <a:solidFill>
+                        <a:srgbClr val="DCD6CC"/>
+                      </a:solidFill>
+                      <a:prstDash val="solid"/>
+                      <a:round/>
+                      <a:headEnd type="none" w="med" len="med"/>
+                      <a:tailEnd type="none" w="med" len="med"/>
+                    </a:lnT>
+                    <a:lnB w="6350" cap="flat" cmpd="sng" algn="ctr">
+                      <a:solidFill>
+                        <a:srgbClr val="DCD6CC"/>
+                      </a:solidFill>
+                      <a:prstDash val="solid"/>
+                      <a:round/>
+                      <a:headEnd type="none" w="med" len="med"/>
+                      <a:tailEnd type="none" w="med" len="med"/>
+                    </a:lnB>
+                    <a:solidFill>
+                      <a:srgbClr val="2E2422"/>
+                    </a:solidFill>
+                  </a:tcPr>
+                </a:tc>
+                <a:tc>
+                  <a:txBody>
+                    <a:bodyPr/>
+                    <a:lstStyle/>
+                    <a:p>
+                      <a:pPr algn="ctr" indent="0" marL="0">
+                        <a:buNone/>
+                      </a:pPr>
+                      <a:r>
+                        <a:rPr lang="en-US" sz="1050" b="1" dirty="0">
+                          <a:solidFill>
+                            <a:srgbClr val="FFFFFF"/>
+                          </a:solidFill>
+                          <a:latin typeface="Calibri" pitchFamily="34" charset="0"/>
+                          <a:ea typeface="Calibri" pitchFamily="34" charset="-122"/>
+                          <a:cs typeface="Calibri" pitchFamily="34" charset="-120"/>
+                        </a:rPr>
+                        <a:t>사후 (83)</a:t>
+                      </a:r>
+                      <a:endParaRPr lang="en-US" sz="1050" dirty="0">
+                        <a:latin typeface="Calibri" charset="0"/>
+                        <a:ea typeface="Calibri" charset="0"/>
+                        <a:cs typeface="Calibri" charset="0"/>
+                      </a:endParaRPr>
+                    </a:p>
+                  </a:txBody>
+                  <a:tcPr marL="91440" marR="91440" marT="45720" marB="45720" anchor="ctr">
+                    <a:lnL w="6350" cap="flat" cmpd="sng" algn="ctr">
+                      <a:solidFill>
+                        <a:srgbClr val="DCD6CC"/>
+                      </a:solidFill>
+                      <a:prstDash val="solid"/>
+                      <a:round/>
+                      <a:headEnd type="none" w="med" len="med"/>
+                      <a:tailEnd type="none" w="med" len="med"/>
+                    </a:lnL>
+                    <a:lnR w="6350" cap="flat" cmpd="sng" algn="ctr">
+                      <a:solidFill>
+                        <a:srgbClr val="DCD6CC"/>
+                      </a:solidFill>
+                      <a:prstDash val="solid"/>
+                      <a:round/>
+                      <a:headEnd type="none" w="med" len="med"/>
+                      <a:tailEnd type="none" w="med" len="med"/>
+                    </a:lnR>
+                    <a:lnT w="6350" cap="flat" cmpd="sng" algn="ctr">
+                      <a:solidFill>
+                        <a:srgbClr val="DCD6CC"/>
+                      </a:solidFill>
+                      <a:prstDash val="solid"/>
+                      <a:round/>
+                      <a:headEnd type="none" w="med" len="med"/>
+                      <a:tailEnd type="none" w="med" len="med"/>
+                    </a:lnT>
+                    <a:lnB w="6350" cap="flat" cmpd="sng" algn="ctr">
+                      <a:solidFill>
+                        <a:srgbClr val="DCD6CC"/>
+                      </a:solidFill>
+                      <a:prstDash val="solid"/>
+                      <a:round/>
+                      <a:headEnd type="none" w="med" len="med"/>
+                      <a:tailEnd type="none" w="med" len="med"/>
+                    </a:lnB>
+                    <a:solidFill>
+                      <a:srgbClr val="2E2422"/>
+                    </a:solidFill>
+                  </a:tcPr>
+                </a:tc>
+                <a:tc>
+                  <a:txBody>
+                    <a:bodyPr/>
+                    <a:lstStyle/>
+                    <a:p>
+                      <a:pPr algn="ctr" indent="0" marL="0">
+                        <a:buNone/>
+                      </a:pPr>
+                      <a:r>
+                        <a:rPr lang="en-US" sz="1050" b="1" dirty="0">
+                          <a:solidFill>
+                            <a:srgbClr val="FFFFFF"/>
+                          </a:solidFill>
+                          <a:latin typeface="Calibri" pitchFamily="34" charset="0"/>
+                          <a:ea typeface="Calibri" pitchFamily="34" charset="-122"/>
+                          <a:cs typeface="Calibri" pitchFamily="34" charset="-120"/>
+                        </a:rPr>
+                        <a:t>사전 (66)</a:t>
+                      </a:r>
+                      <a:endParaRPr lang="en-US" sz="1050" dirty="0">
+                        <a:latin typeface="Calibri" charset="0"/>
+                        <a:ea typeface="Calibri" charset="0"/>
+                        <a:cs typeface="Calibri" charset="0"/>
+                      </a:endParaRPr>
+                    </a:p>
+                  </a:txBody>
+                  <a:tcPr marL="91440" marR="91440" marT="45720" marB="45720" anchor="ctr">
+                    <a:lnL w="6350" cap="flat" cmpd="sng" algn="ctr">
+                      <a:solidFill>
+                        <a:srgbClr val="DCD6CC"/>
+                      </a:solidFill>
+                      <a:prstDash val="solid"/>
+                      <a:round/>
+                      <a:headEnd type="none" w="med" len="med"/>
+                      <a:tailEnd type="none" w="med" len="med"/>
+                    </a:lnL>
+                    <a:lnR w="6350" cap="flat" cmpd="sng" algn="ctr">
+                      <a:solidFill>
+                        <a:srgbClr val="DCD6CC"/>
+                      </a:solidFill>
+                      <a:prstDash val="solid"/>
+                      <a:round/>
+                      <a:headEnd type="none" w="med" len="med"/>
+                      <a:tailEnd type="none" w="med" len="med"/>
+                    </a:lnR>
+                    <a:lnT w="6350" cap="flat" cmpd="sng" algn="ctr">
+                      <a:solidFill>
+                        <a:srgbClr val="DCD6CC"/>
+                      </a:solidFill>
+                      <a:prstDash val="solid"/>
+                      <a:round/>
+                      <a:headEnd type="none" w="med" len="med"/>
+                      <a:tailEnd type="none" w="med" len="med"/>
+                    </a:lnT>
+                    <a:lnB w="6350" cap="flat" cmpd="sng" algn="ctr">
+                      <a:solidFill>
+                        <a:srgbClr val="DCD6CC"/>
+                      </a:solidFill>
+                      <a:prstDash val="solid"/>
+                      <a:round/>
+                      <a:headEnd type="none" w="med" len="med"/>
+                      <a:tailEnd type="none" w="med" len="med"/>
+                    </a:lnB>
+                    <a:solidFill>
+                      <a:srgbClr val="2E2422"/>
+                    </a:solidFill>
+                  </a:tcPr>
+                </a:tc>
+                <a:tc>
+                  <a:txBody>
+                    <a:bodyPr/>
+                    <a:lstStyle/>
+                    <a:p>
+                      <a:pPr algn="ctr" indent="0" marL="0">
+                        <a:buNone/>
+                      </a:pPr>
+                      <a:r>
+                        <a:rPr lang="en-US" sz="1050" b="1" dirty="0">
+                          <a:solidFill>
+                            <a:srgbClr val="FFFFFF"/>
+                          </a:solidFill>
+                          <a:latin typeface="Calibri" pitchFamily="34" charset="0"/>
+                          <a:ea typeface="Calibri" pitchFamily="34" charset="-122"/>
+                          <a:cs typeface="Calibri" pitchFamily="34" charset="-120"/>
+                        </a:rPr>
+                        <a:t>사후 (66)</a:t>
+                      </a:r>
+                      <a:endParaRPr lang="en-US" sz="1050" dirty="0">
+                        <a:latin typeface="Calibri" charset="0"/>
+                        <a:ea typeface="Calibri" charset="0"/>
+                        <a:cs typeface="Calibri" charset="0"/>
+                      </a:endParaRPr>
+                    </a:p>
+                  </a:txBody>
+                  <a:tcPr marL="91440" marR="91440" marT="45720" marB="45720" anchor="ctr">
+                    <a:lnL w="6350" cap="flat" cmpd="sng" algn="ctr">
+                      <a:solidFill>
+                        <a:srgbClr val="DCD6CC"/>
+                      </a:solidFill>
+                      <a:prstDash val="solid"/>
+                      <a:round/>
+                      <a:headEnd type="none" w="med" len="med"/>
+                      <a:tailEnd type="none" w="med" len="med"/>
+                    </a:lnL>
+                    <a:lnR w="6350" cap="flat" cmpd="sng" algn="ctr">
+                      <a:solidFill>
+                        <a:srgbClr val="DCD6CC"/>
+                      </a:solidFill>
+                      <a:prstDash val="solid"/>
+                      <a:round/>
+                      <a:headEnd type="none" w="med" len="med"/>
+                      <a:tailEnd type="none" w="med" len="med"/>
+                    </a:lnR>
+                    <a:lnT w="6350" cap="flat" cmpd="sng" algn="ctr">
+                      <a:solidFill>
+                        <a:srgbClr val="DCD6CC"/>
+                      </a:solidFill>
+                      <a:prstDash val="solid"/>
+                      <a:round/>
+                      <a:headEnd type="none" w="med" len="med"/>
+                      <a:tailEnd type="none" w="med" len="med"/>
+                    </a:lnT>
+                    <a:lnB w="6350" cap="flat" cmpd="sng" algn="ctr">
+                      <a:solidFill>
+                        <a:srgbClr val="DCD6CC"/>
+                      </a:solidFill>
+                      <a:prstDash val="solid"/>
+                      <a:round/>
+                      <a:headEnd type="none" w="med" len="med"/>
+                      <a:tailEnd type="none" w="med" len="med"/>
+                    </a:lnB>
+                    <a:solidFill>
+                      <a:srgbClr val="2E2422"/>
+                    </a:solidFill>
+                  </a:tcPr>
+                </a:tc>
+              </a:tr>
+              <a:tr h="306324">
+                <a:tc>
+                  <a:txBody>
+                    <a:bodyPr/>
+                    <a:lstStyle/>
+                    <a:p>
+                      <a:pPr algn="ctr" indent="0" marL="0">
+                        <a:buNone/>
+                      </a:pPr>
+                      <a:r>
+                        <a:rPr lang="en-US" sz="1050" dirty="0">
+                          <a:solidFill>
+                            <a:srgbClr val="2E2422"/>
+                          </a:solidFill>
+                          <a:latin typeface="Calibri" pitchFamily="34" charset="0"/>
+                          <a:ea typeface="Calibri" pitchFamily="34" charset="-122"/>
+                          <a:cs typeface="Calibri" pitchFamily="34" charset="-120"/>
+                        </a:rPr>
+                        <a:t>A0</a:t>
+                      </a:r>
+                      <a:endParaRPr lang="en-US" sz="1050" dirty="0">
+                        <a:latin typeface="Calibri" charset="0"/>
+                        <a:ea typeface="Calibri" charset="0"/>
+                        <a:cs typeface="Calibri" charset="0"/>
+                      </a:endParaRPr>
+                    </a:p>
+                  </a:txBody>
+                  <a:tcPr marL="91440" marR="91440" marT="45720" marB="45720" anchor="ctr">
+                    <a:lnL w="6350" cap="flat" cmpd="sng" algn="ctr">
+                      <a:solidFill>
+                        <a:srgbClr val="DCD6CC"/>
+                      </a:solidFill>
+                      <a:prstDash val="solid"/>
+                      <a:round/>
+                      <a:headEnd type="none" w="med" len="med"/>
+                      <a:tailEnd type="none" w="med" len="med"/>
+                    </a:lnL>
+                    <a:lnR w="6350" cap="flat" cmpd="sng" algn="ctr">
+                      <a:solidFill>
+                        <a:srgbClr val="DCD6CC"/>
+                      </a:solidFill>
+                      <a:prstDash val="solid"/>
+                      <a:round/>
+                      <a:headEnd type="none" w="med" len="med"/>
+                      <a:tailEnd type="none" w="med" len="med"/>
+                    </a:lnR>
+                    <a:lnT w="6350" cap="flat" cmpd="sng" algn="ctr">
+                      <a:solidFill>
+                        <a:srgbClr val="DCD6CC"/>
+                      </a:solidFill>
+                      <a:prstDash val="solid"/>
+                      <a:round/>
+                      <a:headEnd type="none" w="med" len="med"/>
+                      <a:tailEnd type="none" w="med" len="med"/>
+                    </a:lnT>
+                    <a:lnB w="6350" cap="flat" cmpd="sng" algn="ctr">
+                      <a:solidFill>
+                        <a:srgbClr val="DCD6CC"/>
+                      </a:solidFill>
+                      <a:prstDash val="solid"/>
+                      <a:round/>
+                      <a:headEnd type="none" w="med" len="med"/>
+                      <a:tailEnd type="none" w="med" len="med"/>
+                    </a:lnB>
+                  </a:tcPr>
+                </a:tc>
+                <a:tc>
+                  <a:txBody>
+                    <a:bodyPr/>
+                    <a:lstStyle/>
+                    <a:p>
+                      <a:pPr algn="ctr" indent="0" marL="0">
+                        <a:buNone/>
+                      </a:pPr>
+                      <a:r>
+                        <a:rPr lang="en-US" sz="1050" dirty="0">
+                          <a:solidFill>
+                            <a:srgbClr val="2E2422"/>
+                          </a:solidFill>
+                          <a:latin typeface="Calibri" pitchFamily="34" charset="0"/>
+                          <a:ea typeface="Calibri" pitchFamily="34" charset="-122"/>
+                          <a:cs typeface="Calibri" pitchFamily="34" charset="-120"/>
+                        </a:rPr>
+                        <a:t>0.7969</a:t>
+                      </a:r>
+                      <a:endParaRPr lang="en-US" sz="1050" dirty="0">
+                        <a:latin typeface="Calibri" charset="0"/>
+                        <a:ea typeface="Calibri" charset="0"/>
+                        <a:cs typeface="Calibri" charset="0"/>
+                      </a:endParaRPr>
+                    </a:p>
+                  </a:txBody>
+                  <a:tcPr marL="91440" marR="91440" marT="45720" marB="45720" anchor="ctr">
+                    <a:lnL w="6350" cap="flat" cmpd="sng" algn="ctr">
+                      <a:solidFill>
+                        <a:srgbClr val="DCD6CC"/>
+                      </a:solidFill>
+                      <a:prstDash val="solid"/>
+                      <a:round/>
+                      <a:headEnd type="none" w="med" len="med"/>
+                      <a:tailEnd type="none" w="med" len="med"/>
+                    </a:lnL>
+                    <a:lnR w="6350" cap="flat" cmpd="sng" algn="ctr">
+                      <a:solidFill>
+                        <a:srgbClr val="DCD6CC"/>
+                      </a:solidFill>
+                      <a:prstDash val="solid"/>
+                      <a:round/>
+                      <a:headEnd type="none" w="med" len="med"/>
+                      <a:tailEnd type="none" w="med" len="med"/>
+                    </a:lnR>
+                    <a:lnT w="6350" cap="flat" cmpd="sng" algn="ctr">
+                      <a:solidFill>
+                        <a:srgbClr val="DCD6CC"/>
+                      </a:solidFill>
+                      <a:prstDash val="solid"/>
+                      <a:round/>
+                      <a:headEnd type="none" w="med" len="med"/>
+                      <a:tailEnd type="none" w="med" len="med"/>
+                    </a:lnT>
+                    <a:lnB w="6350" cap="flat" cmpd="sng" algn="ctr">
+                      <a:solidFill>
+                        <a:srgbClr val="DCD6CC"/>
+                      </a:solidFill>
+                      <a:prstDash val="solid"/>
+                      <a:round/>
+                      <a:headEnd type="none" w="med" len="med"/>
+                      <a:tailEnd type="none" w="med" len="med"/>
+                    </a:lnB>
+                  </a:tcPr>
+                </a:tc>
+                <a:tc>
+                  <a:txBody>
+                    <a:bodyPr/>
+                    <a:lstStyle/>
+                    <a:p>
+                      <a:pPr algn="ctr" indent="0" marL="0">
+                        <a:buNone/>
+                      </a:pPr>
+                      <a:r>
+                        <a:rPr lang="en-US" sz="1050" b="1" dirty="0">
+                          <a:solidFill>
+                            <a:srgbClr val="B85042"/>
+                          </a:solidFill>
+                          <a:latin typeface="Calibri" pitchFamily="34" charset="0"/>
+                          <a:ea typeface="Calibri" pitchFamily="34" charset="-122"/>
+                          <a:cs typeface="Calibri" pitchFamily="34" charset="-120"/>
+                        </a:rPr>
+                        <a:t>0.7222</a:t>
+                      </a:r>
+                      <a:endParaRPr lang="en-US" sz="1050" dirty="0">
+                        <a:latin typeface="Calibri" charset="0"/>
+                        <a:ea typeface="Calibri" charset="0"/>
+                        <a:cs typeface="Calibri" charset="0"/>
+                      </a:endParaRPr>
+                    </a:p>
+                  </a:txBody>
+                  <a:tcPr marL="91440" marR="91440" marT="45720" marB="45720" anchor="ctr">
+                    <a:lnL w="6350" cap="flat" cmpd="sng" algn="ctr">
+                      <a:solidFill>
+                        <a:srgbClr val="DCD6CC"/>
+                      </a:solidFill>
+                      <a:prstDash val="solid"/>
+                      <a:round/>
+                      <a:headEnd type="none" w="med" len="med"/>
+                      <a:tailEnd type="none" w="med" len="med"/>
+                    </a:lnL>
+                    <a:lnR w="6350" cap="flat" cmpd="sng" algn="ctr">
+                      <a:solidFill>
+                        <a:srgbClr val="DCD6CC"/>
+                      </a:solidFill>
+                      <a:prstDash val="solid"/>
+                      <a:round/>
+                      <a:headEnd type="none" w="med" len="med"/>
+                      <a:tailEnd type="none" w="med" len="med"/>
+                    </a:lnR>
+                    <a:lnT w="6350" cap="flat" cmpd="sng" algn="ctr">
+                      <a:solidFill>
+                        <a:srgbClr val="DCD6CC"/>
+                      </a:solidFill>
+                      <a:prstDash val="solid"/>
+                      <a:round/>
+                      <a:headEnd type="none" w="med" len="med"/>
+                      <a:tailEnd type="none" w="med" len="med"/>
+                    </a:lnT>
+                    <a:lnB w="6350" cap="flat" cmpd="sng" algn="ctr">
+                      <a:solidFill>
+                        <a:srgbClr val="DCD6CC"/>
+                      </a:solidFill>
+                      <a:prstDash val="solid"/>
+                      <a:round/>
+                      <a:headEnd type="none" w="med" len="med"/>
+                      <a:tailEnd type="none" w="med" len="med"/>
+                    </a:lnB>
+                  </a:tcPr>
+                </a:tc>
+                <a:tc>
+                  <a:txBody>
+                    <a:bodyPr/>
+                    <a:lstStyle/>
+                    <a:p>
+                      <a:pPr algn="ctr" indent="0" marL="0">
+                        <a:buNone/>
+                      </a:pPr>
+                      <a:r>
+                        <a:rPr lang="en-US" sz="1050" dirty="0">
+                          <a:solidFill>
+                            <a:srgbClr val="2E2422"/>
+                          </a:solidFill>
+                          <a:latin typeface="Calibri" pitchFamily="34" charset="0"/>
+                          <a:ea typeface="Calibri" pitchFamily="34" charset="-122"/>
+                          <a:cs typeface="Calibri" pitchFamily="34" charset="-120"/>
+                        </a:rPr>
+                        <a:t>0.7635</a:t>
+                      </a:r>
+                      <a:endParaRPr lang="en-US" sz="1050" dirty="0">
+                        <a:latin typeface="Calibri" charset="0"/>
+                        <a:ea typeface="Calibri" charset="0"/>
+                        <a:cs typeface="Calibri" charset="0"/>
+                      </a:endParaRPr>
+                    </a:p>
+                  </a:txBody>
+                  <a:tcPr marL="91440" marR="91440" marT="45720" marB="45720" anchor="ctr">
+                    <a:lnL w="6350" cap="flat" cmpd="sng" algn="ctr">
+                      <a:solidFill>
+                        <a:srgbClr val="DCD6CC"/>
+                      </a:solidFill>
+                      <a:prstDash val="solid"/>
+                      <a:round/>
+                      <a:headEnd type="none" w="med" len="med"/>
+                      <a:tailEnd type="none" w="med" len="med"/>
+                    </a:lnL>
+                    <a:lnR w="6350" cap="flat" cmpd="sng" algn="ctr">
+                      <a:solidFill>
+                        <a:srgbClr val="DCD6CC"/>
+                      </a:solidFill>
+                      <a:prstDash val="solid"/>
+                      <a:round/>
+                      <a:headEnd type="none" w="med" len="med"/>
+                      <a:tailEnd type="none" w="med" len="med"/>
+                    </a:lnR>
+                    <a:lnT w="6350" cap="flat" cmpd="sng" algn="ctr">
+                      <a:solidFill>
+                        <a:srgbClr val="DCD6CC"/>
+                      </a:solidFill>
+                      <a:prstDash val="solid"/>
+                      <a:round/>
+                      <a:headEnd type="none" w="med" len="med"/>
+                      <a:tailEnd type="none" w="med" len="med"/>
+                    </a:lnT>
+                    <a:lnB w="6350" cap="flat" cmpd="sng" algn="ctr">
+                      <a:solidFill>
+                        <a:srgbClr val="DCD6CC"/>
+                      </a:solidFill>
+                      <a:prstDash val="solid"/>
+                      <a:round/>
+                      <a:headEnd type="none" w="med" len="med"/>
+                      <a:tailEnd type="none" w="med" len="med"/>
+                    </a:lnB>
+                  </a:tcPr>
+                </a:tc>
+                <a:tc>
+                  <a:txBody>
+                    <a:bodyPr/>
+                    <a:lstStyle/>
+                    <a:p>
+                      <a:pPr algn="ctr" indent="0" marL="0">
+                        <a:buNone/>
+                      </a:pPr>
+                      <a:r>
+                        <a:rPr lang="en-US" sz="1050" dirty="0">
+                          <a:solidFill>
+                            <a:srgbClr val="B85042"/>
+                          </a:solidFill>
+                          <a:latin typeface="Calibri" pitchFamily="34" charset="0"/>
+                          <a:ea typeface="Calibri" pitchFamily="34" charset="-122"/>
+                          <a:cs typeface="Calibri" pitchFamily="34" charset="-120"/>
+                        </a:rPr>
+                        <a:t>0.7286</a:t>
+                      </a:r>
+                      <a:endParaRPr lang="en-US" sz="1050" dirty="0">
+                        <a:latin typeface="Calibri" charset="0"/>
+                        <a:ea typeface="Calibri" charset="0"/>
+                        <a:cs typeface="Calibri" charset="0"/>
+                      </a:endParaRPr>
+                    </a:p>
+                  </a:txBody>
+                  <a:tcPr marL="91440" marR="91440" marT="45720" marB="45720" anchor="ctr">
+                    <a:lnL w="6350" cap="flat" cmpd="sng" algn="ctr">
+                      <a:solidFill>
+                        <a:srgbClr val="DCD6CC"/>
+                      </a:solidFill>
+                      <a:prstDash val="solid"/>
+                      <a:round/>
+                      <a:headEnd type="none" w="med" len="med"/>
+                      <a:tailEnd type="none" w="med" len="med"/>
+                    </a:lnL>
+                    <a:lnR w="6350" cap="flat" cmpd="sng" algn="ctr">
+                      <a:solidFill>
+                        <a:srgbClr val="DCD6CC"/>
+                      </a:solidFill>
+                      <a:prstDash val="solid"/>
+                      <a:round/>
+                      <a:headEnd type="none" w="med" len="med"/>
+                      <a:tailEnd type="none" w="med" len="med"/>
+                    </a:lnR>
+                    <a:lnT w="6350" cap="flat" cmpd="sng" algn="ctr">
+                      <a:solidFill>
+                        <a:srgbClr val="DCD6CC"/>
+                      </a:solidFill>
+                      <a:prstDash val="solid"/>
+                      <a:round/>
+                      <a:headEnd type="none" w="med" len="med"/>
+                      <a:tailEnd type="none" w="med" len="med"/>
+                    </a:lnT>
+                    <a:lnB w="6350" cap="flat" cmpd="sng" algn="ctr">
+                      <a:solidFill>
+                        <a:srgbClr val="DCD6CC"/>
+                      </a:solidFill>
+                      <a:prstDash val="solid"/>
+                      <a:round/>
+                      <a:headEnd type="none" w="med" len="med"/>
+                      <a:tailEnd type="none" w="med" len="med"/>
+                    </a:lnB>
+                  </a:tcPr>
+                </a:tc>
+              </a:tr>
+              <a:tr h="306324">
+                <a:tc>
+                  <a:txBody>
+                    <a:bodyPr/>
+                    <a:lstStyle/>
+                    <a:p>
+                      <a:pPr algn="ctr" indent="0" marL="0">
+                        <a:buNone/>
+                      </a:pPr>
+                      <a:r>
+                        <a:rPr lang="en-US" sz="1050" dirty="0">
+                          <a:solidFill>
+                            <a:srgbClr val="2E2422"/>
+                          </a:solidFill>
+                          <a:latin typeface="Calibri" pitchFamily="34" charset="0"/>
+                          <a:ea typeface="Calibri" pitchFamily="34" charset="-122"/>
+                          <a:cs typeface="Calibri" pitchFamily="34" charset="-120"/>
+                        </a:rPr>
+                        <a:t>A1</a:t>
+                      </a:r>
+                      <a:endParaRPr lang="en-US" sz="1050" dirty="0">
+                        <a:latin typeface="Calibri" charset="0"/>
+                        <a:ea typeface="Calibri" charset="0"/>
+                        <a:cs typeface="Calibri" charset="0"/>
+                      </a:endParaRPr>
+                    </a:p>
+                  </a:txBody>
+                  <a:tcPr marL="91440" marR="91440" marT="45720" marB="45720" anchor="ctr">
+                    <a:lnL w="6350" cap="flat" cmpd="sng" algn="ctr">
+                      <a:solidFill>
+                        <a:srgbClr val="DCD6CC"/>
+                      </a:solidFill>
+                      <a:prstDash val="solid"/>
+                      <a:round/>
+                      <a:headEnd type="none" w="med" len="med"/>
+                      <a:tailEnd type="none" w="med" len="med"/>
+                    </a:lnL>
+                    <a:lnR w="6350" cap="flat" cmpd="sng" algn="ctr">
+                      <a:solidFill>
+                        <a:srgbClr val="DCD6CC"/>
+                      </a:solidFill>
+                      <a:prstDash val="solid"/>
+                      <a:round/>
+                      <a:headEnd type="none" w="med" len="med"/>
+                      <a:tailEnd type="none" w="med" len="med"/>
+                    </a:lnR>
+                    <a:lnT w="6350" cap="flat" cmpd="sng" algn="ctr">
+                      <a:solidFill>
+                        <a:srgbClr val="DCD6CC"/>
+                      </a:solidFill>
+                      <a:prstDash val="solid"/>
+                      <a:round/>
+                      <a:headEnd type="none" w="med" len="med"/>
+                      <a:tailEnd type="none" w="med" len="med"/>
+                    </a:lnT>
+                    <a:lnB w="6350" cap="flat" cmpd="sng" algn="ctr">
+                      <a:solidFill>
+                        <a:srgbClr val="DCD6CC"/>
+                      </a:solidFill>
+                      <a:prstDash val="solid"/>
+                      <a:round/>
+                      <a:headEnd type="none" w="med" len="med"/>
+                      <a:tailEnd type="none" w="med" len="med"/>
+                    </a:lnB>
+                  </a:tcPr>
+                </a:tc>
+                <a:tc>
+                  <a:txBody>
+                    <a:bodyPr/>
+                    <a:lstStyle/>
+                    <a:p>
+                      <a:pPr algn="ctr" indent="0" marL="0">
+                        <a:buNone/>
+                      </a:pPr>
+                      <a:r>
+                        <a:rPr lang="en-US" sz="1050" dirty="0">
+                          <a:solidFill>
+                            <a:srgbClr val="2E2422"/>
+                          </a:solidFill>
+                          <a:latin typeface="Calibri" pitchFamily="34" charset="0"/>
+                          <a:ea typeface="Calibri" pitchFamily="34" charset="-122"/>
+                          <a:cs typeface="Calibri" pitchFamily="34" charset="-120"/>
+                        </a:rPr>
+                        <a:t>0.7986</a:t>
+                      </a:r>
+                      <a:endParaRPr lang="en-US" sz="1050" dirty="0">
+                        <a:latin typeface="Calibri" charset="0"/>
+                        <a:ea typeface="Calibri" charset="0"/>
+                        <a:cs typeface="Calibri" charset="0"/>
+                      </a:endParaRPr>
+                    </a:p>
+                  </a:txBody>
+                  <a:tcPr marL="91440" marR="91440" marT="45720" marB="45720" anchor="ctr">
+                    <a:lnL w="6350" cap="flat" cmpd="sng" algn="ctr">
+                      <a:solidFill>
+                        <a:srgbClr val="DCD6CC"/>
+                      </a:solidFill>
+                      <a:prstDash val="solid"/>
+                      <a:round/>
+                      <a:headEnd type="none" w="med" len="med"/>
+                      <a:tailEnd type="none" w="med" len="med"/>
+                    </a:lnL>
+                    <a:lnR w="6350" cap="flat" cmpd="sng" algn="ctr">
+                      <a:solidFill>
+                        <a:srgbClr val="DCD6CC"/>
+                      </a:solidFill>
+                      <a:prstDash val="solid"/>
+                      <a:round/>
+                      <a:headEnd type="none" w="med" len="med"/>
+                      <a:tailEnd type="none" w="med" len="med"/>
+                    </a:lnR>
+                    <a:lnT w="6350" cap="flat" cmpd="sng" algn="ctr">
+                      <a:solidFill>
+                        <a:srgbClr val="DCD6CC"/>
+                      </a:solidFill>
+                      <a:prstDash val="solid"/>
+                      <a:round/>
+                      <a:headEnd type="none" w="med" len="med"/>
+                      <a:tailEnd type="none" w="med" len="med"/>
+                    </a:lnT>
+                    <a:lnB w="6350" cap="flat" cmpd="sng" algn="ctr">
+                      <a:solidFill>
+                        <a:srgbClr val="DCD6CC"/>
+                      </a:solidFill>
+                      <a:prstDash val="solid"/>
+                      <a:round/>
+                      <a:headEnd type="none" w="med" len="med"/>
+                      <a:tailEnd type="none" w="med" len="med"/>
+                    </a:lnB>
+                  </a:tcPr>
+                </a:tc>
+                <a:tc>
+                  <a:txBody>
+                    <a:bodyPr/>
+                    <a:lstStyle/>
+                    <a:p>
+                      <a:pPr algn="ctr" indent="0" marL="0">
+                        <a:buNone/>
+                      </a:pPr>
+                      <a:r>
+                        <a:rPr lang="en-US" sz="1050" dirty="0">
+                          <a:solidFill>
+                            <a:srgbClr val="B85042"/>
+                          </a:solidFill>
+                          <a:latin typeface="Calibri" pitchFamily="34" charset="0"/>
+                          <a:ea typeface="Calibri" pitchFamily="34" charset="-122"/>
+                          <a:cs typeface="Calibri" pitchFamily="34" charset="-120"/>
+                        </a:rPr>
+                        <a:t>0.7479</a:t>
+                      </a:r>
+                      <a:endParaRPr lang="en-US" sz="1050" dirty="0">
+                        <a:latin typeface="Calibri" charset="0"/>
+                        <a:ea typeface="Calibri" charset="0"/>
+                        <a:cs typeface="Calibri" charset="0"/>
+                      </a:endParaRPr>
+                    </a:p>
+                  </a:txBody>
+                  <a:tcPr marL="91440" marR="91440" marT="45720" marB="45720" anchor="ctr">
+                    <a:lnL w="6350" cap="flat" cmpd="sng" algn="ctr">
+                      <a:solidFill>
+                        <a:srgbClr val="DCD6CC"/>
+                      </a:solidFill>
+                      <a:prstDash val="solid"/>
+                      <a:round/>
+                      <a:headEnd type="none" w="med" len="med"/>
+                      <a:tailEnd type="none" w="med" len="med"/>
+                    </a:lnL>
+                    <a:lnR w="6350" cap="flat" cmpd="sng" algn="ctr">
+                      <a:solidFill>
+                        <a:srgbClr val="DCD6CC"/>
+                      </a:solidFill>
+                      <a:prstDash val="solid"/>
+                      <a:round/>
+                      <a:headEnd type="none" w="med" len="med"/>
+                      <a:tailEnd type="none" w="med" len="med"/>
+                    </a:lnR>
+                    <a:lnT w="6350" cap="flat" cmpd="sng" algn="ctr">
+                      <a:solidFill>
+                        <a:srgbClr val="DCD6CC"/>
+                      </a:solidFill>
+                      <a:prstDash val="solid"/>
+                      <a:round/>
+                      <a:headEnd type="none" w="med" len="med"/>
+                      <a:tailEnd type="none" w="med" len="med"/>
+                    </a:lnT>
+                    <a:lnB w="6350" cap="flat" cmpd="sng" algn="ctr">
+                      <a:solidFill>
+                        <a:srgbClr val="DCD6CC"/>
+                      </a:solidFill>
+                      <a:prstDash val="solid"/>
+                      <a:round/>
+                      <a:headEnd type="none" w="med" len="med"/>
+                      <a:tailEnd type="none" w="med" len="med"/>
+                    </a:lnB>
+                  </a:tcPr>
+                </a:tc>
+                <a:tc>
+                  <a:txBody>
+                    <a:bodyPr/>
+                    <a:lstStyle/>
+                    <a:p>
+                      <a:pPr algn="ctr" indent="0" marL="0">
+                        <a:buNone/>
+                      </a:pPr>
+                      <a:r>
+                        <a:rPr lang="en-US" sz="1050" dirty="0">
+                          <a:solidFill>
+                            <a:srgbClr val="2E2422"/>
+                          </a:solidFill>
+                          <a:latin typeface="Calibri" pitchFamily="34" charset="0"/>
+                          <a:ea typeface="Calibri" pitchFamily="34" charset="-122"/>
+                          <a:cs typeface="Calibri" pitchFamily="34" charset="-120"/>
+                        </a:rPr>
+                        <a:t>0.7562</a:t>
+                      </a:r>
+                      <a:endParaRPr lang="en-US" sz="1050" dirty="0">
+                        <a:latin typeface="Calibri" charset="0"/>
+                        <a:ea typeface="Calibri" charset="0"/>
+                        <a:cs typeface="Calibri" charset="0"/>
+                      </a:endParaRPr>
+                    </a:p>
+                  </a:txBody>
+                  <a:tcPr marL="91440" marR="91440" marT="45720" marB="45720" anchor="ctr">
+                    <a:lnL w="6350" cap="flat" cmpd="sng" algn="ctr">
+                      <a:solidFill>
+                        <a:srgbClr val="DCD6CC"/>
+                      </a:solidFill>
+                      <a:prstDash val="solid"/>
+                      <a:round/>
+                      <a:headEnd type="none" w="med" len="med"/>
+                      <a:tailEnd type="none" w="med" len="med"/>
+                    </a:lnL>
+                    <a:lnR w="6350" cap="flat" cmpd="sng" algn="ctr">
+                      <a:solidFill>
+                        <a:srgbClr val="DCD6CC"/>
+                      </a:solidFill>
+                      <a:prstDash val="solid"/>
+                      <a:round/>
+                      <a:headEnd type="none" w="med" len="med"/>
+                      <a:tailEnd type="none" w="med" len="med"/>
+                    </a:lnR>
+                    <a:lnT w="6350" cap="flat" cmpd="sng" algn="ctr">
+                      <a:solidFill>
+                        <a:srgbClr val="DCD6CC"/>
+                      </a:solidFill>
+                      <a:prstDash val="solid"/>
+                      <a:round/>
+                      <a:headEnd type="none" w="med" len="med"/>
+                      <a:tailEnd type="none" w="med" len="med"/>
+                    </a:lnT>
+                    <a:lnB w="6350" cap="flat" cmpd="sng" algn="ctr">
+                      <a:solidFill>
+                        <a:srgbClr val="DCD6CC"/>
+                      </a:solidFill>
+                      <a:prstDash val="solid"/>
+                      <a:round/>
+                      <a:headEnd type="none" w="med" len="med"/>
+                      <a:tailEnd type="none" w="med" len="med"/>
+                    </a:lnB>
+                  </a:tcPr>
+                </a:tc>
+                <a:tc>
+                  <a:txBody>
+                    <a:bodyPr/>
+                    <a:lstStyle/>
+                    <a:p>
+                      <a:pPr algn="ctr" indent="0" marL="0">
+                        <a:buNone/>
+                      </a:pPr>
+                      <a:r>
+                        <a:rPr lang="en-US" sz="1050" dirty="0">
+                          <a:solidFill>
+                            <a:srgbClr val="2E2422"/>
+                          </a:solidFill>
+                          <a:latin typeface="Calibri" pitchFamily="34" charset="0"/>
+                          <a:ea typeface="Calibri" pitchFamily="34" charset="-122"/>
+                          <a:cs typeface="Calibri" pitchFamily="34" charset="-120"/>
+                        </a:rPr>
+                        <a:t>0.7704</a:t>
+                      </a:r>
+                      <a:endParaRPr lang="en-US" sz="1050" dirty="0">
+                        <a:latin typeface="Calibri" charset="0"/>
+                        <a:ea typeface="Calibri" charset="0"/>
+                        <a:cs typeface="Calibri" charset="0"/>
+                      </a:endParaRPr>
+                    </a:p>
+                  </a:txBody>
+                  <a:tcPr marL="91440" marR="91440" marT="45720" marB="45720" anchor="ctr">
+                    <a:lnL w="6350" cap="flat" cmpd="sng" algn="ctr">
+                      <a:solidFill>
+                        <a:srgbClr val="DCD6CC"/>
+                      </a:solidFill>
+                      <a:prstDash val="solid"/>
+                      <a:round/>
+                      <a:headEnd type="none" w="med" len="med"/>
+                      <a:tailEnd type="none" w="med" len="med"/>
+                    </a:lnL>
+                    <a:lnR w="6350" cap="flat" cmpd="sng" algn="ctr">
+                      <a:solidFill>
+                        <a:srgbClr val="DCD6CC"/>
+                      </a:solidFill>
+                      <a:prstDash val="solid"/>
+                      <a:round/>
+                      <a:headEnd type="none" w="med" len="med"/>
+                      <a:tailEnd type="none" w="med" len="med"/>
+                    </a:lnR>
+                    <a:lnT w="6350" cap="flat" cmpd="sng" algn="ctr">
+                      <a:solidFill>
+                        <a:srgbClr val="DCD6CC"/>
+                      </a:solidFill>
+                      <a:prstDash val="solid"/>
+                      <a:round/>
+                      <a:headEnd type="none" w="med" len="med"/>
+                      <a:tailEnd type="none" w="med" len="med"/>
+                    </a:lnT>
+                    <a:lnB w="6350" cap="flat" cmpd="sng" algn="ctr">
+                      <a:solidFill>
+                        <a:srgbClr val="DCD6CC"/>
+                      </a:solidFill>
+                      <a:prstDash val="solid"/>
+                      <a:round/>
+                      <a:headEnd type="none" w="med" len="med"/>
+                      <a:tailEnd type="none" w="med" len="med"/>
+                    </a:lnB>
+                  </a:tcPr>
+                </a:tc>
+              </a:tr>
+              <a:tr h="306324">
+                <a:tc>
+                  <a:txBody>
+                    <a:bodyPr/>
+                    <a:lstStyle/>
+                    <a:p>
+                      <a:pPr algn="ctr" indent="0" marL="0">
+                        <a:buNone/>
+                      </a:pPr>
+                      <a:r>
+                        <a:rPr lang="en-US" sz="1050" dirty="0">
+                          <a:solidFill>
+                            <a:srgbClr val="2E2422"/>
+                          </a:solidFill>
+                          <a:latin typeface="Calibri" pitchFamily="34" charset="0"/>
+                          <a:ea typeface="Calibri" pitchFamily="34" charset="-122"/>
+                          <a:cs typeface="Calibri" pitchFamily="34" charset="-120"/>
+                        </a:rPr>
+                        <a:t>A2</a:t>
+                      </a:r>
+                      <a:endParaRPr lang="en-US" sz="1050" dirty="0">
+                        <a:latin typeface="Calibri" charset="0"/>
+                        <a:ea typeface="Calibri" charset="0"/>
+                        <a:cs typeface="Calibri" charset="0"/>
+                      </a:endParaRPr>
+                    </a:p>
+                  </a:txBody>
+                  <a:tcPr marL="91440" marR="91440" marT="45720" marB="45720" anchor="ctr">
+                    <a:lnL w="6350" cap="flat" cmpd="sng" algn="ctr">
+                      <a:solidFill>
+                        <a:srgbClr val="DCD6CC"/>
+                      </a:solidFill>
+                      <a:prstDash val="solid"/>
+                      <a:round/>
+                      <a:headEnd type="none" w="med" len="med"/>
+                      <a:tailEnd type="none" w="med" len="med"/>
+                    </a:lnL>
+                    <a:lnR w="6350" cap="flat" cmpd="sng" algn="ctr">
+                      <a:solidFill>
+                        <a:srgbClr val="DCD6CC"/>
+                      </a:solidFill>
+                      <a:prstDash val="solid"/>
+                      <a:round/>
+                      <a:headEnd type="none" w="med" len="med"/>
+                      <a:tailEnd type="none" w="med" len="med"/>
+                    </a:lnR>
+                    <a:lnT w="6350" cap="flat" cmpd="sng" algn="ctr">
+                      <a:solidFill>
+                        <a:srgbClr val="DCD6CC"/>
+                      </a:solidFill>
+                      <a:prstDash val="solid"/>
+                      <a:round/>
+                      <a:headEnd type="none" w="med" len="med"/>
+                      <a:tailEnd type="none" w="med" len="med"/>
+                    </a:lnT>
+                    <a:lnB w="6350" cap="flat" cmpd="sng" algn="ctr">
+                      <a:solidFill>
+                        <a:srgbClr val="DCD6CC"/>
+                      </a:solidFill>
+                      <a:prstDash val="solid"/>
+                      <a:round/>
+                      <a:headEnd type="none" w="med" len="med"/>
+                      <a:tailEnd type="none" w="med" len="med"/>
+                    </a:lnB>
+                  </a:tcPr>
+                </a:tc>
+                <a:tc>
+                  <a:txBody>
+                    <a:bodyPr/>
+                    <a:lstStyle/>
+                    <a:p>
+                      <a:pPr algn="ctr" indent="0" marL="0">
+                        <a:buNone/>
+                      </a:pPr>
+                      <a:r>
+                        <a:rPr lang="en-US" sz="1050" dirty="0">
+                          <a:solidFill>
+                            <a:srgbClr val="2E2422"/>
+                          </a:solidFill>
+                          <a:latin typeface="Calibri" pitchFamily="34" charset="0"/>
+                          <a:ea typeface="Calibri" pitchFamily="34" charset="-122"/>
+                          <a:cs typeface="Calibri" pitchFamily="34" charset="-120"/>
+                        </a:rPr>
+                        <a:t>0.8341</a:t>
+                      </a:r>
+                      <a:endParaRPr lang="en-US" sz="1050" dirty="0">
+                        <a:latin typeface="Calibri" charset="0"/>
+                        <a:ea typeface="Calibri" charset="0"/>
+                        <a:cs typeface="Calibri" charset="0"/>
+                      </a:endParaRPr>
+                    </a:p>
+                  </a:txBody>
+                  <a:tcPr marL="91440" marR="91440" marT="45720" marB="45720" anchor="ctr">
+                    <a:lnL w="6350" cap="flat" cmpd="sng" algn="ctr">
+                      <a:solidFill>
+                        <a:srgbClr val="DCD6CC"/>
+                      </a:solidFill>
+                      <a:prstDash val="solid"/>
+                      <a:round/>
+                      <a:headEnd type="none" w="med" len="med"/>
+                      <a:tailEnd type="none" w="med" len="med"/>
+                    </a:lnL>
+                    <a:lnR w="6350" cap="flat" cmpd="sng" algn="ctr">
+                      <a:solidFill>
+                        <a:srgbClr val="DCD6CC"/>
+                      </a:solidFill>
+                      <a:prstDash val="solid"/>
+                      <a:round/>
+                      <a:headEnd type="none" w="med" len="med"/>
+                      <a:tailEnd type="none" w="med" len="med"/>
+                    </a:lnR>
+                    <a:lnT w="6350" cap="flat" cmpd="sng" algn="ctr">
+                      <a:solidFill>
+                        <a:srgbClr val="DCD6CC"/>
+                      </a:solidFill>
+                      <a:prstDash val="solid"/>
+                      <a:round/>
+                      <a:headEnd type="none" w="med" len="med"/>
+                      <a:tailEnd type="none" w="med" len="med"/>
+                    </a:lnT>
+                    <a:lnB w="6350" cap="flat" cmpd="sng" algn="ctr">
+                      <a:solidFill>
+                        <a:srgbClr val="DCD6CC"/>
+                      </a:solidFill>
+                      <a:prstDash val="solid"/>
+                      <a:round/>
+                      <a:headEnd type="none" w="med" len="med"/>
+                      <a:tailEnd type="none" w="med" len="med"/>
+                    </a:lnB>
+                  </a:tcPr>
+                </a:tc>
+                <a:tc>
+                  <a:txBody>
+                    <a:bodyPr/>
+                    <a:lstStyle/>
+                    <a:p>
+                      <a:pPr algn="ctr" indent="0" marL="0">
+                        <a:buNone/>
+                      </a:pPr>
+                      <a:r>
+                        <a:rPr lang="en-US" sz="1050" dirty="0">
+                          <a:solidFill>
+                            <a:srgbClr val="B85042"/>
+                          </a:solidFill>
+                          <a:latin typeface="Calibri" pitchFamily="34" charset="0"/>
+                          <a:ea typeface="Calibri" pitchFamily="34" charset="-122"/>
+                          <a:cs typeface="Calibri" pitchFamily="34" charset="-120"/>
+                        </a:rPr>
+                        <a:t>0.8039</a:t>
+                      </a:r>
+                      <a:endParaRPr lang="en-US" sz="1050" dirty="0">
+                        <a:latin typeface="Calibri" charset="0"/>
+                        <a:ea typeface="Calibri" charset="0"/>
+                        <a:cs typeface="Calibri" charset="0"/>
+                      </a:endParaRPr>
+                    </a:p>
+                  </a:txBody>
+                  <a:tcPr marL="91440" marR="91440" marT="45720" marB="45720" anchor="ctr">
+                    <a:lnL w="6350" cap="flat" cmpd="sng" algn="ctr">
+                      <a:solidFill>
+                        <a:srgbClr val="DCD6CC"/>
+                      </a:solidFill>
+                      <a:prstDash val="solid"/>
+                      <a:round/>
+                      <a:headEnd type="none" w="med" len="med"/>
+                      <a:tailEnd type="none" w="med" len="med"/>
+                    </a:lnL>
+                    <a:lnR w="6350" cap="flat" cmpd="sng" algn="ctr">
+                      <a:solidFill>
+                        <a:srgbClr val="DCD6CC"/>
+                      </a:solidFill>
+                      <a:prstDash val="solid"/>
+                      <a:round/>
+                      <a:headEnd type="none" w="med" len="med"/>
+                      <a:tailEnd type="none" w="med" len="med"/>
+                    </a:lnR>
+                    <a:lnT w="6350" cap="flat" cmpd="sng" algn="ctr">
+                      <a:solidFill>
+                        <a:srgbClr val="DCD6CC"/>
+                      </a:solidFill>
+                      <a:prstDash val="solid"/>
+                      <a:round/>
+                      <a:headEnd type="none" w="med" len="med"/>
+                      <a:tailEnd type="none" w="med" len="med"/>
+                    </a:lnT>
+                    <a:lnB w="6350" cap="flat" cmpd="sng" algn="ctr">
+                      <a:solidFill>
+                        <a:srgbClr val="DCD6CC"/>
+                      </a:solidFill>
+                      <a:prstDash val="solid"/>
+                      <a:round/>
+                      <a:headEnd type="none" w="med" len="med"/>
+                      <a:tailEnd type="none" w="med" len="med"/>
+                    </a:lnB>
+                  </a:tcPr>
+                </a:tc>
+                <a:tc>
+                  <a:txBody>
+                    <a:bodyPr/>
+                    <a:lstStyle/>
+                    <a:p>
+                      <a:pPr algn="ctr" indent="0" marL="0">
+                        <a:buNone/>
+                      </a:pPr>
+                      <a:r>
+                        <a:rPr lang="en-US" sz="1050" dirty="0">
+                          <a:solidFill>
+                            <a:srgbClr val="2E2422"/>
+                          </a:solidFill>
+                          <a:latin typeface="Calibri" pitchFamily="34" charset="0"/>
+                          <a:ea typeface="Calibri" pitchFamily="34" charset="-122"/>
+                          <a:cs typeface="Calibri" pitchFamily="34" charset="-120"/>
+                        </a:rPr>
+                        <a:t>0.8103</a:t>
+                      </a:r>
+                      <a:endParaRPr lang="en-US" sz="1050" dirty="0">
+                        <a:latin typeface="Calibri" charset="0"/>
+                        <a:ea typeface="Calibri" charset="0"/>
+                        <a:cs typeface="Calibri" charset="0"/>
+                      </a:endParaRPr>
+                    </a:p>
+                  </a:txBody>
+                  <a:tcPr marL="91440" marR="91440" marT="45720" marB="45720" anchor="ctr">
+                    <a:lnL w="6350" cap="flat" cmpd="sng" algn="ctr">
+                      <a:solidFill>
+                        <a:srgbClr val="DCD6CC"/>
+                      </a:solidFill>
+                      <a:prstDash val="solid"/>
+                      <a:round/>
+                      <a:headEnd type="none" w="med" len="med"/>
+                      <a:tailEnd type="none" w="med" len="med"/>
+                    </a:lnL>
+                    <a:lnR w="6350" cap="flat" cmpd="sng" algn="ctr">
+                      <a:solidFill>
+                        <a:srgbClr val="DCD6CC"/>
+                      </a:solidFill>
+                      <a:prstDash val="solid"/>
+                      <a:round/>
+                      <a:headEnd type="none" w="med" len="med"/>
+                      <a:tailEnd type="none" w="med" len="med"/>
+                    </a:lnR>
+                    <a:lnT w="6350" cap="flat" cmpd="sng" algn="ctr">
+                      <a:solidFill>
+                        <a:srgbClr val="DCD6CC"/>
+                      </a:solidFill>
+                      <a:prstDash val="solid"/>
+                      <a:round/>
+                      <a:headEnd type="none" w="med" len="med"/>
+                      <a:tailEnd type="none" w="med" len="med"/>
+                    </a:lnT>
+                    <a:lnB w="6350" cap="flat" cmpd="sng" algn="ctr">
+                      <a:solidFill>
+                        <a:srgbClr val="DCD6CC"/>
+                      </a:solidFill>
+                      <a:prstDash val="solid"/>
+                      <a:round/>
+                      <a:headEnd type="none" w="med" len="med"/>
+                      <a:tailEnd type="none" w="med" len="med"/>
+                    </a:lnB>
+                  </a:tcPr>
+                </a:tc>
+                <a:tc>
+                  <a:txBody>
+                    <a:bodyPr/>
+                    <a:lstStyle/>
+                    <a:p>
+                      <a:pPr algn="ctr" indent="0" marL="0">
+                        <a:buNone/>
+                      </a:pPr>
+                      <a:r>
+                        <a:rPr lang="en-US" sz="1050" dirty="0">
+                          <a:solidFill>
+                            <a:srgbClr val="2E2422"/>
+                          </a:solidFill>
+                          <a:latin typeface="Calibri" pitchFamily="34" charset="0"/>
+                          <a:ea typeface="Calibri" pitchFamily="34" charset="-122"/>
+                          <a:cs typeface="Calibri" pitchFamily="34" charset="-120"/>
+                        </a:rPr>
+                        <a:t>0.8018</a:t>
+                      </a:r>
+                      <a:endParaRPr lang="en-US" sz="1050" dirty="0">
+                        <a:latin typeface="Calibri" charset="0"/>
+                        <a:ea typeface="Calibri" charset="0"/>
+                        <a:cs typeface="Calibri" charset="0"/>
+                      </a:endParaRPr>
+                    </a:p>
+                  </a:txBody>
+                  <a:tcPr marL="91440" marR="91440" marT="45720" marB="45720" anchor="ctr">
+                    <a:lnL w="6350" cap="flat" cmpd="sng" algn="ctr">
+                      <a:solidFill>
+                        <a:srgbClr val="DCD6CC"/>
+                      </a:solidFill>
+                      <a:prstDash val="solid"/>
+                      <a:round/>
+                      <a:headEnd type="none" w="med" len="med"/>
+                      <a:tailEnd type="none" w="med" len="med"/>
+                    </a:lnL>
+                    <a:lnR w="6350" cap="flat" cmpd="sng" algn="ctr">
+                      <a:solidFill>
+                        <a:srgbClr val="DCD6CC"/>
+                      </a:solidFill>
+                      <a:prstDash val="solid"/>
+                      <a:round/>
+                      <a:headEnd type="none" w="med" len="med"/>
+                      <a:tailEnd type="none" w="med" len="med"/>
+                    </a:lnR>
+                    <a:lnT w="6350" cap="flat" cmpd="sng" algn="ctr">
+                      <a:solidFill>
+                        <a:srgbClr val="DCD6CC"/>
+                      </a:solidFill>
+                      <a:prstDash val="solid"/>
+                      <a:round/>
+                      <a:headEnd type="none" w="med" len="med"/>
+                      <a:tailEnd type="none" w="med" len="med"/>
+                    </a:lnT>
+                    <a:lnB w="6350" cap="flat" cmpd="sng" algn="ctr">
+                      <a:solidFill>
+                        <a:srgbClr val="DCD6CC"/>
+                      </a:solidFill>
+                      <a:prstDash val="solid"/>
+                      <a:round/>
+                      <a:headEnd type="none" w="med" len="med"/>
+                      <a:tailEnd type="none" w="med" len="med"/>
+                    </a:lnB>
+                  </a:tcPr>
+                </a:tc>
+              </a:tr>
+              <a:tr h="306324">
+                <a:tc>
+                  <a:txBody>
+                    <a:bodyPr/>
+                    <a:lstStyle/>
+                    <a:p>
+                      <a:pPr algn="ctr" indent="0" marL="0">
+                        <a:buNone/>
+                      </a:pPr>
+                      <a:r>
+                        <a:rPr lang="en-US" sz="1050" b="1" dirty="0">
+                          <a:solidFill>
+                            <a:srgbClr val="2E2422"/>
+                          </a:solidFill>
+                          <a:latin typeface="Calibri" pitchFamily="34" charset="0"/>
+                          <a:ea typeface="Calibri" pitchFamily="34" charset="-122"/>
+                          <a:cs typeface="Calibri" pitchFamily="34" charset="-120"/>
+                        </a:rPr>
+                        <a:t>B0</a:t>
+                      </a:r>
+                      <a:endParaRPr lang="en-US" sz="1050" dirty="0">
+                        <a:latin typeface="Calibri" charset="0"/>
+                        <a:ea typeface="Calibri" charset="0"/>
+                        <a:cs typeface="Calibri" charset="0"/>
+                      </a:endParaRPr>
+                    </a:p>
+                  </a:txBody>
+                  <a:tcPr marL="91440" marR="91440" marT="45720" marB="45720" anchor="ctr">
+                    <a:lnL w="6350" cap="flat" cmpd="sng" algn="ctr">
+                      <a:solidFill>
+                        <a:srgbClr val="DCD6CC"/>
+                      </a:solidFill>
+                      <a:prstDash val="solid"/>
+                      <a:round/>
+                      <a:headEnd type="none" w="med" len="med"/>
+                      <a:tailEnd type="none" w="med" len="med"/>
+                    </a:lnL>
+                    <a:lnR w="6350" cap="flat" cmpd="sng" algn="ctr">
+                      <a:solidFill>
+                        <a:srgbClr val="DCD6CC"/>
+                      </a:solidFill>
+                      <a:prstDash val="solid"/>
+                      <a:round/>
+                      <a:headEnd type="none" w="med" len="med"/>
+                      <a:tailEnd type="none" w="med" len="med"/>
+                    </a:lnR>
+                    <a:lnT w="6350" cap="flat" cmpd="sng" algn="ctr">
+                      <a:solidFill>
+                        <a:srgbClr val="DCD6CC"/>
+                      </a:solidFill>
+                      <a:prstDash val="solid"/>
+                      <a:round/>
+                      <a:headEnd type="none" w="med" len="med"/>
+                      <a:tailEnd type="none" w="med" len="med"/>
+                    </a:lnT>
+                    <a:lnB w="6350" cap="flat" cmpd="sng" algn="ctr">
+                      <a:solidFill>
+                        <a:srgbClr val="DCD6CC"/>
+                      </a:solidFill>
+                      <a:prstDash val="solid"/>
+                      <a:round/>
+                      <a:headEnd type="none" w="med" len="med"/>
+                      <a:tailEnd type="none" w="med" len="med"/>
+                    </a:lnB>
+                  </a:tcPr>
+                </a:tc>
+                <a:tc>
+                  <a:txBody>
+                    <a:bodyPr/>
+                    <a:lstStyle/>
+                    <a:p>
+                      <a:pPr algn="ctr" indent="0" marL="0">
+                        <a:buNone/>
+                      </a:pPr>
+                      <a:r>
+                        <a:rPr lang="en-US" sz="1050" b="1" dirty="0">
+                          <a:solidFill>
+                            <a:srgbClr val="2E2422"/>
+                          </a:solidFill>
+                          <a:latin typeface="Calibri" pitchFamily="34" charset="0"/>
+                          <a:ea typeface="Calibri" pitchFamily="34" charset="-122"/>
+                          <a:cs typeface="Calibri" pitchFamily="34" charset="-120"/>
+                        </a:rPr>
+                        <a:t>0.8400</a:t>
+                      </a:r>
+                      <a:endParaRPr lang="en-US" sz="1050" dirty="0">
+                        <a:latin typeface="Calibri" charset="0"/>
+                        <a:ea typeface="Calibri" charset="0"/>
+                        <a:cs typeface="Calibri" charset="0"/>
+                      </a:endParaRPr>
+                    </a:p>
+                  </a:txBody>
+                  <a:tcPr marL="91440" marR="91440" marT="45720" marB="45720" anchor="ctr">
+                    <a:lnL w="6350" cap="flat" cmpd="sng" algn="ctr">
+                      <a:solidFill>
+                        <a:srgbClr val="DCD6CC"/>
+                      </a:solidFill>
+                      <a:prstDash val="solid"/>
+                      <a:round/>
+                      <a:headEnd type="none" w="med" len="med"/>
+                      <a:tailEnd type="none" w="med" len="med"/>
+                    </a:lnL>
+                    <a:lnR w="6350" cap="flat" cmpd="sng" algn="ctr">
+                      <a:solidFill>
+                        <a:srgbClr val="DCD6CC"/>
+                      </a:solidFill>
+                      <a:prstDash val="solid"/>
+                      <a:round/>
+                      <a:headEnd type="none" w="med" len="med"/>
+                      <a:tailEnd type="none" w="med" len="med"/>
+                    </a:lnR>
+                    <a:lnT w="6350" cap="flat" cmpd="sng" algn="ctr">
+                      <a:solidFill>
+                        <a:srgbClr val="DCD6CC"/>
+                      </a:solidFill>
+                      <a:prstDash val="solid"/>
+                      <a:round/>
+                      <a:headEnd type="none" w="med" len="med"/>
+                      <a:tailEnd type="none" w="med" len="med"/>
+                    </a:lnT>
+                    <a:lnB w="6350" cap="flat" cmpd="sng" algn="ctr">
+                      <a:solidFill>
+                        <a:srgbClr val="DCD6CC"/>
+                      </a:solidFill>
+                      <a:prstDash val="solid"/>
+                      <a:round/>
+                      <a:headEnd type="none" w="med" len="med"/>
+                      <a:tailEnd type="none" w="med" len="med"/>
+                    </a:lnB>
+                  </a:tcPr>
+                </a:tc>
+                <a:tc>
+                  <a:txBody>
+                    <a:bodyPr/>
+                    <a:lstStyle/>
+                    <a:p>
+                      <a:pPr algn="ctr" indent="0" marL="0">
+                        <a:buNone/>
+                      </a:pPr>
+                      <a:r>
+                        <a:rPr lang="en-US" sz="1050" b="1" dirty="0">
+                          <a:solidFill>
+                            <a:srgbClr val="5F7F6E"/>
+                          </a:solidFill>
+                          <a:latin typeface="Calibri" pitchFamily="34" charset="0"/>
+                          <a:ea typeface="Calibri" pitchFamily="34" charset="-122"/>
+                          <a:cs typeface="Calibri" pitchFamily="34" charset="-120"/>
+                        </a:rPr>
+                        <a:t>0.8550</a:t>
+                      </a:r>
+                      <a:endParaRPr lang="en-US" sz="1050" dirty="0">
+                        <a:latin typeface="Calibri" charset="0"/>
+                        <a:ea typeface="Calibri" charset="0"/>
+                        <a:cs typeface="Calibri" charset="0"/>
+                      </a:endParaRPr>
+                    </a:p>
+                  </a:txBody>
+                  <a:tcPr marL="91440" marR="91440" marT="45720" marB="45720" anchor="ctr">
+                    <a:lnL w="6350" cap="flat" cmpd="sng" algn="ctr">
+                      <a:solidFill>
+                        <a:srgbClr val="DCD6CC"/>
+                      </a:solidFill>
+                      <a:prstDash val="solid"/>
+                      <a:round/>
+                      <a:headEnd type="none" w="med" len="med"/>
+                      <a:tailEnd type="none" w="med" len="med"/>
+                    </a:lnL>
+                    <a:lnR w="6350" cap="flat" cmpd="sng" algn="ctr">
+                      <a:solidFill>
+                        <a:srgbClr val="DCD6CC"/>
+                      </a:solidFill>
+                      <a:prstDash val="solid"/>
+                      <a:round/>
+                      <a:headEnd type="none" w="med" len="med"/>
+                      <a:tailEnd type="none" w="med" len="med"/>
+                    </a:lnR>
+                    <a:lnT w="6350" cap="flat" cmpd="sng" algn="ctr">
+                      <a:solidFill>
+                        <a:srgbClr val="DCD6CC"/>
+                      </a:solidFill>
+                      <a:prstDash val="solid"/>
+                      <a:round/>
+                      <a:headEnd type="none" w="med" len="med"/>
+                      <a:tailEnd type="none" w="med" len="med"/>
+                    </a:lnT>
+                    <a:lnB w="6350" cap="flat" cmpd="sng" algn="ctr">
+                      <a:solidFill>
+                        <a:srgbClr val="DCD6CC"/>
+                      </a:solidFill>
+                      <a:prstDash val="solid"/>
+                      <a:round/>
+                      <a:headEnd type="none" w="med" len="med"/>
+                      <a:tailEnd type="none" w="med" len="med"/>
+                    </a:lnB>
+                  </a:tcPr>
+                </a:tc>
+                <a:tc>
+                  <a:txBody>
+                    <a:bodyPr/>
+                    <a:lstStyle/>
+                    <a:p>
+                      <a:pPr algn="ctr" indent="0" marL="0">
+                        <a:buNone/>
+                      </a:pPr>
+                      <a:r>
+                        <a:rPr lang="en-US" sz="1050" b="1" dirty="0">
+                          <a:solidFill>
+                            <a:srgbClr val="2E2422"/>
+                          </a:solidFill>
+                          <a:latin typeface="Calibri" pitchFamily="34" charset="0"/>
+                          <a:ea typeface="Calibri" pitchFamily="34" charset="-122"/>
+                          <a:cs typeface="Calibri" pitchFamily="34" charset="-120"/>
+                        </a:rPr>
+                        <a:t>0.8177</a:t>
+                      </a:r>
+                      <a:endParaRPr lang="en-US" sz="1050" dirty="0">
+                        <a:latin typeface="Calibri" charset="0"/>
+                        <a:ea typeface="Calibri" charset="0"/>
+                        <a:cs typeface="Calibri" charset="0"/>
+                      </a:endParaRPr>
+                    </a:p>
+                  </a:txBody>
+                  <a:tcPr marL="91440" marR="91440" marT="45720" marB="45720" anchor="ctr">
+                    <a:lnL w="6350" cap="flat" cmpd="sng" algn="ctr">
+                      <a:solidFill>
+                        <a:srgbClr val="DCD6CC"/>
+                      </a:solidFill>
+                      <a:prstDash val="solid"/>
+                      <a:round/>
+                      <a:headEnd type="none" w="med" len="med"/>
+                      <a:tailEnd type="none" w="med" len="med"/>
+                    </a:lnL>
+                    <a:lnR w="6350" cap="flat" cmpd="sng" algn="ctr">
+                      <a:solidFill>
+                        <a:srgbClr val="DCD6CC"/>
+                      </a:solidFill>
+                      <a:prstDash val="solid"/>
+                      <a:round/>
+                      <a:headEnd type="none" w="med" len="med"/>
+                      <a:tailEnd type="none" w="med" len="med"/>
+                    </a:lnR>
+                    <a:lnT w="6350" cap="flat" cmpd="sng" algn="ctr">
+                      <a:solidFill>
+                        <a:srgbClr val="DCD6CC"/>
+                      </a:solidFill>
+                      <a:prstDash val="solid"/>
+                      <a:round/>
+                      <a:headEnd type="none" w="med" len="med"/>
+                      <a:tailEnd type="none" w="med" len="med"/>
+                    </a:lnT>
+                    <a:lnB w="6350" cap="flat" cmpd="sng" algn="ctr">
+                      <a:solidFill>
+                        <a:srgbClr val="DCD6CC"/>
+                      </a:solidFill>
+                      <a:prstDash val="solid"/>
+                      <a:round/>
+                      <a:headEnd type="none" w="med" len="med"/>
+                      <a:tailEnd type="none" w="med" len="med"/>
+                    </a:lnB>
+                  </a:tcPr>
+                </a:tc>
+                <a:tc>
+                  <a:txBody>
+                    <a:bodyPr/>
+                    <a:lstStyle/>
+                    <a:p>
+                      <a:pPr algn="ctr" indent="0" marL="0">
+                        <a:buNone/>
+                      </a:pPr>
+                      <a:r>
+                        <a:rPr lang="en-US" sz="1050" b="1" dirty="0">
+                          <a:solidFill>
+                            <a:srgbClr val="2E2422"/>
+                          </a:solidFill>
+                          <a:latin typeface="Calibri" pitchFamily="34" charset="0"/>
+                          <a:ea typeface="Calibri" pitchFamily="34" charset="-122"/>
+                          <a:cs typeface="Calibri" pitchFamily="34" charset="-120"/>
+                        </a:rPr>
+                        <a:t>0.8177</a:t>
+                      </a:r>
+                      <a:endParaRPr lang="en-US" sz="1050" dirty="0">
+                        <a:latin typeface="Calibri" charset="0"/>
+                        <a:ea typeface="Calibri" charset="0"/>
+                        <a:cs typeface="Calibri" charset="0"/>
+                      </a:endParaRPr>
+                    </a:p>
+                  </a:txBody>
+                  <a:tcPr marL="91440" marR="91440" marT="45720" marB="45720" anchor="ctr">
+                    <a:lnL w="6350" cap="flat" cmpd="sng" algn="ctr">
+                      <a:solidFill>
+                        <a:srgbClr val="DCD6CC"/>
+                      </a:solidFill>
+                      <a:prstDash val="solid"/>
+                      <a:round/>
+                      <a:headEnd type="none" w="med" len="med"/>
+                      <a:tailEnd type="none" w="med" len="med"/>
+                    </a:lnL>
+                    <a:lnR w="6350" cap="flat" cmpd="sng" algn="ctr">
+                      <a:solidFill>
+                        <a:srgbClr val="DCD6CC"/>
+                      </a:solidFill>
+                      <a:prstDash val="solid"/>
+                      <a:round/>
+                      <a:headEnd type="none" w="med" len="med"/>
+                      <a:tailEnd type="none" w="med" len="med"/>
+                    </a:lnR>
+                    <a:lnT w="6350" cap="flat" cmpd="sng" algn="ctr">
+                      <a:solidFill>
+                        <a:srgbClr val="DCD6CC"/>
+                      </a:solidFill>
+                      <a:prstDash val="solid"/>
+                      <a:round/>
+                      <a:headEnd type="none" w="med" len="med"/>
+                      <a:tailEnd type="none" w="med" len="med"/>
+                    </a:lnT>
+                    <a:lnB w="6350" cap="flat" cmpd="sng" algn="ctr">
+                      <a:solidFill>
+                        <a:srgbClr val="DCD6CC"/>
+                      </a:solidFill>
+                      <a:prstDash val="solid"/>
+                      <a:round/>
+                      <a:headEnd type="none" w="med" len="med"/>
+                      <a:tailEnd type="none" w="med" len="med"/>
+                    </a:lnB>
+                  </a:tcPr>
+                </a:tc>
+              </a:tr>
+              <a:tr h="306324">
+                <a:tc>
+                  <a:txBody>
+                    <a:bodyPr/>
+                    <a:lstStyle/>
+                    <a:p>
+                      <a:pPr algn="ctr" indent="0" marL="0">
+                        <a:buNone/>
+                      </a:pPr>
+                      <a:r>
+                        <a:rPr lang="en-US" sz="1050" dirty="0">
+                          <a:solidFill>
+                            <a:srgbClr val="2E2422"/>
+                          </a:solidFill>
+                          <a:latin typeface="Calibri" pitchFamily="34" charset="0"/>
+                          <a:ea typeface="Calibri" pitchFamily="34" charset="-122"/>
+                          <a:cs typeface="Calibri" pitchFamily="34" charset="-120"/>
+                        </a:rPr>
+                        <a:t>B1</a:t>
+                      </a:r>
+                      <a:endParaRPr lang="en-US" sz="1050" dirty="0">
+                        <a:latin typeface="Calibri" charset="0"/>
+                        <a:ea typeface="Calibri" charset="0"/>
+                        <a:cs typeface="Calibri" charset="0"/>
+                      </a:endParaRPr>
+                    </a:p>
+                  </a:txBody>
+                  <a:tcPr marL="91440" marR="91440" marT="45720" marB="45720" anchor="ctr">
+                    <a:lnL w="6350" cap="flat" cmpd="sng" algn="ctr">
+                      <a:solidFill>
+                        <a:srgbClr val="DCD6CC"/>
+                      </a:solidFill>
+                      <a:prstDash val="solid"/>
+                      <a:round/>
+                      <a:headEnd type="none" w="med" len="med"/>
+                      <a:tailEnd type="none" w="med" len="med"/>
+                    </a:lnL>
+                    <a:lnR w="6350" cap="flat" cmpd="sng" algn="ctr">
+                      <a:solidFill>
+                        <a:srgbClr val="DCD6CC"/>
+                      </a:solidFill>
+                      <a:prstDash val="solid"/>
+                      <a:round/>
+                      <a:headEnd type="none" w="med" len="med"/>
+                      <a:tailEnd type="none" w="med" len="med"/>
+                    </a:lnR>
+                    <a:lnT w="6350" cap="flat" cmpd="sng" algn="ctr">
+                      <a:solidFill>
+                        <a:srgbClr val="DCD6CC"/>
+                      </a:solidFill>
+                      <a:prstDash val="solid"/>
+                      <a:round/>
+                      <a:headEnd type="none" w="med" len="med"/>
+                      <a:tailEnd type="none" w="med" len="med"/>
+                    </a:lnT>
+                    <a:lnB w="6350" cap="flat" cmpd="sng" algn="ctr">
+                      <a:solidFill>
+                        <a:srgbClr val="DCD6CC"/>
+                      </a:solidFill>
+                      <a:prstDash val="solid"/>
+                      <a:round/>
+                      <a:headEnd type="none" w="med" len="med"/>
+                      <a:tailEnd type="none" w="med" len="med"/>
+                    </a:lnB>
+                  </a:tcPr>
+                </a:tc>
+                <a:tc>
+                  <a:txBody>
+                    <a:bodyPr/>
+                    <a:lstStyle/>
+                    <a:p>
+                      <a:pPr algn="ctr" indent="0" marL="0">
+                        <a:buNone/>
+                      </a:pPr>
+                      <a:r>
+                        <a:rPr lang="en-US" sz="1050" dirty="0">
+                          <a:solidFill>
+                            <a:srgbClr val="2E2422"/>
+                          </a:solidFill>
+                          <a:latin typeface="Calibri" pitchFamily="34" charset="0"/>
+                          <a:ea typeface="Calibri" pitchFamily="34" charset="-122"/>
+                          <a:cs typeface="Calibri" pitchFamily="34" charset="-120"/>
+                        </a:rPr>
+                        <a:t>0.7660</a:t>
+                      </a:r>
+                      <a:endParaRPr lang="en-US" sz="1050" dirty="0">
+                        <a:latin typeface="Calibri" charset="0"/>
+                        <a:ea typeface="Calibri" charset="0"/>
+                        <a:cs typeface="Calibri" charset="0"/>
+                      </a:endParaRPr>
+                    </a:p>
+                  </a:txBody>
+                  <a:tcPr marL="91440" marR="91440" marT="45720" marB="45720" anchor="ctr">
+                    <a:lnL w="6350" cap="flat" cmpd="sng" algn="ctr">
+                      <a:solidFill>
+                        <a:srgbClr val="DCD6CC"/>
+                      </a:solidFill>
+                      <a:prstDash val="solid"/>
+                      <a:round/>
+                      <a:headEnd type="none" w="med" len="med"/>
+                      <a:tailEnd type="none" w="med" len="med"/>
+                    </a:lnL>
+                    <a:lnR w="6350" cap="flat" cmpd="sng" algn="ctr">
+                      <a:solidFill>
+                        <a:srgbClr val="DCD6CC"/>
+                      </a:solidFill>
+                      <a:prstDash val="solid"/>
+                      <a:round/>
+                      <a:headEnd type="none" w="med" len="med"/>
+                      <a:tailEnd type="none" w="med" len="med"/>
+                    </a:lnR>
+                    <a:lnT w="6350" cap="flat" cmpd="sng" algn="ctr">
+                      <a:solidFill>
+                        <a:srgbClr val="DCD6CC"/>
+                      </a:solidFill>
+                      <a:prstDash val="solid"/>
+                      <a:round/>
+                      <a:headEnd type="none" w="med" len="med"/>
+                      <a:tailEnd type="none" w="med" len="med"/>
+                    </a:lnT>
+                    <a:lnB w="6350" cap="flat" cmpd="sng" algn="ctr">
+                      <a:solidFill>
+                        <a:srgbClr val="DCD6CC"/>
+                      </a:solidFill>
+                      <a:prstDash val="solid"/>
+                      <a:round/>
+                      <a:headEnd type="none" w="med" len="med"/>
+                      <a:tailEnd type="none" w="med" len="med"/>
+                    </a:lnB>
+                  </a:tcPr>
+                </a:tc>
+                <a:tc>
+                  <a:txBody>
+                    <a:bodyPr/>
+                    <a:lstStyle/>
+                    <a:p>
+                      <a:pPr algn="ctr" indent="0" marL="0">
+                        <a:buNone/>
+                      </a:pPr>
+                      <a:r>
+                        <a:rPr lang="en-US" sz="1050" dirty="0">
+                          <a:solidFill>
+                            <a:srgbClr val="B85042"/>
+                          </a:solidFill>
+                          <a:latin typeface="Calibri" pitchFamily="34" charset="0"/>
+                          <a:ea typeface="Calibri" pitchFamily="34" charset="-122"/>
+                          <a:cs typeface="Calibri" pitchFamily="34" charset="-120"/>
+                        </a:rPr>
+                        <a:t>0.7285</a:t>
+                      </a:r>
+                      <a:endParaRPr lang="en-US" sz="1050" dirty="0">
+                        <a:latin typeface="Calibri" charset="0"/>
+                        <a:ea typeface="Calibri" charset="0"/>
+                        <a:cs typeface="Calibri" charset="0"/>
+                      </a:endParaRPr>
+                    </a:p>
+                  </a:txBody>
+                  <a:tcPr marL="91440" marR="91440" marT="45720" marB="45720" anchor="ctr">
+                    <a:lnL w="6350" cap="flat" cmpd="sng" algn="ctr">
+                      <a:solidFill>
+                        <a:srgbClr val="DCD6CC"/>
+                      </a:solidFill>
+                      <a:prstDash val="solid"/>
+                      <a:round/>
+                      <a:headEnd type="none" w="med" len="med"/>
+                      <a:tailEnd type="none" w="med" len="med"/>
+                    </a:lnL>
+                    <a:lnR w="6350" cap="flat" cmpd="sng" algn="ctr">
+                      <a:solidFill>
+                        <a:srgbClr val="DCD6CC"/>
+                      </a:solidFill>
+                      <a:prstDash val="solid"/>
+                      <a:round/>
+                      <a:headEnd type="none" w="med" len="med"/>
+                      <a:tailEnd type="none" w="med" len="med"/>
+                    </a:lnR>
+                    <a:lnT w="6350" cap="flat" cmpd="sng" algn="ctr">
+                      <a:solidFill>
+                        <a:srgbClr val="DCD6CC"/>
+                      </a:solidFill>
+                      <a:prstDash val="solid"/>
+                      <a:round/>
+                      <a:headEnd type="none" w="med" len="med"/>
+                      <a:tailEnd type="none" w="med" len="med"/>
+                    </a:lnT>
+                    <a:lnB w="6350" cap="flat" cmpd="sng" algn="ctr">
+                      <a:solidFill>
+                        <a:srgbClr val="DCD6CC"/>
+                      </a:solidFill>
+                      <a:prstDash val="solid"/>
+                      <a:round/>
+                      <a:headEnd type="none" w="med" len="med"/>
+                      <a:tailEnd type="none" w="med" len="med"/>
+                    </a:lnB>
+                  </a:tcPr>
+                </a:tc>
+                <a:tc>
+                  <a:txBody>
+                    <a:bodyPr/>
+                    <a:lstStyle/>
+                    <a:p>
+                      <a:pPr algn="ctr" indent="0" marL="0">
+                        <a:buNone/>
+                      </a:pPr>
+                      <a:r>
+                        <a:rPr lang="en-US" sz="1050" dirty="0">
+                          <a:solidFill>
+                            <a:srgbClr val="2E2422"/>
+                          </a:solidFill>
+                          <a:latin typeface="Calibri" pitchFamily="34" charset="0"/>
+                          <a:ea typeface="Calibri" pitchFamily="34" charset="-122"/>
+                          <a:cs typeface="Calibri" pitchFamily="34" charset="-120"/>
+                        </a:rPr>
+                        <a:t>0.7554</a:t>
+                      </a:r>
+                      <a:endParaRPr lang="en-US" sz="1050" dirty="0">
+                        <a:latin typeface="Calibri" charset="0"/>
+                        <a:ea typeface="Calibri" charset="0"/>
+                        <a:cs typeface="Calibri" charset="0"/>
+                      </a:endParaRPr>
+                    </a:p>
+                  </a:txBody>
+                  <a:tcPr marL="91440" marR="91440" marT="45720" marB="45720" anchor="ctr">
+                    <a:lnL w="6350" cap="flat" cmpd="sng" algn="ctr">
+                      <a:solidFill>
+                        <a:srgbClr val="DCD6CC"/>
+                      </a:solidFill>
+                      <a:prstDash val="solid"/>
+                      <a:round/>
+                      <a:headEnd type="none" w="med" len="med"/>
+                      <a:tailEnd type="none" w="med" len="med"/>
+                    </a:lnL>
+                    <a:lnR w="6350" cap="flat" cmpd="sng" algn="ctr">
+                      <a:solidFill>
+                        <a:srgbClr val="DCD6CC"/>
+                      </a:solidFill>
+                      <a:prstDash val="solid"/>
+                      <a:round/>
+                      <a:headEnd type="none" w="med" len="med"/>
+                      <a:tailEnd type="none" w="med" len="med"/>
+                    </a:lnR>
+                    <a:lnT w="6350" cap="flat" cmpd="sng" algn="ctr">
+                      <a:solidFill>
+                        <a:srgbClr val="DCD6CC"/>
+                      </a:solidFill>
+                      <a:prstDash val="solid"/>
+                      <a:round/>
+                      <a:headEnd type="none" w="med" len="med"/>
+                      <a:tailEnd type="none" w="med" len="med"/>
+                    </a:lnT>
+                    <a:lnB w="6350" cap="flat" cmpd="sng" algn="ctr">
+                      <a:solidFill>
+                        <a:srgbClr val="DCD6CC"/>
+                      </a:solidFill>
+                      <a:prstDash val="solid"/>
+                      <a:round/>
+                      <a:headEnd type="none" w="med" len="med"/>
+                      <a:tailEnd type="none" w="med" len="med"/>
+                    </a:lnB>
+                  </a:tcPr>
+                </a:tc>
+                <a:tc>
+                  <a:txBody>
+                    <a:bodyPr/>
+                    <a:lstStyle/>
+                    <a:p>
+                      <a:pPr algn="ctr" indent="0" marL="0">
+                        <a:buNone/>
+                      </a:pPr>
+                      <a:r>
+                        <a:rPr lang="en-US" sz="1050" dirty="0">
+                          <a:solidFill>
+                            <a:srgbClr val="2E2422"/>
+                          </a:solidFill>
+                          <a:latin typeface="Calibri" pitchFamily="34" charset="0"/>
+                          <a:ea typeface="Calibri" pitchFamily="34" charset="-122"/>
+                          <a:cs typeface="Calibri" pitchFamily="34" charset="-120"/>
+                        </a:rPr>
+                        <a:t>0.7449</a:t>
+                      </a:r>
+                      <a:endParaRPr lang="en-US" sz="1050" dirty="0">
+                        <a:latin typeface="Calibri" charset="0"/>
+                        <a:ea typeface="Calibri" charset="0"/>
+                        <a:cs typeface="Calibri" charset="0"/>
+                      </a:endParaRPr>
+                    </a:p>
+                  </a:txBody>
+                  <a:tcPr marL="91440" marR="91440" marT="45720" marB="45720" anchor="ctr">
+                    <a:lnL w="6350" cap="flat" cmpd="sng" algn="ctr">
+                      <a:solidFill>
+                        <a:srgbClr val="DCD6CC"/>
+                      </a:solidFill>
+                      <a:prstDash val="solid"/>
+                      <a:round/>
+                      <a:headEnd type="none" w="med" len="med"/>
+                      <a:tailEnd type="none" w="med" len="med"/>
+                    </a:lnL>
+                    <a:lnR w="6350" cap="flat" cmpd="sng" algn="ctr">
+                      <a:solidFill>
+                        <a:srgbClr val="DCD6CC"/>
+                      </a:solidFill>
+                      <a:prstDash val="solid"/>
+                      <a:round/>
+                      <a:headEnd type="none" w="med" len="med"/>
+                      <a:tailEnd type="none" w="med" len="med"/>
+                    </a:lnR>
+                    <a:lnT w="6350" cap="flat" cmpd="sng" algn="ctr">
+                      <a:solidFill>
+                        <a:srgbClr val="DCD6CC"/>
+                      </a:solidFill>
+                      <a:prstDash val="solid"/>
+                      <a:round/>
+                      <a:headEnd type="none" w="med" len="med"/>
+                      <a:tailEnd type="none" w="med" len="med"/>
+                    </a:lnT>
+                    <a:lnB w="6350" cap="flat" cmpd="sng" algn="ctr">
+                      <a:solidFill>
+                        <a:srgbClr val="DCD6CC"/>
+                      </a:solidFill>
+                      <a:prstDash val="solid"/>
+                      <a:round/>
+                      <a:headEnd type="none" w="med" len="med"/>
+                      <a:tailEnd type="none" w="med" len="med"/>
+                    </a:lnB>
+                  </a:tcPr>
+                </a:tc>
+              </a:tr>
+              <a:tr h="306324">
+                <a:tc>
+                  <a:txBody>
+                    <a:bodyPr/>
+                    <a:lstStyle/>
+                    <a:p>
+                      <a:pPr algn="ctr" indent="0" marL="0">
+                        <a:buNone/>
+                      </a:pPr>
+                      <a:r>
+                        <a:rPr lang="en-US" sz="1050" dirty="0">
+                          <a:solidFill>
+                            <a:srgbClr val="2E2422"/>
+                          </a:solidFill>
+                          <a:latin typeface="Calibri" pitchFamily="34" charset="0"/>
+                          <a:ea typeface="Calibri" pitchFamily="34" charset="-122"/>
+                          <a:cs typeface="Calibri" pitchFamily="34" charset="-120"/>
+                        </a:rPr>
+                        <a:t>B2</a:t>
+                      </a:r>
+                      <a:endParaRPr lang="en-US" sz="1050" dirty="0">
+                        <a:latin typeface="Calibri" charset="0"/>
+                        <a:ea typeface="Calibri" charset="0"/>
+                        <a:cs typeface="Calibri" charset="0"/>
+                      </a:endParaRPr>
+                    </a:p>
+                  </a:txBody>
+                  <a:tcPr marL="91440" marR="91440" marT="45720" marB="45720" anchor="ctr">
+                    <a:lnL w="6350" cap="flat" cmpd="sng" algn="ctr">
+                      <a:solidFill>
+                        <a:srgbClr val="DCD6CC"/>
+                      </a:solidFill>
+                      <a:prstDash val="solid"/>
+                      <a:round/>
+                      <a:headEnd type="none" w="med" len="med"/>
+                      <a:tailEnd type="none" w="med" len="med"/>
+                    </a:lnL>
+                    <a:lnR w="6350" cap="flat" cmpd="sng" algn="ctr">
+                      <a:solidFill>
+                        <a:srgbClr val="DCD6CC"/>
+                      </a:solidFill>
+                      <a:prstDash val="solid"/>
+                      <a:round/>
+                      <a:headEnd type="none" w="med" len="med"/>
+                      <a:tailEnd type="none" w="med" len="med"/>
+                    </a:lnR>
+                    <a:lnT w="6350" cap="flat" cmpd="sng" algn="ctr">
+                      <a:solidFill>
+                        <a:srgbClr val="DCD6CC"/>
+                      </a:solidFill>
+                      <a:prstDash val="solid"/>
+                      <a:round/>
+                      <a:headEnd type="none" w="med" len="med"/>
+                      <a:tailEnd type="none" w="med" len="med"/>
+                    </a:lnT>
+                    <a:lnB w="6350" cap="flat" cmpd="sng" algn="ctr">
+                      <a:solidFill>
+                        <a:srgbClr val="DCD6CC"/>
+                      </a:solidFill>
+                      <a:prstDash val="solid"/>
+                      <a:round/>
+                      <a:headEnd type="none" w="med" len="med"/>
+                      <a:tailEnd type="none" w="med" len="med"/>
+                    </a:lnB>
+                  </a:tcPr>
+                </a:tc>
+                <a:tc>
+                  <a:txBody>
+                    <a:bodyPr/>
+                    <a:lstStyle/>
+                    <a:p>
+                      <a:pPr algn="ctr" indent="0" marL="0">
+                        <a:buNone/>
+                      </a:pPr>
+                      <a:r>
+                        <a:rPr lang="en-US" sz="1050" dirty="0">
+                          <a:solidFill>
+                            <a:srgbClr val="2E2422"/>
+                          </a:solidFill>
+                          <a:latin typeface="Calibri" pitchFamily="34" charset="0"/>
+                          <a:ea typeface="Calibri" pitchFamily="34" charset="-122"/>
+                          <a:cs typeface="Calibri" pitchFamily="34" charset="-120"/>
+                        </a:rPr>
+                        <a:t>0.8220</a:t>
+                      </a:r>
+                      <a:endParaRPr lang="en-US" sz="1050" dirty="0">
+                        <a:latin typeface="Calibri" charset="0"/>
+                        <a:ea typeface="Calibri" charset="0"/>
+                        <a:cs typeface="Calibri" charset="0"/>
+                      </a:endParaRPr>
+                    </a:p>
+                  </a:txBody>
+                  <a:tcPr marL="91440" marR="91440" marT="45720" marB="45720" anchor="ctr">
+                    <a:lnL w="6350" cap="flat" cmpd="sng" algn="ctr">
+                      <a:solidFill>
+                        <a:srgbClr val="DCD6CC"/>
+                      </a:solidFill>
+                      <a:prstDash val="solid"/>
+                      <a:round/>
+                      <a:headEnd type="none" w="med" len="med"/>
+                      <a:tailEnd type="none" w="med" len="med"/>
+                    </a:lnL>
+                    <a:lnR w="6350" cap="flat" cmpd="sng" algn="ctr">
+                      <a:solidFill>
+                        <a:srgbClr val="DCD6CC"/>
+                      </a:solidFill>
+                      <a:prstDash val="solid"/>
+                      <a:round/>
+                      <a:headEnd type="none" w="med" len="med"/>
+                      <a:tailEnd type="none" w="med" len="med"/>
+                    </a:lnR>
+                    <a:lnT w="6350" cap="flat" cmpd="sng" algn="ctr">
+                      <a:solidFill>
+                        <a:srgbClr val="DCD6CC"/>
+                      </a:solidFill>
+                      <a:prstDash val="solid"/>
+                      <a:round/>
+                      <a:headEnd type="none" w="med" len="med"/>
+                      <a:tailEnd type="none" w="med" len="med"/>
+                    </a:lnT>
+                    <a:lnB w="6350" cap="flat" cmpd="sng" algn="ctr">
+                      <a:solidFill>
+                        <a:srgbClr val="DCD6CC"/>
+                      </a:solidFill>
+                      <a:prstDash val="solid"/>
+                      <a:round/>
+                      <a:headEnd type="none" w="med" len="med"/>
+                      <a:tailEnd type="none" w="med" len="med"/>
+                    </a:lnB>
+                  </a:tcPr>
+                </a:tc>
+                <a:tc>
+                  <a:txBody>
+                    <a:bodyPr/>
+                    <a:lstStyle/>
+                    <a:p>
+                      <a:pPr algn="ctr" indent="0" marL="0">
+                        <a:buNone/>
+                      </a:pPr>
+                      <a:r>
+                        <a:rPr lang="en-US" sz="1050" dirty="0">
+                          <a:solidFill>
+                            <a:srgbClr val="5F7F6E"/>
+                          </a:solidFill>
+                          <a:latin typeface="Calibri" pitchFamily="34" charset="0"/>
+                          <a:ea typeface="Calibri" pitchFamily="34" charset="-122"/>
+                          <a:cs typeface="Calibri" pitchFamily="34" charset="-120"/>
+                        </a:rPr>
+                        <a:t>0.8507</a:t>
+                      </a:r>
+                      <a:endParaRPr lang="en-US" sz="1050" dirty="0">
+                        <a:latin typeface="Calibri" charset="0"/>
+                        <a:ea typeface="Calibri" charset="0"/>
+                        <a:cs typeface="Calibri" charset="0"/>
+                      </a:endParaRPr>
+                    </a:p>
+                  </a:txBody>
+                  <a:tcPr marL="91440" marR="91440" marT="45720" marB="45720" anchor="ctr">
+                    <a:lnL w="6350" cap="flat" cmpd="sng" algn="ctr">
+                      <a:solidFill>
+                        <a:srgbClr val="DCD6CC"/>
+                      </a:solidFill>
+                      <a:prstDash val="solid"/>
+                      <a:round/>
+                      <a:headEnd type="none" w="med" len="med"/>
+                      <a:tailEnd type="none" w="med" len="med"/>
+                    </a:lnL>
+                    <a:lnR w="6350" cap="flat" cmpd="sng" algn="ctr">
+                      <a:solidFill>
+                        <a:srgbClr val="DCD6CC"/>
+                      </a:solidFill>
+                      <a:prstDash val="solid"/>
+                      <a:round/>
+                      <a:headEnd type="none" w="med" len="med"/>
+                      <a:tailEnd type="none" w="med" len="med"/>
+                    </a:lnR>
+                    <a:lnT w="6350" cap="flat" cmpd="sng" algn="ctr">
+                      <a:solidFill>
+                        <a:srgbClr val="DCD6CC"/>
+                      </a:solidFill>
+                      <a:prstDash val="solid"/>
+                      <a:round/>
+                      <a:headEnd type="none" w="med" len="med"/>
+                      <a:tailEnd type="none" w="med" len="med"/>
+                    </a:lnT>
+                    <a:lnB w="6350" cap="flat" cmpd="sng" algn="ctr">
+                      <a:solidFill>
+                        <a:srgbClr val="DCD6CC"/>
+                      </a:solidFill>
+                      <a:prstDash val="solid"/>
+                      <a:round/>
+                      <a:headEnd type="none" w="med" len="med"/>
+                      <a:tailEnd type="none" w="med" len="med"/>
+                    </a:lnB>
+                  </a:tcPr>
+                </a:tc>
+                <a:tc>
+                  <a:txBody>
+                    <a:bodyPr/>
+                    <a:lstStyle/>
+                    <a:p>
+                      <a:pPr algn="ctr" indent="0" marL="0">
+                        <a:buNone/>
+                      </a:pPr>
+                      <a:r>
+                        <a:rPr lang="en-US" sz="1050" dirty="0">
+                          <a:solidFill>
+                            <a:srgbClr val="2E2422"/>
+                          </a:solidFill>
+                          <a:latin typeface="Calibri" pitchFamily="34" charset="0"/>
+                          <a:ea typeface="Calibri" pitchFamily="34" charset="-122"/>
+                          <a:cs typeface="Calibri" pitchFamily="34" charset="-120"/>
+                        </a:rPr>
+                        <a:t>0.7951</a:t>
+                      </a:r>
+                      <a:endParaRPr lang="en-US" sz="1050" dirty="0">
+                        <a:latin typeface="Calibri" charset="0"/>
+                        <a:ea typeface="Calibri" charset="0"/>
+                        <a:cs typeface="Calibri" charset="0"/>
+                      </a:endParaRPr>
+                    </a:p>
+                  </a:txBody>
+                  <a:tcPr marL="91440" marR="91440" marT="45720" marB="45720" anchor="ctr">
+                    <a:lnL w="6350" cap="flat" cmpd="sng" algn="ctr">
+                      <a:solidFill>
+                        <a:srgbClr val="DCD6CC"/>
+                      </a:solidFill>
+                      <a:prstDash val="solid"/>
+                      <a:round/>
+                      <a:headEnd type="none" w="med" len="med"/>
+                      <a:tailEnd type="none" w="med" len="med"/>
+                    </a:lnL>
+                    <a:lnR w="6350" cap="flat" cmpd="sng" algn="ctr">
+                      <a:solidFill>
+                        <a:srgbClr val="DCD6CC"/>
+                      </a:solidFill>
+                      <a:prstDash val="solid"/>
+                      <a:round/>
+                      <a:headEnd type="none" w="med" len="med"/>
+                      <a:tailEnd type="none" w="med" len="med"/>
+                    </a:lnR>
+                    <a:lnT w="6350" cap="flat" cmpd="sng" algn="ctr">
+                      <a:solidFill>
+                        <a:srgbClr val="DCD6CC"/>
+                      </a:solidFill>
+                      <a:prstDash val="solid"/>
+                      <a:round/>
+                      <a:headEnd type="none" w="med" len="med"/>
+                      <a:tailEnd type="none" w="med" len="med"/>
+                    </a:lnT>
+                    <a:lnB w="6350" cap="flat" cmpd="sng" algn="ctr">
+                      <a:solidFill>
+                        <a:srgbClr val="DCD6CC"/>
+                      </a:solidFill>
+                      <a:prstDash val="solid"/>
+                      <a:round/>
+                      <a:headEnd type="none" w="med" len="med"/>
+                      <a:tailEnd type="none" w="med" len="med"/>
+                    </a:lnB>
+                  </a:tcPr>
+                </a:tc>
+                <a:tc>
+                  <a:txBody>
+                    <a:bodyPr/>
+                    <a:lstStyle/>
+                    <a:p>
+                      <a:pPr algn="ctr" indent="0" marL="0">
+                        <a:buNone/>
+                      </a:pPr>
+                      <a:r>
+                        <a:rPr lang="en-US" sz="1050" dirty="0">
+                          <a:solidFill>
+                            <a:srgbClr val="2E2422"/>
+                          </a:solidFill>
+                          <a:latin typeface="Calibri" pitchFamily="34" charset="0"/>
+                          <a:ea typeface="Calibri" pitchFamily="34" charset="-122"/>
+                          <a:cs typeface="Calibri" pitchFamily="34" charset="-120"/>
+                        </a:rPr>
+                        <a:t>0.8122</a:t>
+                      </a:r>
+                      <a:endParaRPr lang="en-US" sz="1050" dirty="0">
+                        <a:latin typeface="Calibri" charset="0"/>
+                        <a:ea typeface="Calibri" charset="0"/>
+                        <a:cs typeface="Calibri" charset="0"/>
+                      </a:endParaRPr>
+                    </a:p>
+                  </a:txBody>
+                  <a:tcPr marL="91440" marR="91440" marT="45720" marB="45720" anchor="ctr">
+                    <a:lnL w="6350" cap="flat" cmpd="sng" algn="ctr">
+                      <a:solidFill>
+                        <a:srgbClr val="DCD6CC"/>
+                      </a:solidFill>
+                      <a:prstDash val="solid"/>
+                      <a:round/>
+                      <a:headEnd type="none" w="med" len="med"/>
+                      <a:tailEnd type="none" w="med" len="med"/>
+                    </a:lnL>
+                    <a:lnR w="6350" cap="flat" cmpd="sng" algn="ctr">
+                      <a:solidFill>
+                        <a:srgbClr val="DCD6CC"/>
+                      </a:solidFill>
+                      <a:prstDash val="solid"/>
+                      <a:round/>
+                      <a:headEnd type="none" w="med" len="med"/>
+                      <a:tailEnd type="none" w="med" len="med"/>
+                    </a:lnR>
+                    <a:lnT w="6350" cap="flat" cmpd="sng" algn="ctr">
+                      <a:solidFill>
+                        <a:srgbClr val="DCD6CC"/>
+                      </a:solidFill>
+                      <a:prstDash val="solid"/>
+                      <a:round/>
+                      <a:headEnd type="none" w="med" len="med"/>
+                      <a:tailEnd type="none" w="med" len="med"/>
+                    </a:lnT>
+                    <a:lnB w="6350" cap="flat" cmpd="sng" algn="ctr">
+                      <a:solidFill>
+                        <a:srgbClr val="DCD6CC"/>
+                      </a:solidFill>
+                      <a:prstDash val="solid"/>
+                      <a:round/>
+                      <a:headEnd type="none" w="med" len="med"/>
+                      <a:tailEnd type="none" w="med" len="med"/>
+                    </a:lnB>
+                  </a:tcPr>
+                </a:tc>
+              </a:tr>
+            </a:tbl>
+          </a:graphicData>
+        </a:graphic>
+      </p:graphicFrame>
       <p:sp>
         <p:nvSpPr>
-          <p:cNvPr id="7" name="Text 4"/>
+          <p:cNvPr id="8" name="Text 4"/>
           <p:cNvSpPr txBox="1"/>
           <p:nvPr/>
         </p:nvSpPr>
         <p:spPr>
           <a:xfrm>
-            <a:off x="8046720" y="2176272"/>
-            <a:ext cx="3291840" cy="1463040"/>
+            <a:off x="6629400" y="4169664"/>
+            <a:ext cx="4937760" cy="566928"/>
           </a:xfrm>
           <a:prstGeom prst="rect">
             <a:avLst/>
@@ -32691,12 +35043,12 @@
           <a:p>
             <a:pPr indent="0" marL="0">
               <a:lnSpc>
-                <a:spcPts val="1500"/>
+                <a:spcPts val="1300"/>
               </a:lnSpc>
               <a:buNone/>
             </a:pPr>
             <a:r>
-              <a:rPr lang="en-US" sz="1100" dirty="0">
+              <a:rPr lang="en-US" sz="1000" dirty="0">
                 <a:solidFill>
                   <a:srgbClr val="7A6A63"/>
                 </a:solidFill>
@@ -32704,28 +35056,19 @@
                 <a:ea typeface="Calibri" pitchFamily="34" charset="-122"/>
                 <a:cs typeface="Calibri" pitchFamily="34" charset="-120"/>
               </a:rPr>
-              <a:t>① LS에서는 시정촌 면적만으로도 0.8214가 나온다. USGS 확률값(0.7969)보다 높다.</a:t>
+              <a:t>83 = AUC가 정의되는 5개 지진 전부.  66 = 그중 음성이 3개 이상인 세 개(돗토리 9 · 구마모토 3 · 훗카이도 4).</a:t>
             </a:r>
-            <a:endParaRPr lang="en-US" sz="1100" dirty="0"/>
+            <a:endParaRPr lang="en-US" sz="1000" dirty="0"/>
           </a:p>
           <a:p>
             <a:pPr indent="0" marL="0">
               <a:lnSpc>
-                <a:spcPts val="1500"/>
-              </a:lnSpc>
-              <a:buNone/>
-            </a:pPr>
-            <a:endParaRPr lang="en-US" sz="1100" dirty="0"/>
-          </a:p>
-          <a:p>
-            <a:pPr indent="0" marL="0">
-              <a:lnSpc>
-                <a:spcPts val="1500"/>
+                <a:spcPts val="1300"/>
               </a:lnSpc>
               <a:buNone/>
             </a:pPr>
             <a:r>
-              <a:rPr lang="en-US" sz="1100" dirty="0">
+              <a:rPr lang="en-US" sz="1000" dirty="0">
                 <a:solidFill>
                   <a:srgbClr val="7A6A63"/>
                 </a:solidFill>
@@ -32733,68 +35076,26 @@
                 <a:ea typeface="Calibri" pitchFamily="34" charset="-122"/>
                 <a:cs typeface="Calibri" pitchFamily="34" charset="-120"/>
               </a:rPr>
-              <a:t>② 그런데 LQ에서는 면적 단독이 0.5470으로 우연 수준이다. 그런데도 π와 더하면 0.7154 → 0.7698로 오른다.</a:t>
+              <a:t>나머지 둘은 음성이 2개뿐이라 사후가 만점을 받기 쉽다.</a:t>
             </a:r>
-            <a:endParaRPr lang="en-US" sz="1100" dirty="0"/>
+            <a:endParaRPr lang="en-US" sz="1000" dirty="0"/>
           </a:p>
         </p:txBody>
       </p:sp>
       <p:sp>
         <p:nvSpPr>
-          <p:cNvPr id="8" name="Text 5"/>
-          <p:cNvSpPr txBox="1"/>
-          <p:nvPr/>
-        </p:nvSpPr>
-        <p:spPr>
-          <a:xfrm>
-            <a:off x="8046720" y="3840480"/>
-            <a:ext cx="3291840" cy="777240"/>
-          </a:xfrm>
-          <a:prstGeom prst="rect">
-            <a:avLst/>
-          </a:prstGeom>
-          <a:noFill/>
-          <a:ln/>
-        </p:spPr>
-        <p:txBody>
-          <a:bodyPr wrap="square" lIns="0" tIns="0" rIns="0" bIns="0" rtlCol="0" anchor="ctr"/>
-          <a:lstStyle/>
-          <a:p>
-            <a:pPr indent="0" marL="0">
-              <a:lnSpc>
-                <a:spcPts val="1500"/>
-              </a:lnSpc>
-              <a:buNone/>
-            </a:pPr>
-            <a:r>
-              <a:rPr lang="en-US" sz="1100" b="1" dirty="0">
-                <a:solidFill>
-                  <a:srgbClr val="B85042"/>
-                </a:solidFill>
-                <a:latin typeface="Calibri" pitchFamily="34" charset="0"/>
-                <a:ea typeface="Calibri" pitchFamily="34" charset="-122"/>
-                <a:cs typeface="Calibri" pitchFamily="34" charset="-120"/>
-              </a:rPr>
-              <a:t>면적이 라벨을 직접 켜는 것이 아니라, λ = π × k 라는 유도식이 실제로 작동한다는 뜻이다.</a:t>
-            </a:r>
-            <a:endParaRPr lang="en-US" sz="1100" dirty="0"/>
-          </a:p>
-        </p:txBody>
-      </p:sp>
-      <p:sp>
-        <p:nvSpPr>
-          <p:cNvPr id="9" name="Shape 6"/>
+          <p:cNvPr id="9" name="Shape 5"/>
           <p:cNvSpPr/>
           <p:nvPr/>
         </p:nvSpPr>
         <p:spPr>
           <a:xfrm>
-            <a:off x="640080" y="4956048"/>
-            <a:ext cx="10927080" cy="1143000"/>
+            <a:off x="640080" y="5376672"/>
+            <a:ext cx="10927080" cy="914400"/>
           </a:xfrm>
           <a:prstGeom prst="roundRect">
             <a:avLst>
-              <a:gd name="adj" fmla="val 7200"/>
+              <a:gd name="adj" fmla="val 9000"/>
             </a:avLst>
           </a:prstGeom>
           <a:solidFill>
@@ -32810,14 +35111,14 @@
       </p:sp>
       <p:sp>
         <p:nvSpPr>
-          <p:cNvPr id="10" name="Text 7"/>
+          <p:cNvPr id="10" name="Text 6"/>
           <p:cNvSpPr txBox="1"/>
           <p:nvPr/>
         </p:nvSpPr>
         <p:spPr>
           <a:xfrm>
-            <a:off x="914400" y="5120640"/>
-            <a:ext cx="4937760" cy="310896"/>
+            <a:off x="914400" y="5504688"/>
+            <a:ext cx="10378440" cy="310896"/>
           </a:xfrm>
           <a:prstGeom prst="rect">
             <a:avLst/>
@@ -32833,30 +35134,30 @@
               <a:buNone/>
             </a:pPr>
             <a:r>
-              <a:rPr lang="en-US" sz="1400" b="1" dirty="0">
+              <a:rPr lang="en-US" sz="1100" dirty="0">
                 <a:solidFill>
-                  <a:srgbClr val="B85042"/>
+                  <a:srgbClr val="CFC4BC"/>
                 </a:solidFill>
-                <a:latin typeface="Cambria" pitchFamily="34" charset="0"/>
-                <a:ea typeface="Cambria" pitchFamily="34" charset="-122"/>
-                <a:cs typeface="Cambria" pitchFamily="34" charset="-120"/>
+                <a:latin typeface="Calibri" pitchFamily="34" charset="0"/>
+                <a:ea typeface="Calibri" pitchFamily="34" charset="-122"/>
+                <a:cs typeface="Calibri" pitchFamily="34" charset="-120"/>
               </a:rPr>
-              <a:t>산지 비율과 시정촌 면적의 상관 = 0.53</a:t>
+              <a:t>① 면적 항이 산지 정보를 이미 담고 있다 — corr(log k, 산지 비율) = 0.53. A2가 정답으로 배워 도달한 사전(0.8341)이 면적 항이 구조만으로 얻은 사전(0.8400)과 같은 자리다.</a:t>
             </a:r>
-            <a:endParaRPr lang="en-US" sz="1400" dirty="0"/>
+            <a:endParaRPr lang="en-US" sz="1100" dirty="0"/>
           </a:p>
         </p:txBody>
       </p:sp>
       <p:sp>
         <p:nvSpPr>
-          <p:cNvPr id="11" name="Text 8"/>
+          <p:cNvPr id="11" name="Text 7"/>
           <p:cNvSpPr txBox="1"/>
           <p:nvPr/>
         </p:nvSpPr>
         <p:spPr>
           <a:xfrm>
-            <a:off x="914400" y="5486400"/>
-            <a:ext cx="10378440" cy="502920"/>
+            <a:off x="914400" y="5870448"/>
+            <a:ext cx="10378440" cy="310896"/>
           </a:xfrm>
           <a:prstGeom prst="rect">
             <a:avLst/>
@@ -32869,23 +35170,20 @@
           <a:lstStyle/>
           <a:p>
             <a:pPr indent="0" marL="0">
-              <a:lnSpc>
-                <a:spcPts val="1500"/>
-              </a:lnSpc>
               <a:buNone/>
             </a:pPr>
             <a:r>
-              <a:rPr lang="en-US" sz="1150" dirty="0">
+              <a:rPr lang="en-US" sz="1100" b="1" dirty="0">
                 <a:solidFill>
-                  <a:srgbClr val="CFC4BC"/>
+                  <a:srgbClr val="B85042"/>
                 </a:solidFill>
                 <a:latin typeface="Calibri" pitchFamily="34" charset="0"/>
                 <a:ea typeface="Calibri" pitchFamily="34" charset="-122"/>
                 <a:cs typeface="Calibri" pitchFamily="34" charset="-120"/>
               </a:rPr>
-              <a:t>두 변수가 같은 것(산이 얼마나 넓게 있는가)을 다른 방식으로 재고 있다. 실제로 A2가 정답을 배워 도달한 prior(0.8341)가 면적 항이 구조만으로 얻은 prior(0.8400)와 거의 같은 자리다 — 서로 다른 길로 같은 정보에 닿았다.</a:t>
+              <a:t>② 우도는 LS 순위에 기여하지 않는다 — B0은 음성이 충분한 세 지진에서 사전 = 사후(둘 다 0.8177, 차이 0.0000)이고, A 계열에서는 오히려 깎는다(A0 −0.075).</a:t>
             </a:r>
-            <a:endParaRPr lang="en-US" sz="1150" dirty="0"/>
+            <a:endParaRPr lang="en-US" sz="1100" dirty="0"/>
           </a:p>
         </p:txBody>
       </p:sp>

--- a/results/deck/LOEO_발표자료.pptx
+++ b/results/deck/LOEO_발표자료.pptx
@@ -6014,7 +6014,7 @@
                 <a:ea typeface="Cambria" pitchFamily="34" charset="-122"/>
                 <a:cs typeface="Cambria" pitchFamily="34" charset="-120"/>
               </a:rPr>
-              <a:t>USGS 값을 쓰는 방법이 틀려 있었다</a:t>
+              <a:t>USGS 값에 칸 수를 곱해야 한다</a:t>
             </a:r>
             <a:endParaRPr lang="en-US" sz="1900" dirty="0"/>
           </a:p>
@@ -6053,7 +6053,7 @@
                 <a:ea typeface="Calibri" pitchFamily="34" charset="-122"/>
                 <a:cs typeface="Calibri" pitchFamily="34" charset="-120"/>
               </a:rPr>
-              <a:t>고치니 0.797 → 0.840 으로 올랐다. 학습을 하나도 안 하고, 엑셀 열 두 개를 곱해서.</a:t>
+              <a:t>단위를 맞추니 0.797 → 0.840 으로 올랐다. 학습을 하나도 안 하고, 엑셀 열 두 개를 곱해서.</a:t>
             </a:r>
             <a:endParaRPr lang="en-US" sz="1350" dirty="0"/>
           </a:p>
@@ -7779,7 +7779,7 @@
                 <a:ea typeface="Cambria" pitchFamily="34" charset="-122"/>
                 <a:cs typeface="Cambria" pitchFamily="34" charset="-120"/>
               </a:rPr>
-              <a:t>발견 ① USGS 값을 잘못 쓰고 있었다</a:t>
+              <a:t>발견 ① USGS 값은 확률이 아니라 면적 비율이다</a:t>
             </a:r>
             <a:endParaRPr lang="en-US" sz="3000" dirty="0"/>
           </a:p>
@@ -7818,7 +7818,7 @@
                 <a:ea typeface="Calibri" pitchFamily="34" charset="-122"/>
                 <a:cs typeface="Calibri" pitchFamily="34" charset="-120"/>
               </a:rPr>
-              <a:t>그 값은 “확률”이 아니라 “격자 한 칸에서 산사태가 덮는 면적 비율”이다</a:t>
+              <a:t>“격자 한 칸에서 산사태가 덮는 면적의 비율”이고, 우리가 맞히려는 것과 단위가 다르다</a:t>
             </a:r>
             <a:endParaRPr lang="en-US" sz="1450" dirty="0"/>
           </a:p>
